--- a/skills/dsh-academic-ppt/references/templates/experiment.pptx
+++ b/skills/dsh-academic-ppt/references/templates/experiment.pptx
@@ -512,7 +512,7 @@
 内容职责：独立样本单位；重复测量结构；纳入排除与缺失值。
 建议讲述时间只是排练起点，按实际内容调整。
 参考文献（完整题名）
-T1 · Full article title: connecting decision models, experimental evidence and independent validation in crop cultivation · 期刊与卷页（替换） · 2026 · 待替换 · 书目占位，非真实文献</a:t>
+T1 · Full article title: connecting decision models, experimental evidence and independent validation in crop cultivation · 期刊与卷页（替换） · 2026 · 书目占位；图表均为合成示例 · 书目占位，非真实文献</a:t>
             </a:r>
             <a:endParaRPr lang="en-US" dirty="0"/>
           </a:p>
@@ -600,12 +600,12 @@
           <a:p>
             <a:r>
               <a:rPr lang="en-US" dirty="0"/>
-              <a:t>本页为原创学术版式模板，ID experiment-factorial。用原生表格记录因子水平与处理，右侧解释随机化和交互作用。
+              <a:t>本页为原创学术版式模板，ID experiment-factorial。因子表与随机化条件并列，主效应和交互作用的解释作为宽带紧接表底。
 全部文本为填写指引，图表值是合成演示值，不是任何研究结果。使用前替换论文、数据、原图与来源。
 内容职责：随机化与重复；效应解释。
 建议讲述时间只是排练起点，按实际内容调整。
 参考文献（完整题名）
-T1 · Full article title: connecting decision models, experimental evidence and independent validation in crop cultivation · 期刊与卷页（替换） · 2026 · 待替换 · 书目占位，非真实文献</a:t>
+T1 · Full article title: connecting decision models, experimental evidence and independent validation in crop cultivation · 期刊与卷页（替换） · 2026 · 书目占位；图表均为合成示例 · 书目占位，非真实文献</a:t>
             </a:r>
             <a:endParaRPr lang="en-US" dirty="0"/>
           </a:p>
@@ -698,7 +698,7 @@
 内容职责：划分单位与留出条件；信息泄漏检查。
 建议讲述时间只是排练起点，按实际内容调整。
 参考文献（完整题名）
-T1 · Full article title: connecting decision models, experimental evidence and independent validation in crop cultivation · 期刊与卷页（替换） · 2026 · 待替换 · 书目占位，非真实文献</a:t>
+T1 · Full article title: connecting decision models, experimental evidence and independent validation in crop cultivation · 期刊与卷页（替换） · 2026 · 书目占位；图表均为合成示例 · 书目占位，非真实文献</a:t>
             </a:r>
             <a:endParaRPr lang="en-US" dirty="0"/>
           </a:p>
@@ -786,12 +786,12 @@
           <a:p>
             <a:r>
               <a:rPr lang="en-US" dirty="0"/>
-              <a:t>本页为原创学术版式模板，ID experiment-baseline-controls。共同条件用表格对齐，额外信息、算力与调参预算在侧栏说明。
+              <a:t>本页为原创学术版式模板，ID experiment-baseline-controls。共同条件用表格对齐，右栏交代预算；紧接表底的宽解释区区分新增信息与结构贡献。
 全部文本为填写指引，图表值是合成演示值，不是任何研究结果。使用前替换论文、数据、原图与来源。
 内容职责：共同预算；额外信息。
 建议讲述时间只是排练起点，按实际内容调整。
 参考文献（完整题名）
-T1 · Full article title: connecting decision models, experimental evidence and independent validation in crop cultivation · 期刊与卷页（替换） · 2026 · 待替换 · 书目占位，非真实文献</a:t>
+T1 · Full article title: connecting decision models, experimental evidence and independent validation in crop cultivation · 期刊与卷页（替换） · 2026 · 书目占位；图表均为合成示例 · 书目占位，非真实文献</a:t>
             </a:r>
             <a:endParaRPr lang="en-US" dirty="0"/>
           </a:p>
@@ -884,7 +884,7 @@
 内容职责：校准与误差；分析单位。
 建议讲述时间只是排练起点，按实际内容调整。
 参考文献（完整题名）
-T1 · Full article title: connecting decision models, experimental evidence and independent validation in crop cultivation · 期刊与卷页（替换） · 2026 · 待替换 · 书目占位，非真实文献</a:t>
+T1 · Full article title: connecting decision models, experimental evidence and independent validation in crop cultivation · 期刊与卷页（替换） · 2026 · 书目占位；图表均为合成示例 · 书目占位，非真实文献</a:t>
             </a:r>
             <a:endParaRPr lang="en-US" dirty="0"/>
           </a:p>
@@ -977,7 +977,7 @@
 内容职责：训练条件；测试条件；复现材料。
 建议讲述时间只是排练起点，按实际内容调整。
 参考文献（完整题名）
-T1 · Full article title: connecting decision models, experimental evidence and independent validation in crop cultivation · 期刊与卷页（替换） · 2026 · 待替换 · 书目占位，非真实文献</a:t>
+T1 · Full article title: connecting decision models, experimental evidence and independent validation in crop cultivation · 期刊与卷页（替换） · 2026 · 书目占位；图表均为合成示例 · 书目占位，非真实文献</a:t>
             </a:r>
             <a:endParaRPr lang="en-US" dirty="0"/>
           </a:p>
@@ -1421,14 +1421,14 @@
       </p:sp>
       <p:sp>
         <p:nvSpPr>
-          <p:cNvPr id="4" name="T13/kicker"/>
-          <p:cNvSpPr/>
-          <p:nvPr/>
-        </p:nvSpPr>
-        <p:spPr>
-          <a:xfrm>
-            <a:off x="457200" y="152400"/>
-            <a:ext cx="11277600" cy="190500"/>
+          <p:cNvPr id="4" name="T13/title"/>
+          <p:cNvSpPr/>
+          <p:nvPr/>
+        </p:nvSpPr>
+        <p:spPr>
+          <a:xfrm>
+            <a:off x="457200" y="209550"/>
+            <a:ext cx="11277600" cy="438150"/>
           </a:xfrm>
           <a:prstGeom prst="rect">
             <a:avLst/>
@@ -1442,54 +1442,12 @@
           <a:p>
             <a:pPr algn="l" indent="0" marL="0">
               <a:lnSpc>
-                <a:spcPts val="1320"/>
+                <a:spcPts val="3360"/>
               </a:lnSpc>
               <a:buNone/>
             </a:pPr>
             <a:r>
-              <a:rPr lang="zh-CN" altLang="en-US" sz="1200" dirty="0">
-                <a:solidFill>
-                  <a:srgbClr val="515B68"/>
-                </a:solidFill>
-                <a:latin typeface="Noto Sans CJK SC" pitchFamily="34" charset="0"/>
-                <a:ea typeface="Noto Sans CJK SC" pitchFamily="34" charset="-122"/>
-                <a:cs typeface="Noto Sans CJK SC" pitchFamily="34" charset="-120"/>
-              </a:rPr>
-              <a:t>结构模板 / 占位说明与合成数据</a:t>
-            </a:r>
-            <a:endParaRPr lang="zh-CN" sz="1200" dirty="0"/>
-          </a:p>
-        </p:txBody>
-      </p:sp>
-      <p:sp>
-        <p:nvSpPr>
-          <p:cNvPr id="5" name="T13/title"/>
-          <p:cNvSpPr/>
-          <p:nvPr/>
-        </p:nvSpPr>
-        <p:spPr>
-          <a:xfrm>
-            <a:off x="457200" y="381000"/>
-            <a:ext cx="11277600" cy="400050"/>
-          </a:xfrm>
-          <a:prstGeom prst="rect">
-            <a:avLst/>
-          </a:prstGeom>
-          <a:noFill/>
-          <a:ln/>
-        </p:spPr>
-        <p:txBody>
-          <a:bodyPr wrap="none" lIns="0" tIns="0" rIns="0" bIns="0" rtlCol="0" anchor="t"/>
-          <a:lstStyle/>
-          <a:p>
-            <a:pPr algn="l" indent="0" marL="0">
-              <a:lnSpc>
-                <a:spcPts val="2856"/>
-              </a:lnSpc>
-              <a:buNone/>
-            </a:pPr>
-            <a:r>
-              <a:rPr lang="zh-CN" altLang="en-US" sz="2550" b="1" dirty="0">
+              <a:rPr lang="zh-CN" altLang="en-US" sz="3000" b="1" dirty="0">
                 <a:solidFill>
                   <a:srgbClr val="1C2430"/>
                 </a:solidFill>
@@ -1499,26 +1457,49 @@
               </a:rPr>
               <a:t>样本单位与重复测量</a:t>
             </a:r>
-            <a:endParaRPr lang="zh-CN" sz="2550" dirty="0"/>
+            <a:endParaRPr lang="zh-CN" sz="3000" dirty="0"/>
           </a:p>
         </p:txBody>
       </p:sp>
       <p:sp>
         <p:nvSpPr>
-          <p:cNvPr id="6" name="T13/header-rule"/>
-          <p:cNvSpPr/>
-          <p:nvPr/>
-        </p:nvSpPr>
-        <p:spPr>
-          <a:xfrm>
-            <a:off x="457200" y="876300"/>
+          <p:cNvPr id="5" name="T13/header-rule"/>
+          <p:cNvSpPr/>
+          <p:nvPr/>
+        </p:nvSpPr>
+        <p:spPr>
+          <a:xfrm>
+            <a:off x="457200" y="752475"/>
             <a:ext cx="11277600" cy="0"/>
           </a:xfrm>
           <a:prstGeom prst="line">
             <a:avLst/>
           </a:prstGeom>
           <a:noFill/>
-          <a:ln w="11430">
+          <a:ln w="10478">
+            <a:solidFill>
+              <a:srgbClr val="BEC8D4"/>
+            </a:solidFill>
+            <a:prstDash val="solid"/>
+          </a:ln>
+        </p:spPr>
+      </p:sp>
+      <p:sp>
+        <p:nvSpPr>
+          <p:cNvPr id="6" name="T13/header-accent"/>
+          <p:cNvSpPr/>
+          <p:nvPr/>
+        </p:nvSpPr>
+        <p:spPr>
+          <a:xfrm>
+            <a:off x="457200" y="752475"/>
+            <a:ext cx="704850" cy="0"/>
+          </a:xfrm>
+          <a:prstGeom prst="line">
+            <a:avLst/>
+          </a:prstGeom>
+          <a:noFill/>
+          <a:ln w="28575">
             <a:solidFill>
               <a:srgbClr val="173C70"/>
             </a:solidFill>
@@ -1534,7 +1515,7 @@
         </p:nvSpPr>
         <p:spPr>
           <a:xfrm>
-            <a:off x="2533650" y="2171700"/>
+            <a:off x="2533650" y="2017824"/>
             <a:ext cx="590550" cy="0"/>
           </a:xfrm>
           <a:prstGeom prst="line">
@@ -1558,7 +1539,7 @@
         </p:nvSpPr>
         <p:spPr>
           <a:xfrm>
-            <a:off x="5200650" y="2171700"/>
+            <a:off x="5200650" y="2017824"/>
             <a:ext cx="590550" cy="0"/>
           </a:xfrm>
           <a:prstGeom prst="line">
@@ -1582,8 +1563,8 @@
         </p:nvSpPr>
         <p:spPr>
           <a:xfrm>
-            <a:off x="4162425" y="2705100"/>
-            <a:ext cx="0" cy="628650"/>
+            <a:off x="4162425" y="2571750"/>
+            <a:ext cx="0" cy="652844"/>
           </a:xfrm>
           <a:prstGeom prst="line">
             <a:avLst/>
@@ -1606,14 +1587,14 @@
         </p:nvSpPr>
         <p:spPr>
           <a:xfrm>
-            <a:off x="457200" y="1638300"/>
-            <a:ext cx="2076450" cy="1066800"/>
+            <a:off x="457200" y="1463897"/>
+            <a:ext cx="2076450" cy="1107853"/>
           </a:xfrm>
           <a:prstGeom prst="rect">
             <a:avLst/>
           </a:prstGeom>
           <a:solidFill>
-            <a:srgbClr val="FFFFFF"/>
+            <a:srgbClr val="F0F3F6"/>
           </a:solidFill>
           <a:ln w="11430">
             <a:solidFill>
@@ -1631,7 +1612,7 @@
         </p:nvSpPr>
         <p:spPr>
           <a:xfrm>
-            <a:off x="457200" y="1638300"/>
+            <a:off x="457200" y="1463897"/>
             <a:ext cx="2076450" cy="0"/>
           </a:xfrm>
           <a:prstGeom prst="line">
@@ -1640,7 +1621,7 @@
           <a:noFill/>
           <a:ln w="19050">
             <a:solidFill>
-              <a:srgbClr val="173C70"/>
+              <a:srgbClr val="536A7A"/>
             </a:solidFill>
             <a:prstDash val="solid"/>
           </a:ln>
@@ -1654,7 +1635,7 @@
         </p:nvSpPr>
         <p:spPr>
           <a:xfrm>
-            <a:off x="571500" y="1733550"/>
+            <a:off x="571500" y="1559147"/>
             <a:ext cx="1847850" cy="266700"/>
           </a:xfrm>
           <a:prstGeom prst="rect">
@@ -1676,7 +1657,7 @@
             <a:r>
               <a:rPr lang="zh-CN" altLang="en-US" sz="1800" b="1" dirty="0">
                 <a:solidFill>
-                  <a:srgbClr val="173C70"/>
+                  <a:srgbClr val="536A7A"/>
                 </a:solidFill>
                 <a:latin typeface="Noto Sans CJK SC" pitchFamily="34" charset="0"/>
                 <a:ea typeface="Noto Sans CJK SC" pitchFamily="34" charset="-122"/>
@@ -1696,8 +1677,8 @@
         </p:nvSpPr>
         <p:spPr>
           <a:xfrm>
-            <a:off x="571500" y="2047875"/>
-            <a:ext cx="1847850" cy="571500"/>
+            <a:off x="571500" y="1873472"/>
+            <a:ext cx="1847850" cy="612553"/>
           </a:xfrm>
           <a:prstGeom prst="rect">
             <a:avLst/>
@@ -1724,7 +1705,7 @@
                 <a:ea typeface="Noto Sans CJK SC" pitchFamily="34" charset="-122"/>
                 <a:cs typeface="Noto Sans CJK SC" pitchFamily="34" charset="-120"/>
               </a:rPr>
-              <a:t>填写接口与条件</a:t>
+              <a:t>来源与纳入规则</a:t>
             </a:r>
             <a:endParaRPr lang="zh-CN" sz="1650" dirty="0"/>
           </a:p>
@@ -1738,14 +1719,14 @@
         </p:nvSpPr>
         <p:spPr>
           <a:xfrm>
-            <a:off x="3124200" y="1638300"/>
-            <a:ext cx="2076450" cy="1066800"/>
+            <a:off x="3124200" y="1463897"/>
+            <a:ext cx="2076450" cy="1107853"/>
           </a:xfrm>
           <a:prstGeom prst="rect">
             <a:avLst/>
           </a:prstGeom>
           <a:solidFill>
-            <a:srgbClr val="FFFFFF"/>
+            <a:srgbClr val="EAF2FA"/>
           </a:solidFill>
           <a:ln w="11430">
             <a:solidFill>
@@ -1763,7 +1744,7 @@
         </p:nvSpPr>
         <p:spPr>
           <a:xfrm>
-            <a:off x="3124200" y="1638300"/>
+            <a:off x="3124200" y="1463897"/>
             <a:ext cx="2076450" cy="0"/>
           </a:xfrm>
           <a:prstGeom prst="line">
@@ -1772,7 +1753,7 @@
           <a:noFill/>
           <a:ln w="19050">
             <a:solidFill>
-              <a:srgbClr val="173C70"/>
+              <a:srgbClr val="235E96"/>
             </a:solidFill>
             <a:prstDash val="solid"/>
           </a:ln>
@@ -1786,7 +1767,7 @@
         </p:nvSpPr>
         <p:spPr>
           <a:xfrm>
-            <a:off x="3238500" y="1733550"/>
+            <a:off x="3238500" y="1559147"/>
             <a:ext cx="1847850" cy="266700"/>
           </a:xfrm>
           <a:prstGeom prst="rect">
@@ -1808,7 +1789,7 @@
             <a:r>
               <a:rPr lang="zh-CN" altLang="en-US" sz="1800" b="1" dirty="0">
                 <a:solidFill>
-                  <a:srgbClr val="173C70"/>
+                  <a:srgbClr val="235E96"/>
                 </a:solidFill>
                 <a:latin typeface="Noto Sans CJK SC" pitchFamily="34" charset="0"/>
                 <a:ea typeface="Noto Sans CJK SC" pitchFamily="34" charset="-122"/>
@@ -1828,8 +1809,8 @@
         </p:nvSpPr>
         <p:spPr>
           <a:xfrm>
-            <a:off x="3238500" y="2047875"/>
-            <a:ext cx="1847850" cy="571500"/>
+            <a:off x="3238500" y="1873472"/>
+            <a:ext cx="1847850" cy="612553"/>
           </a:xfrm>
           <a:prstGeom prst="rect">
             <a:avLst/>
@@ -1856,7 +1837,7 @@
                 <a:ea typeface="Noto Sans CJK SC" pitchFamily="34" charset="-122"/>
                 <a:cs typeface="Noto Sans CJK SC" pitchFamily="34" charset="-120"/>
               </a:rPr>
-              <a:t>填写接口与条件</a:t>
+              <a:t>独立接受处理</a:t>
             </a:r>
             <a:endParaRPr lang="zh-CN" sz="1650" dirty="0"/>
           </a:p>
@@ -1870,14 +1851,14 @@
         </p:nvSpPr>
         <p:spPr>
           <a:xfrm>
-            <a:off x="5791200" y="1638300"/>
-            <a:ext cx="2076450" cy="1066800"/>
+            <a:off x="5791200" y="1463897"/>
+            <a:ext cx="2076450" cy="1107853"/>
           </a:xfrm>
           <a:prstGeom prst="rect">
             <a:avLst/>
           </a:prstGeom>
           <a:solidFill>
-            <a:srgbClr val="FFFFFF"/>
+            <a:srgbClr val="EAF2FA"/>
           </a:solidFill>
           <a:ln w="11430">
             <a:solidFill>
@@ -1895,7 +1876,7 @@
         </p:nvSpPr>
         <p:spPr>
           <a:xfrm>
-            <a:off x="5791200" y="1638300"/>
+            <a:off x="5791200" y="1463897"/>
             <a:ext cx="2076450" cy="0"/>
           </a:xfrm>
           <a:prstGeom prst="line">
@@ -1904,7 +1885,7 @@
           <a:noFill/>
           <a:ln w="19050">
             <a:solidFill>
-              <a:srgbClr val="173C70"/>
+              <a:srgbClr val="235E96"/>
             </a:solidFill>
             <a:prstDash val="solid"/>
           </a:ln>
@@ -1918,7 +1899,7 @@
         </p:nvSpPr>
         <p:spPr>
           <a:xfrm>
-            <a:off x="5905500" y="1733550"/>
+            <a:off x="5905500" y="1559147"/>
             <a:ext cx="1847850" cy="266700"/>
           </a:xfrm>
           <a:prstGeom prst="rect">
@@ -1940,7 +1921,7 @@
             <a:r>
               <a:rPr lang="zh-CN" altLang="en-US" sz="1800" b="1" dirty="0">
                 <a:solidFill>
-                  <a:srgbClr val="173C70"/>
+                  <a:srgbClr val="235E96"/>
                 </a:solidFill>
                 <a:latin typeface="Noto Sans CJK SC" pitchFamily="34" charset="0"/>
                 <a:ea typeface="Noto Sans CJK SC" pitchFamily="34" charset="-122"/>
@@ -1960,8 +1941,8 @@
         </p:nvSpPr>
         <p:spPr>
           <a:xfrm>
-            <a:off x="5905500" y="2047875"/>
-            <a:ext cx="1847850" cy="571500"/>
+            <a:off x="5905500" y="1873472"/>
+            <a:ext cx="1847850" cy="612553"/>
           </a:xfrm>
           <a:prstGeom prst="rect">
             <a:avLst/>
@@ -1988,7 +1969,7 @@
                 <a:ea typeface="Noto Sans CJK SC" pitchFamily="34" charset="-122"/>
                 <a:cs typeface="Noto Sans CJK SC" pitchFamily="34" charset="-120"/>
               </a:rPr>
-              <a:t>填写接口与条件</a:t>
+              <a:t>随机化与区组</a:t>
             </a:r>
             <a:endParaRPr lang="zh-CN" sz="1650" dirty="0"/>
           </a:p>
@@ -2002,14 +1983,14 @@
         </p:nvSpPr>
         <p:spPr>
           <a:xfrm>
-            <a:off x="3124200" y="3333750"/>
-            <a:ext cx="2076450" cy="895350"/>
+            <a:off x="3124200" y="3224594"/>
+            <a:ext cx="2076450" cy="929831"/>
           </a:xfrm>
           <a:prstGeom prst="rect">
             <a:avLst/>
           </a:prstGeom>
           <a:solidFill>
-            <a:srgbClr val="FFFFFF"/>
+            <a:srgbClr val="EAF2FA"/>
           </a:solidFill>
           <a:ln w="11430">
             <a:solidFill>
@@ -2027,7 +2008,7 @@
         </p:nvSpPr>
         <p:spPr>
           <a:xfrm>
-            <a:off x="3124200" y="3333750"/>
+            <a:off x="3124200" y="3224594"/>
             <a:ext cx="2076450" cy="0"/>
           </a:xfrm>
           <a:prstGeom prst="line">
@@ -2036,7 +2017,7 @@
           <a:noFill/>
           <a:ln w="19050">
             <a:solidFill>
-              <a:srgbClr val="173C70"/>
+              <a:srgbClr val="235E96"/>
             </a:solidFill>
             <a:prstDash val="solid"/>
           </a:ln>
@@ -2050,7 +2031,7 @@
         </p:nvSpPr>
         <p:spPr>
           <a:xfrm>
-            <a:off x="3238500" y="3648075"/>
+            <a:off x="3238500" y="3556159"/>
             <a:ext cx="1847850" cy="266700"/>
           </a:xfrm>
           <a:prstGeom prst="rect">
@@ -2072,7 +2053,7 @@
             <a:r>
               <a:rPr lang="zh-CN" altLang="en-US" sz="1800" b="1" dirty="0">
                 <a:solidFill>
-                  <a:srgbClr val="173C70"/>
+                  <a:srgbClr val="235E96"/>
                 </a:solidFill>
                 <a:latin typeface="Noto Sans CJK SC" pitchFamily="34" charset="0"/>
                 <a:ea typeface="Noto Sans CJK SC" pitchFamily="34" charset="-122"/>
@@ -2092,8 +2073,8 @@
         </p:nvSpPr>
         <p:spPr>
           <a:xfrm>
-            <a:off x="8229600" y="1371600"/>
-            <a:ext cx="3505200" cy="2057400"/>
+            <a:off x="8229600" y="1187006"/>
+            <a:ext cx="3505200" cy="2136553"/>
           </a:xfrm>
           <a:prstGeom prst="rect">
             <a:avLst/>
@@ -2117,14 +2098,14 @@
         </p:nvSpPr>
         <p:spPr>
           <a:xfrm>
-            <a:off x="8239125" y="1381125"/>
+            <a:off x="8239125" y="1196531"/>
             <a:ext cx="3486150" cy="371475"/>
           </a:xfrm>
           <a:prstGeom prst="rect">
             <a:avLst/>
           </a:prstGeom>
           <a:solidFill>
-            <a:srgbClr val="EEF3F8"/>
+            <a:srgbClr val="F0F3F6"/>
           </a:solidFill>
           <a:ln w="12700">
             <a:solidFill>
@@ -2144,7 +2125,7 @@
         </p:nvSpPr>
         <p:spPr>
           <a:xfrm>
-            <a:off x="8229600" y="1752600"/>
+            <a:off x="8229600" y="1568006"/>
             <a:ext cx="3505200" cy="0"/>
           </a:xfrm>
           <a:prstGeom prst="line">
@@ -2167,8 +2148,8 @@
         </p:nvSpPr>
         <p:spPr>
           <a:xfrm>
-            <a:off x="8353425" y="1428750"/>
-            <a:ext cx="3257550" cy="276225"/>
+            <a:off x="8353425" y="1234631"/>
+            <a:ext cx="3257550" cy="295275"/>
           </a:xfrm>
           <a:prstGeom prst="rect">
             <a:avLst/>
@@ -2182,14 +2163,14 @@
           <a:p>
             <a:pPr algn="l" indent="0" marL="0">
               <a:lnSpc>
-                <a:spcPts val="2070"/>
+                <a:spcPts val="2242"/>
               </a:lnSpc>
               <a:buNone/>
             </a:pPr>
             <a:r>
-              <a:rPr lang="zh-CN" altLang="en-US" sz="1800" b="1" dirty="0">
+              <a:rPr lang="zh-CN" altLang="en-US" sz="1950" b="1" dirty="0">
                 <a:solidFill>
-                  <a:srgbClr val="173C70"/>
+                  <a:srgbClr val="536A7A"/>
                 </a:solidFill>
                 <a:latin typeface="Noto Sans CJK SC" pitchFamily="34" charset="0"/>
                 <a:ea typeface="Noto Sans CJK SC" pitchFamily="34" charset="-122"/>
@@ -2197,7 +2178,7 @@
               </a:rPr>
               <a:t>独立样本单位</a:t>
             </a:r>
-            <a:endParaRPr lang="zh-CN" sz="1800" dirty="0"/>
+            <a:endParaRPr lang="zh-CN" sz="1950" dirty="0"/>
           </a:p>
         </p:txBody>
       </p:sp>
@@ -2209,8 +2190,8 @@
         </p:nvSpPr>
         <p:spPr>
           <a:xfrm>
-            <a:off x="8362950" y="1866900"/>
-            <a:ext cx="3238500" cy="1466850"/>
+            <a:off x="8362950" y="1672781"/>
+            <a:ext cx="3238500" cy="1555528"/>
           </a:xfrm>
           <a:prstGeom prst="rect">
             <a:avLst/>
@@ -2224,12 +2205,12 @@
           <a:p>
             <a:pPr algn="l" indent="0" marL="0">
               <a:lnSpc>
-                <a:spcPts val="2139"/>
+                <a:spcPts val="2232"/>
               </a:lnSpc>
               <a:buNone/>
             </a:pPr>
             <a:r>
-              <a:rPr lang="zh-CN" altLang="en-US" sz="1725" dirty="0">
+              <a:rPr lang="zh-CN" altLang="en-US" sz="1800" dirty="0">
                 <a:solidFill>
                   <a:srgbClr val="1C2430"/>
                 </a:solidFill>
@@ -2239,17 +2220,17 @@
               </a:rPr>
               <a:t>填写真正接受独立处理的个体</a:t>
             </a:r>
-            <a:endParaRPr lang="zh-CN" sz="1725" dirty="0"/>
+            <a:endParaRPr lang="zh-CN" sz="1800" dirty="0"/>
           </a:p>
           <a:p>
             <a:pPr algn="l" indent="0" marL="0">
               <a:lnSpc>
-                <a:spcPts val="2139"/>
+                <a:spcPts val="2232"/>
               </a:lnSpc>
               <a:buNone/>
             </a:pPr>
             <a:r>
-              <a:rPr lang="zh-CN" altLang="en-US" sz="1725" dirty="0">
+              <a:rPr lang="zh-CN" altLang="en-US" sz="1800" dirty="0">
                 <a:solidFill>
                   <a:srgbClr val="1C2430"/>
                 </a:solidFill>
@@ -2259,17 +2240,17 @@
               </a:rPr>
               <a:t>随机种子、图像和轨迹分别计数</a:t>
             </a:r>
-            <a:endParaRPr lang="zh-CN" sz="1725" dirty="0"/>
+            <a:endParaRPr lang="zh-CN" sz="1800" dirty="0"/>
           </a:p>
           <a:p>
             <a:pPr algn="l" indent="0" marL="0">
               <a:lnSpc>
-                <a:spcPts val="2139"/>
+                <a:spcPts val="2232"/>
               </a:lnSpc>
               <a:buNone/>
             </a:pPr>
             <a:r>
-              <a:rPr lang="zh-CN" altLang="en-US" sz="1725" dirty="0">
+              <a:rPr lang="zh-CN" altLang="en-US" sz="1800" dirty="0">
                 <a:solidFill>
                   <a:srgbClr val="1C2430"/>
                 </a:solidFill>
@@ -2279,28 +2260,30 @@
               </a:rPr>
               <a:t>用实验设计判断统计独立性</a:t>
             </a:r>
-            <a:endParaRPr lang="zh-CN" sz="1725" dirty="0"/>
+            <a:endParaRPr lang="zh-CN" sz="1800" dirty="0"/>
           </a:p>
         </p:txBody>
       </p:sp>
       <p:sp>
         <p:nvSpPr>
-          <p:cNvPr id="30" name="T13/card/region-2/base-rule"/>
-          <p:cNvSpPr/>
-          <p:nvPr/>
-        </p:nvSpPr>
-        <p:spPr>
-          <a:xfrm>
-            <a:off x="8229600" y="6038850"/>
-            <a:ext cx="3505200" cy="0"/>
-          </a:xfrm>
-          <a:prstGeom prst="line">
-            <a:avLst/>
-          </a:prstGeom>
-          <a:noFill/>
-          <a:ln w="10478">
+          <p:cNvPr id="30" name="T13/card/region-2/frame"/>
+          <p:cNvSpPr/>
+          <p:nvPr/>
+        </p:nvSpPr>
+        <p:spPr>
+          <a:xfrm>
+            <a:off x="8229600" y="3742563"/>
+            <a:ext cx="3505200" cy="2291144"/>
+          </a:xfrm>
+          <a:prstGeom prst="rect">
+            <a:avLst/>
+          </a:prstGeom>
+          <a:solidFill>
+            <a:srgbClr val="FFFFFF"/>
+          </a:solidFill>
+          <a:ln w="14288">
             <a:solidFill>
-              <a:srgbClr val="BEC8D4"/>
+              <a:srgbClr val="235E96"/>
             </a:solidFill>
             <a:prstDash val="solid"/>
           </a:ln>
@@ -2308,20 +2291,20 @@
       </p:sp>
       <p:sp>
         <p:nvSpPr>
-          <p:cNvPr id="31" name="T13/card/region-2/side-mark"/>
-          <p:cNvSpPr/>
-          <p:nvPr/>
-        </p:nvSpPr>
-        <p:spPr>
-          <a:xfrm>
-            <a:off x="8229600" y="3695700"/>
-            <a:ext cx="47625" cy="295275"/>
+          <p:cNvPr id="31" name="T13/card/region-2/title-cutout"/>
+          <p:cNvSpPr/>
+          <p:nvPr/>
+        </p:nvSpPr>
+        <p:spPr>
+          <a:xfrm>
+            <a:off x="8362950" y="3590163"/>
+            <a:ext cx="1524000" cy="323850"/>
           </a:xfrm>
           <a:prstGeom prst="rect">
             <a:avLst/>
           </a:prstGeom>
           <a:solidFill>
-            <a:srgbClr val="173C70"/>
+            <a:srgbClr val="FFFFFF"/>
           </a:solidFill>
           <a:ln w="12700">
             <a:solidFill>
@@ -2335,14 +2318,37 @@
       </p:sp>
       <p:sp>
         <p:nvSpPr>
-          <p:cNvPr id="32" name="T13/card/region-2/title"/>
-          <p:cNvSpPr/>
-          <p:nvPr/>
-        </p:nvSpPr>
-        <p:spPr>
-          <a:xfrm>
-            <a:off x="8382000" y="3695700"/>
-            <a:ext cx="3352800" cy="304800"/>
+          <p:cNvPr id="32" name="T13/card/region-2/base-rule"/>
+          <p:cNvSpPr/>
+          <p:nvPr/>
+        </p:nvSpPr>
+        <p:spPr>
+          <a:xfrm>
+            <a:off x="8420100" y="5881307"/>
+            <a:ext cx="333375" cy="0"/>
+          </a:xfrm>
+          <a:prstGeom prst="line">
+            <a:avLst/>
+          </a:prstGeom>
+          <a:noFill/>
+          <a:ln w="28575">
+            <a:solidFill>
+              <a:srgbClr val="235E96"/>
+            </a:solidFill>
+            <a:prstDash val="solid"/>
+          </a:ln>
+        </p:spPr>
+      </p:sp>
+      <p:sp>
+        <p:nvSpPr>
+          <p:cNvPr id="33" name="T13/card/region-2/title"/>
+          <p:cNvSpPr/>
+          <p:nvPr/>
+        </p:nvSpPr>
+        <p:spPr>
+          <a:xfrm>
+            <a:off x="8420100" y="3599688"/>
+            <a:ext cx="3124200" cy="361950"/>
           </a:xfrm>
           <a:prstGeom prst="rect">
             <a:avLst/>
@@ -2356,14 +2362,14 @@
           <a:p>
             <a:pPr algn="l" indent="0" marL="0">
               <a:lnSpc>
-                <a:spcPts val="2070"/>
+                <a:spcPts val="2242"/>
               </a:lnSpc>
               <a:buNone/>
             </a:pPr>
             <a:r>
-              <a:rPr lang="zh-CN" altLang="en-US" sz="1800" b="1" dirty="0">
+              <a:rPr lang="zh-CN" altLang="en-US" sz="1950" b="1" dirty="0">
                 <a:solidFill>
-                  <a:srgbClr val="173C70"/>
+                  <a:srgbClr val="235E96"/>
                 </a:solidFill>
                 <a:latin typeface="Noto Sans CJK SC" pitchFamily="34" charset="0"/>
                 <a:ea typeface="Noto Sans CJK SC" pitchFamily="34" charset="-122"/>
@@ -2371,20 +2377,20 @@
               </a:rPr>
               <a:t>重复测量结构</a:t>
             </a:r>
-            <a:endParaRPr lang="zh-CN" sz="1800" dirty="0"/>
+            <a:endParaRPr lang="zh-CN" sz="1950" dirty="0"/>
           </a:p>
         </p:txBody>
       </p:sp>
       <p:sp>
         <p:nvSpPr>
-          <p:cNvPr id="33" name="T13/card/region-2/body"/>
-          <p:cNvSpPr/>
-          <p:nvPr/>
-        </p:nvSpPr>
-        <p:spPr>
-          <a:xfrm>
-            <a:off x="8382000" y="4114800"/>
-            <a:ext cx="3352800" cy="1828800"/>
+          <p:cNvPr id="34" name="T13/card/region-2/body"/>
+          <p:cNvSpPr/>
+          <p:nvPr/>
+        </p:nvSpPr>
+        <p:spPr>
+          <a:xfrm>
+            <a:off x="8420100" y="4133088"/>
+            <a:ext cx="3124200" cy="1710119"/>
           </a:xfrm>
           <a:prstGeom prst="rect">
             <a:avLst/>
@@ -2398,12 +2404,12 @@
           <a:p>
             <a:pPr algn="l" indent="0" marL="0">
               <a:lnSpc>
-                <a:spcPts val="2139"/>
+                <a:spcPts val="2232"/>
               </a:lnSpc>
               <a:buNone/>
             </a:pPr>
             <a:r>
-              <a:rPr lang="zh-CN" altLang="en-US" sz="1725" dirty="0">
+              <a:rPr lang="zh-CN" altLang="en-US" sz="1800" dirty="0">
                 <a:solidFill>
                   <a:srgbClr val="1C2430"/>
                 </a:solidFill>
@@ -2411,19 +2417,19 @@
                 <a:ea typeface="Noto Sans CJK SC" pitchFamily="34" charset="-122"/>
                 <a:cs typeface="Noto Sans CJK SC" pitchFamily="34" charset="-120"/>
               </a:rPr>
-              <a:t>填写每个个体的时间点与采样频率</a:t>
-            </a:r>
-            <a:endParaRPr lang="zh-CN" sz="1725" dirty="0"/>
+              <a:t>填写每个个体的时间点与采样</a:t>
+            </a:r>
+            <a:endParaRPr lang="zh-CN" sz="1800" dirty="0"/>
           </a:p>
           <a:p>
             <a:pPr algn="l" indent="0" marL="0">
               <a:lnSpc>
-                <a:spcPts val="2139"/>
+                <a:spcPts val="2232"/>
               </a:lnSpc>
               <a:buNone/>
             </a:pPr>
             <a:r>
-              <a:rPr lang="zh-CN" altLang="en-US" sz="1725" dirty="0">
+              <a:rPr lang="zh-CN" altLang="en-US" sz="1800" dirty="0">
                 <a:solidFill>
                   <a:srgbClr val="1C2430"/>
                 </a:solidFill>
@@ -2431,19 +2437,19 @@
                 <a:ea typeface="Noto Sans CJK SC" pitchFamily="34" charset="-122"/>
                 <a:cs typeface="Noto Sans CJK SC" pitchFamily="34" charset="-120"/>
               </a:rPr>
-              <a:t>说明分层或相关观测的处理方法</a:t>
-            </a:r>
-            <a:endParaRPr lang="zh-CN" sz="1725" dirty="0"/>
+              <a:t>频率</a:t>
+            </a:r>
+            <a:endParaRPr lang="zh-CN" sz="1800" dirty="0"/>
           </a:p>
           <a:p>
             <a:pPr algn="l" indent="0" marL="0">
               <a:lnSpc>
-                <a:spcPts val="2139"/>
+                <a:spcPts val="2232"/>
               </a:lnSpc>
               <a:buNone/>
             </a:pPr>
             <a:r>
-              <a:rPr lang="zh-CN" altLang="en-US" sz="1725" dirty="0">
+              <a:rPr lang="zh-CN" altLang="en-US" sz="1800" dirty="0">
                 <a:solidFill>
                   <a:srgbClr val="1C2430"/>
                 </a:solidFill>
@@ -2451,21 +2457,95 @@
                 <a:ea typeface="Noto Sans CJK SC" pitchFamily="34" charset="-122"/>
                 <a:cs typeface="Noto Sans CJK SC" pitchFamily="34" charset="-120"/>
               </a:rPr>
-              <a:t>缺失测量不应扩大独立样本数</a:t>
-            </a:r>
-            <a:endParaRPr lang="zh-CN" sz="1725" dirty="0"/>
+              <a:t>说明分层或相关观测的处理方</a:t>
+            </a:r>
+            <a:endParaRPr lang="zh-CN" sz="1800" dirty="0"/>
+          </a:p>
+          <a:p>
+            <a:pPr algn="l" indent="0" marL="0">
+              <a:lnSpc>
+                <a:spcPts val="2232"/>
+              </a:lnSpc>
+              <a:buNone/>
+            </a:pPr>
+            <a:r>
+              <a:rPr lang="zh-CN" altLang="en-US" sz="1800" dirty="0">
+                <a:solidFill>
+                  <a:srgbClr val="1C2430"/>
+                </a:solidFill>
+                <a:latin typeface="Noto Sans CJK SC" pitchFamily="34" charset="0"/>
+                <a:ea typeface="Noto Sans CJK SC" pitchFamily="34" charset="-122"/>
+                <a:cs typeface="Noto Sans CJK SC" pitchFamily="34" charset="-120"/>
+              </a:rPr>
+              <a:t>法</a:t>
+            </a:r>
+            <a:endParaRPr lang="zh-CN" sz="1800" dirty="0"/>
+          </a:p>
+          <a:p>
+            <a:pPr algn="l" indent="0" marL="0">
+              <a:lnSpc>
+                <a:spcPts val="2232"/>
+              </a:lnSpc>
+              <a:buNone/>
+            </a:pPr>
+            <a:r>
+              <a:rPr lang="zh-CN" altLang="en-US" sz="1800" dirty="0">
+                <a:solidFill>
+                  <a:srgbClr val="1C2430"/>
+                </a:solidFill>
+                <a:latin typeface="Noto Sans CJK SC" pitchFamily="34" charset="0"/>
+                <a:ea typeface="Noto Sans CJK SC" pitchFamily="34" charset="-122"/>
+                <a:cs typeface="Noto Sans CJK SC" pitchFamily="34" charset="-120"/>
+              </a:rPr>
+              <a:t>缺失测量不应扩大</a:t>
+            </a:r>
+            <a:pPr algn="l" indent="0" marL="0">
+              <a:lnSpc>
+                <a:spcPts val="2232"/>
+              </a:lnSpc>
+              <a:buNone/>
+            </a:pPr>
+            <a:r>
+              <a:rPr lang="zh-CN" altLang="en-US" sz="1800" b="1" dirty="0">
+                <a:solidFill>
+                  <a:srgbClr val="235E96"/>
+                </a:solidFill>
+                <a:latin typeface="Noto Sans CJK SC" pitchFamily="34" charset="0"/>
+                <a:ea typeface="Noto Sans CJK SC" pitchFamily="34" charset="-122"/>
+                <a:cs typeface="Noto Sans CJK SC" pitchFamily="34" charset="-120"/>
+              </a:rPr>
+              <a:t>独立样本</a:t>
+            </a:r>
+            <a:pPr algn="l" indent="0" marL="0">
+              <a:lnSpc>
+                <a:spcPts val="2232"/>
+              </a:lnSpc>
+              <a:buNone/>
+            </a:pPr>
+            <a:r>
+              <a:rPr lang="zh-CN" altLang="en-US" sz="1800" dirty="0">
+                <a:solidFill>
+                  <a:srgbClr val="1C2430"/>
+                </a:solidFill>
+                <a:latin typeface="Noto Sans CJK SC" pitchFamily="34" charset="0"/>
+                <a:ea typeface="Noto Sans CJK SC" pitchFamily="34" charset="-122"/>
+                <a:cs typeface="Noto Sans CJK SC" pitchFamily="34" charset="-120"/>
+              </a:rPr>
+              <a:t>数</a:t>
+            </a:r>
+            <a:endParaRPr lang="zh-CN" sz="1800" dirty="0"/>
           </a:p>
         </p:txBody>
       </p:sp>
       <p:sp>
         <p:nvSpPr>
-          <p:cNvPr id="34" name="T13/card/region-3/heading-rule"/>
-          <p:cNvSpPr/>
-          <p:nvPr/>
-        </p:nvSpPr>
-        <p:spPr>
-          <a:xfrm>
-            <a:off x="457200" y="4991100"/>
+          <p:cNvPr id="35" name="T13/card/region-3/heading-rule"/>
+          <p:cNvSpPr/>
+          <p:nvPr/>
+        </p:nvSpPr>
+        <p:spPr>
+          <a:xfrm>
+            <a:off x="457200" y="4931759"/>
             <a:ext cx="7410450" cy="0"/>
           </a:xfrm>
           <a:prstGeom prst="line">
@@ -2482,13 +2562,13 @@
       </p:sp>
       <p:sp>
         <p:nvSpPr>
-          <p:cNvPr id="35" name="T13/card/region-3/heading-mark"/>
-          <p:cNvSpPr/>
-          <p:nvPr/>
-        </p:nvSpPr>
-        <p:spPr>
-          <a:xfrm>
-            <a:off x="457200" y="4991100"/>
+          <p:cNvPr id="36" name="T13/card/region-3/heading-mark"/>
+          <p:cNvSpPr/>
+          <p:nvPr/>
+        </p:nvSpPr>
+        <p:spPr>
+          <a:xfrm>
+            <a:off x="457200" y="4931759"/>
             <a:ext cx="342900" cy="0"/>
           </a:xfrm>
           <a:prstGeom prst="line">
@@ -2497,7 +2577,7 @@
           <a:noFill/>
           <a:ln w="17145">
             <a:solidFill>
-              <a:srgbClr val="903543"/>
+              <a:srgbClr val="A24736"/>
             </a:solidFill>
             <a:prstDash val="solid"/>
           </a:ln>
@@ -2505,13 +2585,13 @@
       </p:sp>
       <p:sp>
         <p:nvSpPr>
-          <p:cNvPr id="36" name="T13/card/region-3/title"/>
-          <p:cNvSpPr/>
-          <p:nvPr/>
-        </p:nvSpPr>
-        <p:spPr>
-          <a:xfrm>
-            <a:off x="457200" y="4648200"/>
+          <p:cNvPr id="37" name="T13/card/region-3/title"/>
+          <p:cNvSpPr/>
+          <p:nvPr/>
+        </p:nvSpPr>
+        <p:spPr>
+          <a:xfrm>
+            <a:off x="457200" y="4588859"/>
             <a:ext cx="7410450" cy="323850"/>
           </a:xfrm>
           <a:prstGeom prst="rect">
@@ -2526,35 +2606,35 @@
           <a:p>
             <a:pPr algn="l" indent="0" marL="0">
               <a:lnSpc>
-                <a:spcPts val="2156"/>
+                <a:spcPts val="2242"/>
               </a:lnSpc>
               <a:buNone/>
             </a:pPr>
             <a:r>
-              <a:rPr lang="zh-CN" altLang="en-US" sz="1875" b="1" dirty="0">
+              <a:rPr lang="zh-CN" altLang="en-US" sz="1950" b="1" dirty="0">
                 <a:solidFill>
-                  <a:srgbClr val="903543"/>
+                  <a:srgbClr val="A24736"/>
                 </a:solidFill>
                 <a:latin typeface="Noto Sans CJK SC" pitchFamily="34" charset="0"/>
                 <a:ea typeface="Noto Sans CJK SC" pitchFamily="34" charset="-122"/>
                 <a:cs typeface="Noto Sans CJK SC" pitchFamily="34" charset="-120"/>
               </a:rPr>
-              <a:t>纳入排除与缺失值</a:t>
-            </a:r>
-            <a:endParaRPr lang="zh-CN" sz="1875" dirty="0"/>
+              <a:t>纳入、排除与缺失</a:t>
+            </a:r>
+            <a:endParaRPr lang="zh-CN" sz="1950" dirty="0"/>
           </a:p>
         </p:txBody>
       </p:sp>
       <p:sp>
         <p:nvSpPr>
-          <p:cNvPr id="37" name="T13/card/region-3/body"/>
-          <p:cNvSpPr/>
-          <p:nvPr/>
-        </p:nvSpPr>
-        <p:spPr>
-          <a:xfrm>
-            <a:off x="457200" y="5124450"/>
-            <a:ext cx="7410450" cy="876300"/>
+          <p:cNvPr id="38" name="T13/card/region-3/body"/>
+          <p:cNvSpPr/>
+          <p:nvPr/>
+        </p:nvSpPr>
+        <p:spPr>
+          <a:xfrm>
+            <a:off x="457200" y="5065109"/>
+            <a:ext cx="7410450" cy="930497"/>
           </a:xfrm>
           <a:prstGeom prst="rect">
             <a:avLst/>
@@ -2609,7 +2689,7 @@
       </p:sp>
       <p:sp>
         <p:nvSpPr>
-          <p:cNvPr id="38" name="T13/sources"/>
+          <p:cNvPr id="39" name="T13/sources"/>
           <p:cNvSpPr/>
           <p:nvPr/>
         </p:nvSpPr>
@@ -2643,7 +2723,7 @@
                 <a:ea typeface="Noto Sans CJK SC" pitchFamily="34" charset="-122"/>
                 <a:cs typeface="Noto Sans CJK SC" pitchFamily="34" charset="-120"/>
               </a:rPr>
-              <a:t>T1 · 2026 · 待替换</a:t>
+              <a:t>T1 · 2026 · 书目占位；图表均为合成示例</a:t>
             </a:r>
             <a:endParaRPr lang="zh-CN" sz="1125" dirty="0"/>
           </a:p>
@@ -2752,14 +2832,14 @@
       </p:sp>
       <p:sp>
         <p:nvSpPr>
-          <p:cNvPr id="4" name="T14/kicker"/>
-          <p:cNvSpPr/>
-          <p:nvPr/>
-        </p:nvSpPr>
-        <p:spPr>
-          <a:xfrm>
-            <a:off x="457200" y="152400"/>
-            <a:ext cx="11277600" cy="190500"/>
+          <p:cNvPr id="4" name="T14/title"/>
+          <p:cNvSpPr/>
+          <p:nvPr/>
+        </p:nvSpPr>
+        <p:spPr>
+          <a:xfrm>
+            <a:off x="457200" y="209550"/>
+            <a:ext cx="11277600" cy="438150"/>
           </a:xfrm>
           <a:prstGeom prst="rect">
             <a:avLst/>
@@ -2773,54 +2853,12 @@
           <a:p>
             <a:pPr algn="l" indent="0" marL="0">
               <a:lnSpc>
-                <a:spcPts val="1320"/>
+                <a:spcPts val="3360"/>
               </a:lnSpc>
               <a:buNone/>
             </a:pPr>
             <a:r>
-              <a:rPr lang="zh-CN" altLang="en-US" sz="1200" dirty="0">
-                <a:solidFill>
-                  <a:srgbClr val="515B68"/>
-                </a:solidFill>
-                <a:latin typeface="Noto Sans CJK SC" pitchFamily="34" charset="0"/>
-                <a:ea typeface="Noto Sans CJK SC" pitchFamily="34" charset="-122"/>
-                <a:cs typeface="Noto Sans CJK SC" pitchFamily="34" charset="-120"/>
-              </a:rPr>
-              <a:t>结构模板 / 占位说明与合成数据</a:t>
-            </a:r>
-            <a:endParaRPr lang="zh-CN" sz="1200" dirty="0"/>
-          </a:p>
-        </p:txBody>
-      </p:sp>
-      <p:sp>
-        <p:nvSpPr>
-          <p:cNvPr id="5" name="T14/title"/>
-          <p:cNvSpPr/>
-          <p:nvPr/>
-        </p:nvSpPr>
-        <p:spPr>
-          <a:xfrm>
-            <a:off x="457200" y="381000"/>
-            <a:ext cx="11277600" cy="400050"/>
-          </a:xfrm>
-          <a:prstGeom prst="rect">
-            <a:avLst/>
-          </a:prstGeom>
-          <a:noFill/>
-          <a:ln/>
-        </p:spPr>
-        <p:txBody>
-          <a:bodyPr wrap="none" lIns="0" tIns="0" rIns="0" bIns="0" rtlCol="0" anchor="t"/>
-          <a:lstStyle/>
-          <a:p>
-            <a:pPr algn="l" indent="0" marL="0">
-              <a:lnSpc>
-                <a:spcPts val="2856"/>
-              </a:lnSpc>
-              <a:buNone/>
-            </a:pPr>
-            <a:r>
-              <a:rPr lang="zh-CN" altLang="en-US" sz="2550" b="1" dirty="0">
+              <a:rPr lang="zh-CN" altLang="en-US" sz="3000" b="1" dirty="0">
                 <a:solidFill>
                   <a:srgbClr val="1C2430"/>
                 </a:solidFill>
@@ -2830,74 +2868,55 @@
               </a:rPr>
               <a:t>实验因子与处理组合</a:t>
             </a:r>
-            <a:endParaRPr lang="zh-CN" sz="2550" dirty="0"/>
+            <a:endParaRPr lang="zh-CN" sz="3000" dirty="0"/>
           </a:p>
         </p:txBody>
       </p:sp>
       <p:sp>
         <p:nvSpPr>
-          <p:cNvPr id="6" name="T14/header-rule"/>
-          <p:cNvSpPr/>
-          <p:nvPr/>
-        </p:nvSpPr>
-        <p:spPr>
-          <a:xfrm>
-            <a:off x="457200" y="876300"/>
+          <p:cNvPr id="5" name="T14/header-rule"/>
+          <p:cNvSpPr/>
+          <p:nvPr/>
+        </p:nvSpPr>
+        <p:spPr>
+          <a:xfrm>
+            <a:off x="457200" y="752475"/>
             <a:ext cx="11277600" cy="0"/>
           </a:xfrm>
           <a:prstGeom prst="line">
             <a:avLst/>
           </a:prstGeom>
           <a:noFill/>
-          <a:ln w="11430">
+          <a:ln w="10478">
+            <a:solidFill>
+              <a:srgbClr val="BEC8D4"/>
+            </a:solidFill>
+            <a:prstDash val="solid"/>
+          </a:ln>
+        </p:spPr>
+      </p:sp>
+      <p:sp>
+        <p:nvSpPr>
+          <p:cNvPr id="6" name="T14/header-accent"/>
+          <p:cNvSpPr/>
+          <p:nvPr/>
+        </p:nvSpPr>
+        <p:spPr>
+          <a:xfrm>
+            <a:off x="457200" y="752475"/>
+            <a:ext cx="704850" cy="0"/>
+          </a:xfrm>
+          <a:prstGeom prst="line">
+            <a:avLst/>
+          </a:prstGeom>
+          <a:noFill/>
+          <a:ln w="28575">
             <a:solidFill>
               <a:srgbClr val="173C70"/>
             </a:solidFill>
             <a:prstDash val="solid"/>
           </a:ln>
         </p:spPr>
-      </p:sp>
-      <p:sp>
-        <p:nvSpPr>
-          <p:cNvPr id="7" name="T14/takeaway"/>
-          <p:cNvSpPr/>
-          <p:nvPr/>
-        </p:nvSpPr>
-        <p:spPr>
-          <a:xfrm>
-            <a:off x="457200" y="5676900"/>
-            <a:ext cx="7581900" cy="419100"/>
-          </a:xfrm>
-          <a:prstGeom prst="rect">
-            <a:avLst/>
-          </a:prstGeom>
-          <a:noFill/>
-          <a:ln/>
-        </p:spPr>
-        <p:txBody>
-          <a:bodyPr wrap="none" lIns="0" tIns="0" rIns="0" bIns="0" rtlCol="0" anchor="t"/>
-          <a:lstStyle/>
-          <a:p>
-            <a:pPr algn="l" indent="0" marL="0">
-              <a:lnSpc>
-                <a:spcPts val="2160"/>
-              </a:lnSpc>
-              <a:buNone/>
-            </a:pPr>
-            <a:r>
-              <a:rPr lang="zh-CN" altLang="en-US" sz="1800" b="1" dirty="0">
-                <a:solidFill>
-                  <a:srgbClr val="173C70"/>
-                </a:solidFill>
-                <a:latin typeface="Noto Sans CJK SC" pitchFamily="34" charset="0"/>
-                <a:ea typeface="Noto Sans CJK SC" pitchFamily="34" charset="-122"/>
-                <a:cs typeface="Noto Sans CJK SC" pitchFamily="34" charset="-120"/>
-              </a:rPr>
-              <a:t>解释必须由本页证据支持，并保留样本、对照与适用条件。</a:t>
-            </a:r>
-            <a:endParaRPr lang="zh-CN" sz="1800" dirty="0"/>
-          </a:p>
-        </p:txBody>
       </p:sp>
       <p:graphicFrame>
         <p:nvGraphicFramePr>
@@ -2914,7 +2933,7 @@
           </p:nvPr>
         </p:nvGraphicFramePr>
         <p:xfrm>
-          <a:off x="457200" y="1466850"/>
+          <a:off x="457200" y="1285875"/>
           <a:ext cx="7581900" cy="2270379"/>
         </p:xfrm>
         <a:graphic>
@@ -4051,13 +4070,13 @@
       </p:graphicFrame>
       <p:sp>
         <p:nvSpPr>
-          <p:cNvPr id="9" name="T14/table-caption"/>
-          <p:cNvSpPr/>
-          <p:nvPr/>
-        </p:nvSpPr>
-        <p:spPr>
-          <a:xfrm>
-            <a:off x="457200" y="3803904"/>
+          <p:cNvPr id="8" name="T14/table-caption"/>
+          <p:cNvSpPr/>
+          <p:nvPr/>
+        </p:nvSpPr>
+        <p:spPr>
+          <a:xfrm>
+            <a:off x="457200" y="3622929"/>
             <a:ext cx="7581900" cy="209550"/>
           </a:xfrm>
           <a:prstGeom prst="rect">
@@ -4093,14 +4112,14 @@
       </p:sp>
       <p:sp>
         <p:nvSpPr>
-          <p:cNvPr id="10" name="T14/card/region-1/frame"/>
-          <p:cNvSpPr/>
-          <p:nvPr/>
-        </p:nvSpPr>
-        <p:spPr>
-          <a:xfrm>
-            <a:off x="8362950" y="1390650"/>
-            <a:ext cx="3371850" cy="2114550"/>
+          <p:cNvPr id="9" name="T14/card/region-1/frame"/>
+          <p:cNvSpPr/>
+          <p:nvPr/>
+        </p:nvSpPr>
+        <p:spPr>
+          <a:xfrm>
+            <a:off x="8362950" y="1206722"/>
+            <a:ext cx="3371850" cy="2195894"/>
           </a:xfrm>
           <a:prstGeom prst="rect">
             <a:avLst/>
@@ -4118,20 +4137,20 @@
       </p:sp>
       <p:sp>
         <p:nvSpPr>
-          <p:cNvPr id="11" name="T14/card/region-1/heading-fill"/>
-          <p:cNvSpPr/>
-          <p:nvPr/>
-        </p:nvSpPr>
-        <p:spPr>
-          <a:xfrm>
-            <a:off x="8372475" y="1400175"/>
+          <p:cNvPr id="10" name="T14/card/region-1/heading-fill"/>
+          <p:cNvSpPr/>
+          <p:nvPr/>
+        </p:nvSpPr>
+        <p:spPr>
+          <a:xfrm>
+            <a:off x="8372475" y="1216247"/>
             <a:ext cx="3352800" cy="371475"/>
           </a:xfrm>
           <a:prstGeom prst="rect">
             <a:avLst/>
           </a:prstGeom>
           <a:solidFill>
-            <a:srgbClr val="EEF3F8"/>
+            <a:srgbClr val="EAF2FA"/>
           </a:solidFill>
           <a:ln w="12700">
             <a:solidFill>
@@ -4145,13 +4164,13 @@
       </p:sp>
       <p:sp>
         <p:nvSpPr>
-          <p:cNvPr id="12" name="T14/card/region-1/heading-rule"/>
-          <p:cNvSpPr/>
-          <p:nvPr/>
-        </p:nvSpPr>
-        <p:spPr>
-          <a:xfrm>
-            <a:off x="8362950" y="1771650"/>
+          <p:cNvPr id="11" name="T14/card/region-1/heading-rule"/>
+          <p:cNvSpPr/>
+          <p:nvPr/>
+        </p:nvSpPr>
+        <p:spPr>
+          <a:xfrm>
+            <a:off x="8362950" y="1587722"/>
             <a:ext cx="3371850" cy="0"/>
           </a:xfrm>
           <a:prstGeom prst="line">
@@ -4168,14 +4187,14 @@
       </p:sp>
       <p:sp>
         <p:nvSpPr>
-          <p:cNvPr id="13" name="T14/card/region-1/title"/>
-          <p:cNvSpPr/>
-          <p:nvPr/>
-        </p:nvSpPr>
-        <p:spPr>
-          <a:xfrm>
-            <a:off x="8486775" y="1447800"/>
-            <a:ext cx="3124200" cy="276225"/>
+          <p:cNvPr id="12" name="T14/card/region-1/title"/>
+          <p:cNvSpPr/>
+          <p:nvPr/>
+        </p:nvSpPr>
+        <p:spPr>
+          <a:xfrm>
+            <a:off x="8486775" y="1254347"/>
+            <a:ext cx="3124200" cy="295275"/>
           </a:xfrm>
           <a:prstGeom prst="rect">
             <a:avLst/>
@@ -4189,14 +4208,14 @@
           <a:p>
             <a:pPr algn="l" indent="0" marL="0">
               <a:lnSpc>
-                <a:spcPts val="2070"/>
+                <a:spcPts val="2242"/>
               </a:lnSpc>
               <a:buNone/>
             </a:pPr>
             <a:r>
-              <a:rPr lang="zh-CN" altLang="en-US" sz="1800" b="1" dirty="0">
+              <a:rPr lang="zh-CN" altLang="en-US" sz="1950" b="1" dirty="0">
                 <a:solidFill>
-                  <a:srgbClr val="173C70"/>
+                  <a:srgbClr val="235E96"/>
                 </a:solidFill>
                 <a:latin typeface="Noto Sans CJK SC" pitchFamily="34" charset="0"/>
                 <a:ea typeface="Noto Sans CJK SC" pitchFamily="34" charset="-122"/>
@@ -4204,20 +4223,20 @@
               </a:rPr>
               <a:t>随机化与重复</a:t>
             </a:r>
-            <a:endParaRPr lang="zh-CN" sz="1800" dirty="0"/>
+            <a:endParaRPr lang="zh-CN" sz="1950" dirty="0"/>
           </a:p>
         </p:txBody>
       </p:sp>
       <p:sp>
         <p:nvSpPr>
-          <p:cNvPr id="14" name="T14/card/region-1/body"/>
-          <p:cNvSpPr/>
-          <p:nvPr/>
-        </p:nvSpPr>
-        <p:spPr>
-          <a:xfrm>
-            <a:off x="8496300" y="1885950"/>
-            <a:ext cx="3105150" cy="1524000"/>
+          <p:cNvPr id="13" name="T14/card/region-1/body"/>
+          <p:cNvSpPr/>
+          <p:nvPr/>
+        </p:nvSpPr>
+        <p:spPr>
+          <a:xfrm>
+            <a:off x="8496300" y="1692497"/>
+            <a:ext cx="3105150" cy="1614869"/>
           </a:xfrm>
           <a:prstGeom prst="rect">
             <a:avLst/>
@@ -4231,12 +4250,12 @@
           <a:p>
             <a:pPr algn="l" indent="0" marL="0">
               <a:lnSpc>
-                <a:spcPts val="2139"/>
+                <a:spcPts val="2232"/>
               </a:lnSpc>
               <a:buNone/>
             </a:pPr>
             <a:r>
-              <a:rPr lang="zh-CN" altLang="en-US" sz="1725" dirty="0">
+              <a:rPr lang="zh-CN" altLang="en-US" sz="1800" dirty="0">
                 <a:solidFill>
                   <a:srgbClr val="1C2430"/>
                 </a:solidFill>
@@ -4246,17 +4265,17 @@
               </a:rPr>
               <a:t>说明处理分配与区组</a:t>
             </a:r>
-            <a:endParaRPr lang="zh-CN" sz="1725" dirty="0"/>
+            <a:endParaRPr lang="zh-CN" sz="1800" dirty="0"/>
           </a:p>
           <a:p>
             <a:pPr algn="l" indent="0" marL="0">
               <a:lnSpc>
-                <a:spcPts val="2139"/>
+                <a:spcPts val="2232"/>
               </a:lnSpc>
               <a:buNone/>
             </a:pPr>
             <a:r>
-              <a:rPr lang="zh-CN" altLang="en-US" sz="1725" dirty="0">
+              <a:rPr lang="zh-CN" altLang="en-US" sz="1800" dirty="0">
                 <a:solidFill>
                   <a:srgbClr val="1C2430"/>
                 </a:solidFill>
@@ -4264,19 +4283,53 @@
                 <a:ea typeface="Noto Sans CJK SC" pitchFamily="34" charset="-122"/>
                 <a:cs typeface="Noto Sans CJK SC" pitchFamily="34" charset="-120"/>
               </a:rPr>
-              <a:t>写清每组独立重复数</a:t>
-            </a:r>
-            <a:endParaRPr lang="zh-CN" sz="1725" dirty="0"/>
-          </a:p>
-          <a:p>
+              <a:t>写清每组</a:t>
+            </a:r>
             <a:pPr algn="l" indent="0" marL="0">
               <a:lnSpc>
-                <a:spcPts val="2139"/>
+                <a:spcPts val="2232"/>
               </a:lnSpc>
               <a:buNone/>
             </a:pPr>
             <a:r>
-              <a:rPr lang="zh-CN" altLang="en-US" sz="1725" dirty="0">
+              <a:rPr lang="zh-CN" altLang="en-US" sz="1800" b="1" dirty="0">
+                <a:solidFill>
+                  <a:srgbClr val="235E96"/>
+                </a:solidFill>
+                <a:latin typeface="Noto Sans CJK SC" pitchFamily="34" charset="0"/>
+                <a:ea typeface="Noto Sans CJK SC" pitchFamily="34" charset="-122"/>
+                <a:cs typeface="Noto Sans CJK SC" pitchFamily="34" charset="-120"/>
+              </a:rPr>
+              <a:t>独立重复</a:t>
+            </a:r>
+            <a:pPr algn="l" indent="0" marL="0">
+              <a:lnSpc>
+                <a:spcPts val="2232"/>
+              </a:lnSpc>
+              <a:buNone/>
+            </a:pPr>
+            <a:r>
+              <a:rPr lang="zh-CN" altLang="en-US" sz="1800" dirty="0">
+                <a:solidFill>
+                  <a:srgbClr val="1C2430"/>
+                </a:solidFill>
+                <a:latin typeface="Noto Sans CJK SC" pitchFamily="34" charset="0"/>
+                <a:ea typeface="Noto Sans CJK SC" pitchFamily="34" charset="-122"/>
+                <a:cs typeface="Noto Sans CJK SC" pitchFamily="34" charset="-120"/>
+              </a:rPr>
+              <a:t>数</a:t>
+            </a:r>
+            <a:endParaRPr lang="zh-CN" sz="1800" dirty="0"/>
+          </a:p>
+          <a:p>
+            <a:pPr algn="l" indent="0" marL="0">
+              <a:lnSpc>
+                <a:spcPts val="2232"/>
+              </a:lnSpc>
+              <a:buNone/>
+            </a:pPr>
+            <a:r>
+              <a:rPr lang="zh-CN" altLang="en-US" sz="1800" dirty="0">
                 <a:solidFill>
                   <a:srgbClr val="1C2430"/>
                 </a:solidFill>
@@ -4286,51 +4339,60 @@
               </a:rPr>
               <a:t>将技术重复与生物重复区分</a:t>
             </a:r>
-            <a:endParaRPr lang="zh-CN" sz="1725" dirty="0"/>
+            <a:endParaRPr lang="zh-CN" sz="1800" dirty="0"/>
           </a:p>
         </p:txBody>
       </p:sp>
       <p:sp>
         <p:nvSpPr>
-          <p:cNvPr id="15" name="T14/card/region-2/heading-rule"/>
-          <p:cNvSpPr/>
-          <p:nvPr/>
-        </p:nvSpPr>
-        <p:spPr>
-          <a:xfrm>
-            <a:off x="8362950" y="4095750"/>
-            <a:ext cx="3371850" cy="0"/>
-          </a:xfrm>
-          <a:prstGeom prst="line">
-            <a:avLst/>
-          </a:prstGeom>
-          <a:noFill/>
+          <p:cNvPr id="14" name="T14/card/region-2/frame"/>
+          <p:cNvSpPr/>
+          <p:nvPr/>
+        </p:nvSpPr>
+        <p:spPr>
+          <a:xfrm>
+            <a:off x="457200" y="4042029"/>
+            <a:ext cx="11277600" cy="1681544"/>
+          </a:xfrm>
+          <a:prstGeom prst="rect">
+            <a:avLst/>
+          </a:prstGeom>
+          <a:solidFill>
+            <a:srgbClr val="FFFFFF"/>
+          </a:solidFill>
           <a:ln w="9525">
             <a:solidFill>
               <a:srgbClr val="BEC8D4"/>
             </a:solidFill>
             <a:prstDash val="solid"/>
           </a:ln>
-        </p:spPr>
-      </p:sp>
-      <p:sp>
-        <p:nvSpPr>
-          <p:cNvPr id="16" name="T14/card/region-2/heading-mark"/>
-          <p:cNvSpPr/>
-          <p:nvPr/>
-        </p:nvSpPr>
-        <p:spPr>
-          <a:xfrm>
-            <a:off x="8362950" y="4095750"/>
-            <a:ext cx="342900" cy="0"/>
+          <a:effectLst>
+            <a:outerShdw sx="100000" sy="100000" kx="0" ky="0" algn="bl" rotWithShape="0" blurRad="28575" dist="19050" dir="5400000">
+              <a:srgbClr val="20334A">
+                <a:alpha val="10000"/>
+              </a:srgbClr>
+            </a:outerShdw>
+          </a:effectLst>
+        </p:spPr>
+      </p:sp>
+      <p:sp>
+        <p:nvSpPr>
+          <p:cNvPr id="15" name="T14/card/region-2/top-accent"/>
+          <p:cNvSpPr/>
+          <p:nvPr/>
+        </p:nvSpPr>
+        <p:spPr>
+          <a:xfrm>
+            <a:off x="647700" y="4156329"/>
+            <a:ext cx="400050" cy="0"/>
           </a:xfrm>
           <a:prstGeom prst="line">
             <a:avLst/>
           </a:prstGeom>
           <a:noFill/>
-          <a:ln w="17145">
+          <a:ln w="28575">
             <a:solidFill>
-              <a:srgbClr val="173C70"/>
+              <a:srgbClr val="146C63"/>
             </a:solidFill>
             <a:prstDash val="solid"/>
           </a:ln>
@@ -4338,14 +4400,14 @@
       </p:sp>
       <p:sp>
         <p:nvSpPr>
-          <p:cNvPr id="17" name="T14/card/region-2/title"/>
-          <p:cNvSpPr/>
-          <p:nvPr/>
-        </p:nvSpPr>
-        <p:spPr>
-          <a:xfrm>
-            <a:off x="8362950" y="3752850"/>
-            <a:ext cx="3371850" cy="323850"/>
+          <p:cNvPr id="16" name="T14/card/region-2/title"/>
+          <p:cNvSpPr/>
+          <p:nvPr/>
+        </p:nvSpPr>
+        <p:spPr>
+          <a:xfrm>
+            <a:off x="647700" y="4242054"/>
+            <a:ext cx="10896600" cy="361950"/>
           </a:xfrm>
           <a:prstGeom prst="rect">
             <a:avLst/>
@@ -4359,14 +4421,14 @@
           <a:p>
             <a:pPr algn="l" indent="0" marL="0">
               <a:lnSpc>
-                <a:spcPts val="2156"/>
+                <a:spcPts val="2242"/>
               </a:lnSpc>
               <a:buNone/>
             </a:pPr>
             <a:r>
-              <a:rPr lang="zh-CN" altLang="en-US" sz="1875" b="1" dirty="0">
+              <a:rPr lang="zh-CN" altLang="en-US" sz="1950" b="1" dirty="0">
                 <a:solidFill>
-                  <a:srgbClr val="173C70"/>
+                  <a:srgbClr val="146C63"/>
                 </a:solidFill>
                 <a:latin typeface="Noto Sans CJK SC" pitchFamily="34" charset="0"/>
                 <a:ea typeface="Noto Sans CJK SC" pitchFamily="34" charset="-122"/>
@@ -4374,20 +4436,20 @@
               </a:rPr>
               <a:t>效应解释</a:t>
             </a:r>
-            <a:endParaRPr lang="zh-CN" sz="1875" dirty="0"/>
+            <a:endParaRPr lang="zh-CN" sz="1950" dirty="0"/>
           </a:p>
         </p:txBody>
       </p:sp>
       <p:sp>
         <p:nvSpPr>
-          <p:cNvPr id="18" name="T14/card/region-2/body"/>
-          <p:cNvSpPr/>
-          <p:nvPr/>
-        </p:nvSpPr>
-        <p:spPr>
-          <a:xfrm>
-            <a:off x="8362950" y="4229100"/>
-            <a:ext cx="3371850" cy="1771650"/>
+          <p:cNvPr id="17" name="T14/card/region-2/body"/>
+          <p:cNvSpPr/>
+          <p:nvPr/>
+        </p:nvSpPr>
+        <p:spPr>
+          <a:xfrm>
+            <a:off x="647700" y="4708779"/>
+            <a:ext cx="10896600" cy="824293"/>
           </a:xfrm>
           <a:prstGeom prst="rect">
             <a:avLst/>
@@ -4438,23 +4500,45 @@
             </a:r>
             <a:endParaRPr lang="zh-CN" sz="1800" dirty="0"/>
           </a:p>
+        </p:txBody>
+      </p:sp>
+      <p:sp>
+        <p:nvSpPr>
+          <p:cNvPr id="18" name="T14/takeaway"/>
+          <p:cNvSpPr/>
+          <p:nvPr/>
+        </p:nvSpPr>
+        <p:spPr>
+          <a:xfrm>
+            <a:off x="457200" y="5837872"/>
+            <a:ext cx="11277600" cy="276987"/>
+          </a:xfrm>
+          <a:prstGeom prst="rect">
+            <a:avLst/>
+          </a:prstGeom>
+          <a:noFill/>
+          <a:ln/>
+        </p:spPr>
+        <p:txBody>
+          <a:bodyPr wrap="none" lIns="0" tIns="0" rIns="0" bIns="0" rtlCol="0" anchor="t"/>
+          <a:lstStyle/>
           <a:p>
             <a:pPr algn="l" indent="0" marL="0">
               <a:lnSpc>
-                <a:spcPts val="2232"/>
+                <a:spcPts val="2160"/>
               </a:lnSpc>
               <a:buNone/>
             </a:pPr>
             <a:r>
-              <a:rPr lang="zh-CN" altLang="en-US" sz="1800" dirty="0">
+              <a:rPr lang="zh-CN" altLang="en-US" sz="1800" b="1" dirty="0">
                 <a:solidFill>
-                  <a:srgbClr val="1C2430"/>
+                  <a:srgbClr val="173C70"/>
                 </a:solidFill>
                 <a:latin typeface="Noto Sans CJK SC" pitchFamily="34" charset="0"/>
                 <a:ea typeface="Noto Sans CJK SC" pitchFamily="34" charset="-122"/>
                 <a:cs typeface="Noto Sans CJK SC" pitchFamily="34" charset="-120"/>
               </a:rPr>
-              <a:t>多次比较的处理需在页上交代</a:t>
+              <a:t>统计口径、样本单位和适用条件需与原文一致</a:t>
             </a:r>
             <a:endParaRPr lang="zh-CN" sz="1800" dirty="0"/>
           </a:p>
@@ -4496,7 +4580,7 @@
                 <a:ea typeface="Noto Sans CJK SC" pitchFamily="34" charset="-122"/>
                 <a:cs typeface="Noto Sans CJK SC" pitchFamily="34" charset="-120"/>
               </a:rPr>
-              <a:t>T1 · 2026 · 待替换</a:t>
+              <a:t>T1 · 2026 · 书目占位；图表均为合成示例</a:t>
             </a:r>
             <a:endParaRPr lang="zh-CN" sz="1125" dirty="0"/>
           </a:p>
@@ -4605,14 +4689,14 @@
       </p:sp>
       <p:sp>
         <p:nvSpPr>
-          <p:cNvPr id="4" name="T15/kicker"/>
-          <p:cNvSpPr/>
-          <p:nvPr/>
-        </p:nvSpPr>
-        <p:spPr>
-          <a:xfrm>
-            <a:off x="457200" y="152400"/>
-            <a:ext cx="11277600" cy="190500"/>
+          <p:cNvPr id="4" name="T15/title"/>
+          <p:cNvSpPr/>
+          <p:nvPr/>
+        </p:nvSpPr>
+        <p:spPr>
+          <a:xfrm>
+            <a:off x="457200" y="209550"/>
+            <a:ext cx="11277600" cy="438150"/>
           </a:xfrm>
           <a:prstGeom prst="rect">
             <a:avLst/>
@@ -4626,54 +4710,12 @@
           <a:p>
             <a:pPr algn="l" indent="0" marL="0">
               <a:lnSpc>
-                <a:spcPts val="1320"/>
+                <a:spcPts val="3360"/>
               </a:lnSpc>
               <a:buNone/>
             </a:pPr>
             <a:r>
-              <a:rPr lang="zh-CN" altLang="en-US" sz="1200" dirty="0">
-                <a:solidFill>
-                  <a:srgbClr val="515B68"/>
-                </a:solidFill>
-                <a:latin typeface="Noto Sans CJK SC" pitchFamily="34" charset="0"/>
-                <a:ea typeface="Noto Sans CJK SC" pitchFamily="34" charset="-122"/>
-                <a:cs typeface="Noto Sans CJK SC" pitchFamily="34" charset="-120"/>
-              </a:rPr>
-              <a:t>结构模板 / 占位说明与合成数据</a:t>
-            </a:r>
-            <a:endParaRPr lang="zh-CN" sz="1200" dirty="0"/>
-          </a:p>
-        </p:txBody>
-      </p:sp>
-      <p:sp>
-        <p:nvSpPr>
-          <p:cNvPr id="5" name="T15/title"/>
-          <p:cNvSpPr/>
-          <p:nvPr/>
-        </p:nvSpPr>
-        <p:spPr>
-          <a:xfrm>
-            <a:off x="457200" y="381000"/>
-            <a:ext cx="11277600" cy="400050"/>
-          </a:xfrm>
-          <a:prstGeom prst="rect">
-            <a:avLst/>
-          </a:prstGeom>
-          <a:noFill/>
-          <a:ln/>
-        </p:spPr>
-        <p:txBody>
-          <a:bodyPr wrap="none" lIns="0" tIns="0" rIns="0" bIns="0" rtlCol="0" anchor="t"/>
-          <a:lstStyle/>
-          <a:p>
-            <a:pPr algn="l" indent="0" marL="0">
-              <a:lnSpc>
-                <a:spcPts val="2856"/>
-              </a:lnSpc>
-              <a:buNone/>
-            </a:pPr>
-            <a:r>
-              <a:rPr lang="zh-CN" altLang="en-US" sz="2550" b="1" dirty="0">
+              <a:rPr lang="zh-CN" altLang="en-US" sz="3000" b="1" dirty="0">
                 <a:solidFill>
                   <a:srgbClr val="1C2430"/>
                 </a:solidFill>
@@ -4683,26 +4725,49 @@
               </a:rPr>
               <a:t>训练验证与独立测试</a:t>
             </a:r>
-            <a:endParaRPr lang="zh-CN" sz="2550" dirty="0"/>
+            <a:endParaRPr lang="zh-CN" sz="3000" dirty="0"/>
           </a:p>
         </p:txBody>
       </p:sp>
       <p:sp>
         <p:nvSpPr>
-          <p:cNvPr id="6" name="T15/header-rule"/>
-          <p:cNvSpPr/>
-          <p:nvPr/>
-        </p:nvSpPr>
-        <p:spPr>
-          <a:xfrm>
-            <a:off x="457200" y="876300"/>
+          <p:cNvPr id="5" name="T15/header-rule"/>
+          <p:cNvSpPr/>
+          <p:nvPr/>
+        </p:nvSpPr>
+        <p:spPr>
+          <a:xfrm>
+            <a:off x="457200" y="752475"/>
             <a:ext cx="11277600" cy="0"/>
           </a:xfrm>
           <a:prstGeom prst="line">
             <a:avLst/>
           </a:prstGeom>
           <a:noFill/>
-          <a:ln w="11430">
+          <a:ln w="10478">
+            <a:solidFill>
+              <a:srgbClr val="BEC8D4"/>
+            </a:solidFill>
+            <a:prstDash val="solid"/>
+          </a:ln>
+        </p:spPr>
+      </p:sp>
+      <p:sp>
+        <p:nvSpPr>
+          <p:cNvPr id="6" name="T15/header-accent"/>
+          <p:cNvSpPr/>
+          <p:nvPr/>
+        </p:nvSpPr>
+        <p:spPr>
+          <a:xfrm>
+            <a:off x="457200" y="752475"/>
+            <a:ext cx="704850" cy="0"/>
+          </a:xfrm>
+          <a:prstGeom prst="line">
+            <a:avLst/>
+          </a:prstGeom>
+          <a:noFill/>
+          <a:ln w="28575">
             <a:solidFill>
               <a:srgbClr val="173C70"/>
             </a:solidFill>
@@ -4718,8 +4783,8 @@
         </p:nvSpPr>
         <p:spPr>
           <a:xfrm>
-            <a:off x="457200" y="1314450"/>
-            <a:ext cx="11277600" cy="2457450"/>
+            <a:off x="457200" y="1127570"/>
+            <a:ext cx="11277600" cy="2551938"/>
           </a:xfrm>
           <a:prstGeom prst="rect">
             <a:avLst/>
@@ -4743,14 +4808,14 @@
         </p:nvSpPr>
         <p:spPr>
           <a:xfrm>
-            <a:off x="466725" y="1323975"/>
+            <a:off x="466725" y="1137095"/>
             <a:ext cx="11258550" cy="381000"/>
           </a:xfrm>
           <a:prstGeom prst="rect">
             <a:avLst/>
           </a:prstGeom>
           <a:solidFill>
-            <a:srgbClr val="EEF3F8"/>
+            <a:srgbClr val="EAF2FA"/>
           </a:solidFill>
           <a:ln w="12700">
             <a:solidFill>
@@ -4770,7 +4835,7 @@
         </p:nvSpPr>
         <p:spPr>
           <a:xfrm>
-            <a:off x="457200" y="1704975"/>
+            <a:off x="457200" y="1518095"/>
             <a:ext cx="11277600" cy="0"/>
           </a:xfrm>
           <a:prstGeom prst="line">
@@ -4793,8 +4858,8 @@
         </p:nvSpPr>
         <p:spPr>
           <a:xfrm>
-            <a:off x="581025" y="1371600"/>
-            <a:ext cx="11029950" cy="295275"/>
+            <a:off x="581025" y="1175195"/>
+            <a:ext cx="11029950" cy="304800"/>
           </a:xfrm>
           <a:prstGeom prst="rect">
             <a:avLst/>
@@ -4808,14 +4873,14 @@
           <a:p>
             <a:pPr algn="l" indent="0" marL="0">
               <a:lnSpc>
-                <a:spcPts val="2070"/>
+                <a:spcPts val="2242"/>
               </a:lnSpc>
               <a:buNone/>
             </a:pPr>
             <a:r>
-              <a:rPr lang="zh-CN" altLang="en-US" sz="1800" b="1" dirty="0">
+              <a:rPr lang="zh-CN" altLang="en-US" sz="1950" b="1" dirty="0">
                 <a:solidFill>
-                  <a:srgbClr val="173C70"/>
+                  <a:srgbClr val="235E96"/>
                 </a:solidFill>
                 <a:latin typeface="Noto Sans CJK SC" pitchFamily="34" charset="0"/>
                 <a:ea typeface="Noto Sans CJK SC" pitchFamily="34" charset="-122"/>
@@ -4823,7 +4888,7 @@
               </a:rPr>
               <a:t>各集合承担不同职责</a:t>
             </a:r>
-            <a:endParaRPr lang="zh-CN" sz="1800" dirty="0"/>
+            <a:endParaRPr lang="zh-CN" sz="1950" dirty="0"/>
           </a:p>
         </p:txBody>
       </p:sp>
@@ -4835,8 +4900,8 @@
         </p:nvSpPr>
         <p:spPr>
           <a:xfrm>
-            <a:off x="6096000" y="2495550"/>
-            <a:ext cx="0" cy="219075"/>
+            <a:off x="6096000" y="2354104"/>
+            <a:ext cx="0" cy="227505"/>
           </a:xfrm>
           <a:prstGeom prst="line">
             <a:avLst/>
@@ -4858,7 +4923,7 @@
         </p:nvSpPr>
         <p:spPr>
           <a:xfrm flipH="1">
-            <a:off x="2171700" y="2714625"/>
+            <a:off x="2171700" y="2581608"/>
             <a:ext cx="3924300" cy="0"/>
           </a:xfrm>
           <a:prstGeom prst="line">
@@ -4881,8 +4946,8 @@
         </p:nvSpPr>
         <p:spPr>
           <a:xfrm>
-            <a:off x="2171700" y="2714625"/>
-            <a:ext cx="0" cy="219075"/>
+            <a:off x="2171700" y="2581608"/>
+            <a:ext cx="0" cy="227505"/>
           </a:xfrm>
           <a:prstGeom prst="line">
             <a:avLst/>
@@ -4905,8 +4970,8 @@
         </p:nvSpPr>
         <p:spPr>
           <a:xfrm>
-            <a:off x="6096000" y="2495550"/>
-            <a:ext cx="0" cy="438150"/>
+            <a:off x="6096000" y="2354104"/>
+            <a:ext cx="0" cy="455009"/>
           </a:xfrm>
           <a:prstGeom prst="line">
             <a:avLst/>
@@ -4929,8 +4994,8 @@
         </p:nvSpPr>
         <p:spPr>
           <a:xfrm>
-            <a:off x="6096000" y="2495550"/>
-            <a:ext cx="0" cy="219075"/>
+            <a:off x="6096000" y="2354104"/>
+            <a:ext cx="0" cy="227505"/>
           </a:xfrm>
           <a:prstGeom prst="line">
             <a:avLst/>
@@ -4952,7 +5017,7 @@
         </p:nvSpPr>
         <p:spPr>
           <a:xfrm>
-            <a:off x="6096000" y="2714625"/>
+            <a:off x="6096000" y="2581608"/>
             <a:ext cx="3924300" cy="0"/>
           </a:xfrm>
           <a:prstGeom prst="line">
@@ -4975,8 +5040,8 @@
         </p:nvSpPr>
         <p:spPr>
           <a:xfrm>
-            <a:off x="10020300" y="2714625"/>
-            <a:ext cx="0" cy="219075"/>
+            <a:off x="10020300" y="2581608"/>
+            <a:ext cx="0" cy="227505"/>
           </a:xfrm>
           <a:prstGeom prst="line">
             <a:avLst/>
@@ -4999,14 +5064,14 @@
         </p:nvSpPr>
         <p:spPr>
           <a:xfrm>
-            <a:off x="3333750" y="1809750"/>
-            <a:ext cx="5524500" cy="685800"/>
+            <a:off x="3333750" y="1641920"/>
+            <a:ext cx="5524500" cy="712184"/>
           </a:xfrm>
           <a:prstGeom prst="rect">
             <a:avLst/>
           </a:prstGeom>
           <a:solidFill>
-            <a:srgbClr val="FFFFFF"/>
+            <a:srgbClr val="F0F3F6"/>
           </a:solidFill>
           <a:ln w="11430">
             <a:solidFill>
@@ -5024,7 +5089,7 @@
         </p:nvSpPr>
         <p:spPr>
           <a:xfrm>
-            <a:off x="3333750" y="1809750"/>
+            <a:off x="3333750" y="1641920"/>
             <a:ext cx="5524500" cy="0"/>
           </a:xfrm>
           <a:prstGeom prst="line">
@@ -5033,7 +5098,7 @@
           <a:noFill/>
           <a:ln w="19050">
             <a:solidFill>
-              <a:srgbClr val="173C70"/>
+              <a:srgbClr val="536A7A"/>
             </a:solidFill>
             <a:prstDash val="solid"/>
           </a:ln>
@@ -5047,7 +5112,7 @@
         </p:nvSpPr>
         <p:spPr>
           <a:xfrm>
-            <a:off x="3448050" y="2019300"/>
+            <a:off x="3448050" y="1864662"/>
             <a:ext cx="5295900" cy="266700"/>
           </a:xfrm>
           <a:prstGeom prst="rect">
@@ -5069,7 +5134,7 @@
             <a:r>
               <a:rPr lang="zh-CN" altLang="en-US" sz="1800" b="1" dirty="0">
                 <a:solidFill>
-                  <a:srgbClr val="173C70"/>
+                  <a:srgbClr val="536A7A"/>
                 </a:solidFill>
                 <a:latin typeface="Noto Sans CJK SC" pitchFamily="34" charset="0"/>
                 <a:ea typeface="Noto Sans CJK SC" pitchFamily="34" charset="-122"/>
@@ -5089,14 +5154,14 @@
         </p:nvSpPr>
         <p:spPr>
           <a:xfrm>
-            <a:off x="609600" y="2933700"/>
-            <a:ext cx="3124200" cy="666750"/>
+            <a:off x="609600" y="2809113"/>
+            <a:ext cx="3124200" cy="692372"/>
           </a:xfrm>
           <a:prstGeom prst="rect">
             <a:avLst/>
           </a:prstGeom>
           <a:solidFill>
-            <a:srgbClr val="FFFFFF"/>
+            <a:srgbClr val="EAF2FA"/>
           </a:solidFill>
           <a:ln w="11430">
             <a:solidFill>
@@ -5114,7 +5179,7 @@
         </p:nvSpPr>
         <p:spPr>
           <a:xfrm>
-            <a:off x="609600" y="2933700"/>
+            <a:off x="609600" y="2809113"/>
             <a:ext cx="3124200" cy="0"/>
           </a:xfrm>
           <a:prstGeom prst="line">
@@ -5123,7 +5188,7 @@
           <a:noFill/>
           <a:ln w="19050">
             <a:solidFill>
-              <a:srgbClr val="173C70"/>
+              <a:srgbClr val="235E96"/>
             </a:solidFill>
             <a:prstDash val="solid"/>
           </a:ln>
@@ -5137,7 +5202,7 @@
         </p:nvSpPr>
         <p:spPr>
           <a:xfrm>
-            <a:off x="723900" y="3133725"/>
+            <a:off x="723900" y="3021949"/>
             <a:ext cx="2895600" cy="266700"/>
           </a:xfrm>
           <a:prstGeom prst="rect">
@@ -5159,7 +5224,7 @@
             <a:r>
               <a:rPr lang="zh-CN" altLang="en-US" sz="1800" b="1" dirty="0">
                 <a:solidFill>
-                  <a:srgbClr val="173C70"/>
+                  <a:srgbClr val="235E96"/>
                 </a:solidFill>
                 <a:latin typeface="Noto Sans CJK SC" pitchFamily="34" charset="0"/>
                 <a:ea typeface="Noto Sans CJK SC" pitchFamily="34" charset="-122"/>
@@ -5179,14 +5244,14 @@
         </p:nvSpPr>
         <p:spPr>
           <a:xfrm>
-            <a:off x="4533900" y="2933700"/>
-            <a:ext cx="3124200" cy="666750"/>
+            <a:off x="4533900" y="2809113"/>
+            <a:ext cx="3124200" cy="692372"/>
           </a:xfrm>
           <a:prstGeom prst="rect">
             <a:avLst/>
           </a:prstGeom>
           <a:solidFill>
-            <a:srgbClr val="FFFFFF"/>
+            <a:srgbClr val="E9F4F0"/>
           </a:solidFill>
           <a:ln w="11430">
             <a:solidFill>
@@ -5204,7 +5269,7 @@
         </p:nvSpPr>
         <p:spPr>
           <a:xfrm>
-            <a:off x="4533900" y="2933700"/>
+            <a:off x="4533900" y="2809113"/>
             <a:ext cx="3124200" cy="0"/>
           </a:xfrm>
           <a:prstGeom prst="line">
@@ -5213,7 +5278,7 @@
           <a:noFill/>
           <a:ln w="19050">
             <a:solidFill>
-              <a:srgbClr val="173C70"/>
+              <a:srgbClr val="146C63"/>
             </a:solidFill>
             <a:prstDash val="solid"/>
           </a:ln>
@@ -5227,7 +5292,7 @@
         </p:nvSpPr>
         <p:spPr>
           <a:xfrm>
-            <a:off x="4648200" y="3133725"/>
+            <a:off x="4648200" y="3021949"/>
             <a:ext cx="2895600" cy="266700"/>
           </a:xfrm>
           <a:prstGeom prst="rect">
@@ -5249,7 +5314,7 @@
             <a:r>
               <a:rPr lang="zh-CN" altLang="en-US" sz="1800" b="1" dirty="0">
                 <a:solidFill>
-                  <a:srgbClr val="173C70"/>
+                  <a:srgbClr val="146C63"/>
                 </a:solidFill>
                 <a:latin typeface="Noto Sans CJK SC" pitchFamily="34" charset="0"/>
                 <a:ea typeface="Noto Sans CJK SC" pitchFamily="34" charset="-122"/>
@@ -5269,14 +5334,14 @@
         </p:nvSpPr>
         <p:spPr>
           <a:xfrm>
-            <a:off x="8458200" y="2933700"/>
-            <a:ext cx="3124200" cy="666750"/>
+            <a:off x="8458200" y="2809113"/>
+            <a:ext cx="3124200" cy="692372"/>
           </a:xfrm>
           <a:prstGeom prst="rect">
             <a:avLst/>
           </a:prstGeom>
           <a:solidFill>
-            <a:srgbClr val="FFFFFF"/>
+            <a:srgbClr val="EAF2FA"/>
           </a:solidFill>
           <a:ln w="11430">
             <a:solidFill>
@@ -5294,7 +5359,7 @@
         </p:nvSpPr>
         <p:spPr>
           <a:xfrm>
-            <a:off x="8458200" y="2933700"/>
+            <a:off x="8458200" y="2809113"/>
             <a:ext cx="3124200" cy="0"/>
           </a:xfrm>
           <a:prstGeom prst="line">
@@ -5303,7 +5368,7 @@
           <a:noFill/>
           <a:ln w="19050">
             <a:solidFill>
-              <a:srgbClr val="173C70"/>
+              <a:srgbClr val="235E96"/>
             </a:solidFill>
             <a:prstDash val="solid"/>
           </a:ln>
@@ -5317,7 +5382,7 @@
         </p:nvSpPr>
         <p:spPr>
           <a:xfrm>
-            <a:off x="8572500" y="3133725"/>
+            <a:off x="8572500" y="3021949"/>
             <a:ext cx="2895600" cy="266700"/>
           </a:xfrm>
           <a:prstGeom prst="rect">
@@ -5339,7 +5404,7 @@
             <a:r>
               <a:rPr lang="zh-CN" altLang="en-US" sz="1800" b="1" dirty="0">
                 <a:solidFill>
-                  <a:srgbClr val="173C70"/>
+                  <a:srgbClr val="235E96"/>
                 </a:solidFill>
                 <a:latin typeface="Noto Sans CJK SC" pitchFamily="34" charset="0"/>
                 <a:ea typeface="Noto Sans CJK SC" pitchFamily="34" charset="-122"/>
@@ -5359,7 +5424,7 @@
         </p:nvSpPr>
         <p:spPr>
           <a:xfrm>
-            <a:off x="457200" y="6038850"/>
+            <a:off x="457200" y="6033707"/>
             <a:ext cx="5486400" cy="0"/>
           </a:xfrm>
           <a:prstGeom prst="line">
@@ -5382,14 +5447,14 @@
         </p:nvSpPr>
         <p:spPr>
           <a:xfrm>
-            <a:off x="457200" y="4019550"/>
+            <a:off x="457200" y="3936016"/>
             <a:ext cx="47625" cy="295275"/>
           </a:xfrm>
           <a:prstGeom prst="rect">
             <a:avLst/>
           </a:prstGeom>
           <a:solidFill>
-            <a:srgbClr val="173C70"/>
+            <a:srgbClr val="536A7A"/>
           </a:solidFill>
           <a:ln w="12700">
             <a:solidFill>
@@ -5409,7 +5474,7 @@
         </p:nvSpPr>
         <p:spPr>
           <a:xfrm>
-            <a:off x="609600" y="4019550"/>
+            <a:off x="609600" y="3936016"/>
             <a:ext cx="5334000" cy="304800"/>
           </a:xfrm>
           <a:prstGeom prst="rect">
@@ -5424,14 +5489,14 @@
           <a:p>
             <a:pPr algn="l" indent="0" marL="0">
               <a:lnSpc>
-                <a:spcPts val="2070"/>
+                <a:spcPts val="2242"/>
               </a:lnSpc>
               <a:buNone/>
             </a:pPr>
             <a:r>
-              <a:rPr lang="zh-CN" altLang="en-US" sz="1800" b="1" dirty="0">
+              <a:rPr lang="zh-CN" altLang="en-US" sz="1950" b="1" dirty="0">
                 <a:solidFill>
-                  <a:srgbClr val="173C70"/>
+                  <a:srgbClr val="536A7A"/>
                 </a:solidFill>
                 <a:latin typeface="Noto Sans CJK SC" pitchFamily="34" charset="0"/>
                 <a:ea typeface="Noto Sans CJK SC" pitchFamily="34" charset="-122"/>
@@ -5439,7 +5504,7 @@
               </a:rPr>
               <a:t>划分单位与留出条件</a:t>
             </a:r>
-            <a:endParaRPr lang="zh-CN" sz="1800" dirty="0"/>
+            <a:endParaRPr lang="zh-CN" sz="1950" dirty="0"/>
           </a:p>
         </p:txBody>
       </p:sp>
@@ -5451,8 +5516,8 @@
         </p:nvSpPr>
         <p:spPr>
           <a:xfrm>
-            <a:off x="609600" y="4438650"/>
-            <a:ext cx="5334000" cy="1504950"/>
+            <a:off x="609600" y="4355116"/>
+            <a:ext cx="5334000" cy="1583341"/>
           </a:xfrm>
           <a:prstGeom prst="rect">
             <a:avLst/>
@@ -5466,12 +5531,12 @@
           <a:p>
             <a:pPr algn="l" indent="0" marL="0">
               <a:lnSpc>
-                <a:spcPts val="2139"/>
+                <a:spcPts val="2232"/>
               </a:lnSpc>
               <a:buNone/>
             </a:pPr>
             <a:r>
-              <a:rPr lang="zh-CN" altLang="en-US" sz="1725" dirty="0">
+              <a:rPr lang="zh-CN" altLang="en-US" sz="1800" dirty="0">
                 <a:solidFill>
                   <a:srgbClr val="1C2430"/>
                 </a:solidFill>
@@ -5481,17 +5546,17 @@
               </a:rPr>
               <a:t>按个体、站点或年份划分</a:t>
             </a:r>
-            <a:endParaRPr lang="zh-CN" sz="1725" dirty="0"/>
+            <a:endParaRPr lang="zh-CN" sz="1800" dirty="0"/>
           </a:p>
           <a:p>
             <a:pPr algn="l" indent="0" marL="0">
               <a:lnSpc>
-                <a:spcPts val="2139"/>
+                <a:spcPts val="2232"/>
               </a:lnSpc>
               <a:buNone/>
             </a:pPr>
             <a:r>
-              <a:rPr lang="zh-CN" altLang="en-US" sz="1725" dirty="0">
+              <a:rPr lang="zh-CN" altLang="en-US" sz="1800" dirty="0">
                 <a:solidFill>
                   <a:srgbClr val="1C2430"/>
                 </a:solidFill>
@@ -5501,17 +5566,17 @@
               </a:rPr>
               <a:t>明确训练、验证与独立测试的职责</a:t>
             </a:r>
-            <a:endParaRPr lang="zh-CN" sz="1725" dirty="0"/>
+            <a:endParaRPr lang="zh-CN" sz="1800" dirty="0"/>
           </a:p>
           <a:p>
             <a:pPr algn="l" indent="0" marL="0">
               <a:lnSpc>
-                <a:spcPts val="2139"/>
+                <a:spcPts val="2232"/>
               </a:lnSpc>
               <a:buNone/>
             </a:pPr>
             <a:r>
-              <a:rPr lang="zh-CN" altLang="en-US" sz="1725" dirty="0">
+              <a:rPr lang="zh-CN" altLang="en-US" sz="1800" dirty="0">
                 <a:solidFill>
                   <a:srgbClr val="1C2430"/>
                 </a:solidFill>
@@ -5521,7 +5586,7 @@
               </a:rPr>
               <a:t>测试集不能参与特征或阈值选择</a:t>
             </a:r>
-            <a:endParaRPr lang="zh-CN" sz="1725" dirty="0"/>
+            <a:endParaRPr lang="zh-CN" sz="1800" dirty="0"/>
           </a:p>
         </p:txBody>
       </p:sp>
@@ -5533,8 +5598,8 @@
         </p:nvSpPr>
         <p:spPr>
           <a:xfrm>
-            <a:off x="6248400" y="4114800"/>
-            <a:ext cx="5486400" cy="1924050"/>
+            <a:off x="6248400" y="4031266"/>
+            <a:ext cx="5486400" cy="2002441"/>
           </a:xfrm>
           <a:prstGeom prst="rect">
             <a:avLst/>
@@ -5558,14 +5623,14 @@
         </p:nvSpPr>
         <p:spPr>
           <a:xfrm>
-            <a:off x="6362700" y="4000500"/>
-            <a:ext cx="1638300" cy="320040"/>
+            <a:off x="6362700" y="3916966"/>
+            <a:ext cx="1752600" cy="342900"/>
           </a:xfrm>
           <a:prstGeom prst="rect">
             <a:avLst/>
           </a:prstGeom>
           <a:solidFill>
-            <a:srgbClr val="173C70"/>
+            <a:srgbClr val="235E96"/>
           </a:solidFill>
           <a:ln w="12700">
             <a:solidFill>
@@ -5585,8 +5650,8 @@
         </p:nvSpPr>
         <p:spPr>
           <a:xfrm>
-            <a:off x="6467475" y="4029075"/>
-            <a:ext cx="1428750" cy="262890"/>
+            <a:off x="6467475" y="3945541"/>
+            <a:ext cx="1543050" cy="285750"/>
           </a:xfrm>
           <a:prstGeom prst="rect">
             <a:avLst/>
@@ -5600,12 +5665,12 @@
           <a:p>
             <a:pPr algn="l" indent="0" marL="0">
               <a:lnSpc>
-                <a:spcPts val="2070"/>
+                <a:spcPts val="2242"/>
               </a:lnSpc>
               <a:buNone/>
             </a:pPr>
             <a:r>
-              <a:rPr lang="zh-CN" altLang="en-US" sz="1800" b="1" dirty="0">
+              <a:rPr lang="zh-CN" altLang="en-US" sz="1950" b="1" dirty="0">
                 <a:solidFill>
                   <a:srgbClr val="FFFFFF"/>
                 </a:solidFill>
@@ -5615,7 +5680,7 @@
               </a:rPr>
               <a:t>信息泄漏检查</a:t>
             </a:r>
-            <a:endParaRPr lang="zh-CN" sz="1800" dirty="0"/>
+            <a:endParaRPr lang="zh-CN" sz="1950" dirty="0"/>
           </a:p>
         </p:txBody>
       </p:sp>
@@ -5627,8 +5692,8 @@
         </p:nvSpPr>
         <p:spPr>
           <a:xfrm>
-            <a:off x="6381750" y="4463415"/>
-            <a:ext cx="5219700" cy="1480185"/>
+            <a:off x="6381750" y="4402741"/>
+            <a:ext cx="5219700" cy="1535716"/>
           </a:xfrm>
           <a:prstGeom prst="rect">
             <a:avLst/>
@@ -5642,12 +5707,12 @@
           <a:p>
             <a:pPr algn="l" indent="0" marL="0">
               <a:lnSpc>
-                <a:spcPts val="2139"/>
+                <a:spcPts val="2232"/>
               </a:lnSpc>
               <a:buNone/>
             </a:pPr>
             <a:r>
-              <a:rPr lang="zh-CN" altLang="en-US" sz="1725" dirty="0">
+              <a:rPr lang="zh-CN" altLang="en-US" sz="1800" dirty="0">
                 <a:solidFill>
                   <a:srgbClr val="1C2430"/>
                 </a:solidFill>
@@ -5657,17 +5722,17 @@
               </a:rPr>
               <a:t>同一对象的重复观测不得跨集合泄漏</a:t>
             </a:r>
-            <a:endParaRPr lang="zh-CN" sz="1725" dirty="0"/>
+            <a:endParaRPr lang="zh-CN" sz="1800" dirty="0"/>
           </a:p>
           <a:p>
             <a:pPr algn="l" indent="0" marL="0">
               <a:lnSpc>
-                <a:spcPts val="2139"/>
+                <a:spcPts val="2232"/>
               </a:lnSpc>
               <a:buNone/>
             </a:pPr>
             <a:r>
-              <a:rPr lang="zh-CN" altLang="en-US" sz="1725" dirty="0">
+              <a:rPr lang="zh-CN" altLang="en-US" sz="1800" dirty="0">
                 <a:solidFill>
                   <a:srgbClr val="1C2430"/>
                 </a:solidFill>
@@ -5677,17 +5742,17 @@
               </a:rPr>
               <a:t>标准化、缺失填补应只拟合训练集</a:t>
             </a:r>
-            <a:endParaRPr lang="zh-CN" sz="1725" dirty="0"/>
+            <a:endParaRPr lang="zh-CN" sz="1800" dirty="0"/>
           </a:p>
           <a:p>
             <a:pPr algn="l" indent="0" marL="0">
               <a:lnSpc>
-                <a:spcPts val="2139"/>
+                <a:spcPts val="2232"/>
               </a:lnSpc>
               <a:buNone/>
             </a:pPr>
             <a:r>
-              <a:rPr lang="zh-CN" altLang="en-US" sz="1725" dirty="0">
+              <a:rPr lang="zh-CN" altLang="en-US" sz="1800" dirty="0">
                 <a:solidFill>
                   <a:srgbClr val="1C2430"/>
                 </a:solidFill>
@@ -5697,7 +5762,7 @@
               </a:rPr>
               <a:t>报告时序数据可见的信息范围</a:t>
             </a:r>
-            <a:endParaRPr lang="zh-CN" sz="1725" dirty="0"/>
+            <a:endParaRPr lang="zh-CN" sz="1800" dirty="0"/>
           </a:p>
         </p:txBody>
       </p:sp>
@@ -5737,7 +5802,7 @@
                 <a:ea typeface="Noto Sans CJK SC" pitchFamily="34" charset="-122"/>
                 <a:cs typeface="Noto Sans CJK SC" pitchFamily="34" charset="-120"/>
               </a:rPr>
-              <a:t>T1 · 2026 · 待替换</a:t>
+              <a:t>T1 · 2026 · 书目占位；图表均为合成示例</a:t>
             </a:r>
             <a:endParaRPr lang="zh-CN" sz="1125" dirty="0"/>
           </a:p>
@@ -5846,14 +5911,14 @@
       </p:sp>
       <p:sp>
         <p:nvSpPr>
-          <p:cNvPr id="4" name="T16/kicker"/>
-          <p:cNvSpPr/>
-          <p:nvPr/>
-        </p:nvSpPr>
-        <p:spPr>
-          <a:xfrm>
-            <a:off x="457200" y="152400"/>
-            <a:ext cx="11277600" cy="190500"/>
+          <p:cNvPr id="4" name="T16/title"/>
+          <p:cNvSpPr/>
+          <p:nvPr/>
+        </p:nvSpPr>
+        <p:spPr>
+          <a:xfrm>
+            <a:off x="457200" y="209550"/>
+            <a:ext cx="11277600" cy="438150"/>
           </a:xfrm>
           <a:prstGeom prst="rect">
             <a:avLst/>
@@ -5867,54 +5932,12 @@
           <a:p>
             <a:pPr algn="l" indent="0" marL="0">
               <a:lnSpc>
-                <a:spcPts val="1320"/>
+                <a:spcPts val="3360"/>
               </a:lnSpc>
               <a:buNone/>
             </a:pPr>
             <a:r>
-              <a:rPr lang="zh-CN" altLang="en-US" sz="1200" dirty="0">
-                <a:solidFill>
-                  <a:srgbClr val="515B68"/>
-                </a:solidFill>
-                <a:latin typeface="Noto Sans CJK SC" pitchFamily="34" charset="0"/>
-                <a:ea typeface="Noto Sans CJK SC" pitchFamily="34" charset="-122"/>
-                <a:cs typeface="Noto Sans CJK SC" pitchFamily="34" charset="-120"/>
-              </a:rPr>
-              <a:t>结构模板 / 占位说明与合成数据</a:t>
-            </a:r>
-            <a:endParaRPr lang="zh-CN" sz="1200" dirty="0"/>
-          </a:p>
-        </p:txBody>
-      </p:sp>
-      <p:sp>
-        <p:nvSpPr>
-          <p:cNvPr id="5" name="T16/title"/>
-          <p:cNvSpPr/>
-          <p:nvPr/>
-        </p:nvSpPr>
-        <p:spPr>
-          <a:xfrm>
-            <a:off x="457200" y="381000"/>
-            <a:ext cx="11277600" cy="400050"/>
-          </a:xfrm>
-          <a:prstGeom prst="rect">
-            <a:avLst/>
-          </a:prstGeom>
-          <a:noFill/>
-          <a:ln/>
-        </p:spPr>
-        <p:txBody>
-          <a:bodyPr wrap="none" lIns="0" tIns="0" rIns="0" bIns="0" rtlCol="0" anchor="t"/>
-          <a:lstStyle/>
-          <a:p>
-            <a:pPr algn="l" indent="0" marL="0">
-              <a:lnSpc>
-                <a:spcPts val="2856"/>
-              </a:lnSpc>
-              <a:buNone/>
-            </a:pPr>
-            <a:r>
-              <a:rPr lang="zh-CN" altLang="en-US" sz="2550" b="1" dirty="0">
+              <a:rPr lang="zh-CN" altLang="en-US" sz="3000" b="1" dirty="0">
                 <a:solidFill>
                   <a:srgbClr val="1C2430"/>
                 </a:solidFill>
@@ -5924,74 +5947,55 @@
               </a:rPr>
               <a:t>基线与公平对照</a:t>
             </a:r>
-            <a:endParaRPr lang="zh-CN" sz="2550" dirty="0"/>
+            <a:endParaRPr lang="zh-CN" sz="3000" dirty="0"/>
           </a:p>
         </p:txBody>
       </p:sp>
       <p:sp>
         <p:nvSpPr>
-          <p:cNvPr id="6" name="T16/header-rule"/>
-          <p:cNvSpPr/>
-          <p:nvPr/>
-        </p:nvSpPr>
-        <p:spPr>
-          <a:xfrm>
-            <a:off x="457200" y="876300"/>
+          <p:cNvPr id="5" name="T16/header-rule"/>
+          <p:cNvSpPr/>
+          <p:nvPr/>
+        </p:nvSpPr>
+        <p:spPr>
+          <a:xfrm>
+            <a:off x="457200" y="752475"/>
             <a:ext cx="11277600" cy="0"/>
           </a:xfrm>
           <a:prstGeom prst="line">
             <a:avLst/>
           </a:prstGeom>
           <a:noFill/>
-          <a:ln w="11430">
+          <a:ln w="10478">
+            <a:solidFill>
+              <a:srgbClr val="BEC8D4"/>
+            </a:solidFill>
+            <a:prstDash val="solid"/>
+          </a:ln>
+        </p:spPr>
+      </p:sp>
+      <p:sp>
+        <p:nvSpPr>
+          <p:cNvPr id="6" name="T16/header-accent"/>
+          <p:cNvSpPr/>
+          <p:nvPr/>
+        </p:nvSpPr>
+        <p:spPr>
+          <a:xfrm>
+            <a:off x="457200" y="752475"/>
+            <a:ext cx="704850" cy="0"/>
+          </a:xfrm>
+          <a:prstGeom prst="line">
+            <a:avLst/>
+          </a:prstGeom>
+          <a:noFill/>
+          <a:ln w="28575">
             <a:solidFill>
               <a:srgbClr val="173C70"/>
             </a:solidFill>
             <a:prstDash val="solid"/>
           </a:ln>
         </p:spPr>
-      </p:sp>
-      <p:sp>
-        <p:nvSpPr>
-          <p:cNvPr id="7" name="T16/takeaway"/>
-          <p:cNvSpPr/>
-          <p:nvPr/>
-        </p:nvSpPr>
-        <p:spPr>
-          <a:xfrm>
-            <a:off x="457200" y="5867400"/>
-            <a:ext cx="7848600" cy="266700"/>
-          </a:xfrm>
-          <a:prstGeom prst="rect">
-            <a:avLst/>
-          </a:prstGeom>
-          <a:noFill/>
-          <a:ln/>
-        </p:spPr>
-        <p:txBody>
-          <a:bodyPr wrap="none" lIns="0" tIns="0" rIns="0" bIns="0" rtlCol="0" anchor="t"/>
-          <a:lstStyle/>
-          <a:p>
-            <a:pPr algn="l" indent="0" marL="0">
-              <a:lnSpc>
-                <a:spcPts val="2160"/>
-              </a:lnSpc>
-              <a:buNone/>
-            </a:pPr>
-            <a:r>
-              <a:rPr lang="zh-CN" altLang="en-US" sz="1800" b="1" dirty="0">
-                <a:solidFill>
-                  <a:srgbClr val="173C70"/>
-                </a:solidFill>
-                <a:latin typeface="Noto Sans CJK SC" pitchFamily="34" charset="0"/>
-                <a:ea typeface="Noto Sans CJK SC" pitchFamily="34" charset="-122"/>
-                <a:cs typeface="Noto Sans CJK SC" pitchFamily="34" charset="-120"/>
-              </a:rPr>
-              <a:t>统计口径、样本单位和适用条件需与原文一致</a:t>
-            </a:r>
-            <a:endParaRPr lang="zh-CN" sz="1800" dirty="0"/>
-          </a:p>
-        </p:txBody>
       </p:sp>
       <p:graphicFrame>
         <p:nvGraphicFramePr>
@@ -6008,7 +6012,7 @@
           </p:nvPr>
         </p:nvGraphicFramePr>
         <p:xfrm>
-          <a:off x="457200" y="1428750"/>
+          <a:off x="457200" y="1246346"/>
           <a:ext cx="7848600" cy="2403729"/>
         </p:xfrm>
         <a:graphic>
@@ -7010,13 +7014,13 @@
       </p:graphicFrame>
       <p:sp>
         <p:nvSpPr>
-          <p:cNvPr id="9" name="T16/table-caption"/>
-          <p:cNvSpPr/>
-          <p:nvPr/>
-        </p:nvSpPr>
-        <p:spPr>
-          <a:xfrm>
-            <a:off x="457200" y="3899154"/>
+          <p:cNvPr id="8" name="T16/table-caption"/>
+          <p:cNvSpPr/>
+          <p:nvPr/>
+        </p:nvSpPr>
+        <p:spPr>
+          <a:xfrm>
+            <a:off x="457200" y="3716750"/>
             <a:ext cx="7848600" cy="209550"/>
           </a:xfrm>
           <a:prstGeom prst="rect">
@@ -7052,13 +7056,13 @@
       </p:sp>
       <p:sp>
         <p:nvSpPr>
-          <p:cNvPr id="10" name="T16/card/region-1/base-rule"/>
-          <p:cNvSpPr/>
-          <p:nvPr/>
-        </p:nvSpPr>
-        <p:spPr>
-          <a:xfrm>
-            <a:off x="8629650" y="3467100"/>
+          <p:cNvPr id="9" name="T16/card/region-1/base-rule"/>
+          <p:cNvSpPr/>
+          <p:nvPr/>
+        </p:nvSpPr>
+        <p:spPr>
+          <a:xfrm>
+            <a:off x="8629650" y="3363087"/>
             <a:ext cx="3105150" cy="0"/>
           </a:xfrm>
           <a:prstGeom prst="line">
@@ -7075,20 +7079,20 @@
       </p:sp>
       <p:sp>
         <p:nvSpPr>
-          <p:cNvPr id="11" name="T16/card/region-1/side-mark"/>
-          <p:cNvSpPr/>
-          <p:nvPr/>
-        </p:nvSpPr>
-        <p:spPr>
-          <a:xfrm>
-            <a:off x="8629650" y="1447800"/>
+          <p:cNvPr id="10" name="T16/card/region-1/side-mark"/>
+          <p:cNvSpPr/>
+          <p:nvPr/>
+        </p:nvSpPr>
+        <p:spPr>
+          <a:xfrm>
+            <a:off x="8629650" y="1265396"/>
             <a:ext cx="47625" cy="295275"/>
           </a:xfrm>
           <a:prstGeom prst="rect">
             <a:avLst/>
           </a:prstGeom>
           <a:solidFill>
-            <a:srgbClr val="173C70"/>
+            <a:srgbClr val="536A7A"/>
           </a:solidFill>
           <a:ln w="12700">
             <a:solidFill>
@@ -7102,13 +7106,13 @@
       </p:sp>
       <p:sp>
         <p:nvSpPr>
-          <p:cNvPr id="12" name="T16/card/region-1/title"/>
-          <p:cNvSpPr/>
-          <p:nvPr/>
-        </p:nvSpPr>
-        <p:spPr>
-          <a:xfrm>
-            <a:off x="8782050" y="1447800"/>
+          <p:cNvPr id="11" name="T16/card/region-1/title"/>
+          <p:cNvSpPr/>
+          <p:nvPr/>
+        </p:nvSpPr>
+        <p:spPr>
+          <a:xfrm>
+            <a:off x="8782050" y="1265396"/>
             <a:ext cx="2952750" cy="304800"/>
           </a:xfrm>
           <a:prstGeom prst="rect">
@@ -7123,14 +7127,14 @@
           <a:p>
             <a:pPr algn="l" indent="0" marL="0">
               <a:lnSpc>
-                <a:spcPts val="2070"/>
+                <a:spcPts val="2242"/>
               </a:lnSpc>
               <a:buNone/>
             </a:pPr>
             <a:r>
-              <a:rPr lang="zh-CN" altLang="en-US" sz="1800" b="1" dirty="0">
+              <a:rPr lang="zh-CN" altLang="en-US" sz="1950" b="1" dirty="0">
                 <a:solidFill>
-                  <a:srgbClr val="173C70"/>
+                  <a:srgbClr val="536A7A"/>
                 </a:solidFill>
                 <a:latin typeface="Noto Sans CJK SC" pitchFamily="34" charset="0"/>
                 <a:ea typeface="Noto Sans CJK SC" pitchFamily="34" charset="-122"/>
@@ -7138,20 +7142,20 @@
               </a:rPr>
               <a:t>共同预算</a:t>
             </a:r>
-            <a:endParaRPr lang="zh-CN" sz="1800" dirty="0"/>
+            <a:endParaRPr lang="zh-CN" sz="1950" dirty="0"/>
           </a:p>
         </p:txBody>
       </p:sp>
       <p:sp>
         <p:nvSpPr>
-          <p:cNvPr id="13" name="T16/card/region-1/body"/>
-          <p:cNvSpPr/>
-          <p:nvPr/>
-        </p:nvSpPr>
-        <p:spPr>
-          <a:xfrm>
-            <a:off x="8782050" y="1866900"/>
-            <a:ext cx="2952750" cy="1504950"/>
+          <p:cNvPr id="12" name="T16/card/region-1/body"/>
+          <p:cNvSpPr/>
+          <p:nvPr/>
+        </p:nvSpPr>
+        <p:spPr>
+          <a:xfrm>
+            <a:off x="8782050" y="1684496"/>
+            <a:ext cx="2952750" cy="1583341"/>
           </a:xfrm>
           <a:prstGeom prst="rect">
             <a:avLst/>
@@ -7165,12 +7169,12 @@
           <a:p>
             <a:pPr algn="l" indent="0" marL="0">
               <a:lnSpc>
-                <a:spcPts val="2139"/>
+                <a:spcPts val="2232"/>
               </a:lnSpc>
               <a:buNone/>
             </a:pPr>
             <a:r>
-              <a:rPr lang="zh-CN" altLang="en-US" sz="1725" dirty="0">
+              <a:rPr lang="zh-CN" altLang="en-US" sz="1800" dirty="0">
                 <a:solidFill>
                   <a:srgbClr val="1C2430"/>
                 </a:solidFill>
@@ -7178,19 +7182,19 @@
                 <a:ea typeface="Noto Sans CJK SC" pitchFamily="34" charset="-122"/>
                 <a:cs typeface="Noto Sans CJK SC" pitchFamily="34" charset="-120"/>
               </a:rPr>
-              <a:t>观测、工具与训练预算保持一</a:t>
-            </a:r>
-            <a:endParaRPr lang="zh-CN" sz="1725" dirty="0"/>
+              <a:t>观测、工具与训练预算保持</a:t>
+            </a:r>
+            <a:endParaRPr lang="zh-CN" sz="1800" dirty="0"/>
           </a:p>
           <a:p>
             <a:pPr algn="l" indent="0" marL="0">
               <a:lnSpc>
-                <a:spcPts val="2139"/>
+                <a:spcPts val="2232"/>
               </a:lnSpc>
               <a:buNone/>
             </a:pPr>
             <a:r>
-              <a:rPr lang="zh-CN" altLang="en-US" sz="1725" dirty="0">
+              <a:rPr lang="zh-CN" altLang="en-US" sz="1800" dirty="0">
                 <a:solidFill>
                   <a:srgbClr val="1C2430"/>
                 </a:solidFill>
@@ -7198,19 +7202,19 @@
                 <a:ea typeface="Noto Sans CJK SC" pitchFamily="34" charset="-122"/>
                 <a:cs typeface="Noto Sans CJK SC" pitchFamily="34" charset="-120"/>
               </a:rPr>
-              <a:t>致</a:t>
-            </a:r>
-            <a:endParaRPr lang="zh-CN" sz="1725" dirty="0"/>
+              <a:t>一致</a:t>
+            </a:r>
+            <a:endParaRPr lang="zh-CN" sz="1800" dirty="0"/>
           </a:p>
           <a:p>
             <a:pPr algn="l" indent="0" marL="0">
               <a:lnSpc>
-                <a:spcPts val="2139"/>
+                <a:spcPts val="2232"/>
               </a:lnSpc>
               <a:buNone/>
             </a:pPr>
             <a:r>
-              <a:rPr lang="zh-CN" altLang="en-US" sz="1725" dirty="0">
+              <a:rPr lang="zh-CN" altLang="en-US" sz="1800" dirty="0">
                 <a:solidFill>
                   <a:srgbClr val="1C2430"/>
                 </a:solidFill>
@@ -7220,17 +7224,17 @@
               </a:rPr>
               <a:t>固定调参和人工干预次数</a:t>
             </a:r>
-            <a:endParaRPr lang="zh-CN" sz="1725" dirty="0"/>
+            <a:endParaRPr lang="zh-CN" sz="1800" dirty="0"/>
           </a:p>
           <a:p>
             <a:pPr algn="l" indent="0" marL="0">
               <a:lnSpc>
-                <a:spcPts val="2139"/>
+                <a:spcPts val="2232"/>
               </a:lnSpc>
               <a:buNone/>
             </a:pPr>
             <a:r>
-              <a:rPr lang="zh-CN" altLang="en-US" sz="1725" dirty="0">
+              <a:rPr lang="zh-CN" altLang="en-US" sz="1800" dirty="0">
                 <a:solidFill>
                   <a:srgbClr val="1C2430"/>
                 </a:solidFill>
@@ -7238,22 +7242,39 @@
                 <a:ea typeface="Noto Sans CJK SC" pitchFamily="34" charset="-122"/>
                 <a:cs typeface="Noto Sans CJK SC" pitchFamily="34" charset="-120"/>
               </a:rPr>
-              <a:t>报告运行时间与失败成本</a:t>
-            </a:r>
-            <a:endParaRPr lang="zh-CN" sz="1725" dirty="0"/>
+              <a:t>报告运行时间与</a:t>
+            </a:r>
+            <a:pPr algn="l" indent="0" marL="0">
+              <a:lnSpc>
+                <a:spcPts val="2232"/>
+              </a:lnSpc>
+              <a:buNone/>
+            </a:pPr>
+            <a:r>
+              <a:rPr lang="zh-CN" altLang="en-US" sz="1800" b="1" dirty="0">
+                <a:solidFill>
+                  <a:srgbClr val="536A7A"/>
+                </a:solidFill>
+                <a:latin typeface="Noto Sans CJK SC" pitchFamily="34" charset="0"/>
+                <a:ea typeface="Noto Sans CJK SC" pitchFamily="34" charset="-122"/>
+                <a:cs typeface="Noto Sans CJK SC" pitchFamily="34" charset="-120"/>
+              </a:rPr>
+              <a:t>失败成本</a:t>
+            </a:r>
+            <a:endParaRPr lang="zh-CN" sz="1800" dirty="0"/>
           </a:p>
         </p:txBody>
       </p:sp>
       <p:sp>
         <p:nvSpPr>
-          <p:cNvPr id="14" name="T16/card/region-2/frame"/>
-          <p:cNvSpPr/>
-          <p:nvPr/>
-        </p:nvSpPr>
-        <p:spPr>
-          <a:xfrm>
-            <a:off x="8629650" y="3829050"/>
-            <a:ext cx="3105150" cy="2152650"/>
+          <p:cNvPr id="13" name="T16/card/region-2/frame"/>
+          <p:cNvSpPr/>
+          <p:nvPr/>
+        </p:nvSpPr>
+        <p:spPr>
+          <a:xfrm>
+            <a:off x="457200" y="4231100"/>
+            <a:ext cx="11277600" cy="1507903"/>
           </a:xfrm>
           <a:prstGeom prst="rect">
             <a:avLst/>
@@ -7271,20 +7292,20 @@
       </p:sp>
       <p:sp>
         <p:nvSpPr>
-          <p:cNvPr id="15" name="T16/card/region-2/tab"/>
-          <p:cNvSpPr/>
-          <p:nvPr/>
-        </p:nvSpPr>
-        <p:spPr>
-          <a:xfrm>
-            <a:off x="8743950" y="3714750"/>
-            <a:ext cx="1181100" cy="320040"/>
+          <p:cNvPr id="14" name="T16/card/region-2/tab"/>
+          <p:cNvSpPr/>
+          <p:nvPr/>
+        </p:nvSpPr>
+        <p:spPr>
+          <a:xfrm>
+            <a:off x="571500" y="4116800"/>
+            <a:ext cx="1257300" cy="342900"/>
           </a:xfrm>
           <a:prstGeom prst="rect">
             <a:avLst/>
           </a:prstGeom>
           <a:solidFill>
-            <a:srgbClr val="173C70"/>
+            <a:srgbClr val="235E96"/>
           </a:solidFill>
           <a:ln w="12700">
             <a:solidFill>
@@ -7298,14 +7319,14 @@
       </p:sp>
       <p:sp>
         <p:nvSpPr>
-          <p:cNvPr id="16" name="T16/card/region-2/title"/>
-          <p:cNvSpPr/>
-          <p:nvPr/>
-        </p:nvSpPr>
-        <p:spPr>
-          <a:xfrm>
-            <a:off x="8848725" y="3743325"/>
-            <a:ext cx="971550" cy="262890"/>
+          <p:cNvPr id="15" name="T16/card/region-2/title"/>
+          <p:cNvSpPr/>
+          <p:nvPr/>
+        </p:nvSpPr>
+        <p:spPr>
+          <a:xfrm>
+            <a:off x="676275" y="4145375"/>
+            <a:ext cx="1047750" cy="285750"/>
           </a:xfrm>
           <a:prstGeom prst="rect">
             <a:avLst/>
@@ -7319,12 +7340,12 @@
           <a:p>
             <a:pPr algn="l" indent="0" marL="0">
               <a:lnSpc>
-                <a:spcPts val="2070"/>
+                <a:spcPts val="2242"/>
               </a:lnSpc>
               <a:buNone/>
             </a:pPr>
             <a:r>
-              <a:rPr lang="zh-CN" altLang="en-US" sz="1800" b="1" dirty="0">
+              <a:rPr lang="zh-CN" altLang="en-US" sz="1950" b="1" dirty="0">
                 <a:solidFill>
                   <a:srgbClr val="FFFFFF"/>
                 </a:solidFill>
@@ -7334,20 +7355,20 @@
               </a:rPr>
               <a:t>额外信息</a:t>
             </a:r>
-            <a:endParaRPr lang="zh-CN" sz="1800" dirty="0"/>
+            <a:endParaRPr lang="zh-CN" sz="1950" dirty="0"/>
           </a:p>
         </p:txBody>
       </p:sp>
       <p:sp>
         <p:nvSpPr>
-          <p:cNvPr id="17" name="T16/card/region-2/body"/>
-          <p:cNvSpPr/>
-          <p:nvPr/>
-        </p:nvSpPr>
-        <p:spPr>
-          <a:xfrm>
-            <a:off x="8763000" y="4177665"/>
-            <a:ext cx="2838450" cy="1708785"/>
+          <p:cNvPr id="16" name="T16/card/region-2/body"/>
+          <p:cNvSpPr/>
+          <p:nvPr/>
+        </p:nvSpPr>
+        <p:spPr>
+          <a:xfrm>
+            <a:off x="590550" y="4602575"/>
+            <a:ext cx="11010900" cy="1041178"/>
           </a:xfrm>
           <a:prstGeom prst="rect">
             <a:avLst/>
@@ -7361,12 +7382,12 @@
           <a:p>
             <a:pPr algn="l" indent="0" marL="0">
               <a:lnSpc>
-                <a:spcPts val="2139"/>
+                <a:spcPts val="2232"/>
               </a:lnSpc>
               <a:buNone/>
             </a:pPr>
             <a:r>
-              <a:rPr lang="zh-CN" altLang="en-US" sz="1725" dirty="0">
+              <a:rPr lang="zh-CN" altLang="en-US" sz="1800" dirty="0">
                 <a:solidFill>
                   <a:srgbClr val="1C2430"/>
                 </a:solidFill>
@@ -7374,19 +7395,36 @@
                 <a:ea typeface="Noto Sans CJK SC" pitchFamily="34" charset="-122"/>
                 <a:cs typeface="Noto Sans CJK SC" pitchFamily="34" charset="-120"/>
               </a:rPr>
-              <a:t>列出每种方法获得的新增信</a:t>
-            </a:r>
-            <a:endParaRPr lang="zh-CN" sz="1725" dirty="0"/>
-          </a:p>
-          <a:p>
+              <a:t>列出每种方法获得的</a:t>
+            </a:r>
             <a:pPr algn="l" indent="0" marL="0">
               <a:lnSpc>
-                <a:spcPts val="2139"/>
+                <a:spcPts val="2232"/>
               </a:lnSpc>
               <a:buNone/>
             </a:pPr>
             <a:r>
-              <a:rPr lang="zh-CN" altLang="en-US" sz="1725" dirty="0">
+              <a:rPr lang="zh-CN" altLang="en-US" sz="1800" b="1" dirty="0">
+                <a:solidFill>
+                  <a:srgbClr val="235E96"/>
+                </a:solidFill>
+                <a:latin typeface="Noto Sans CJK SC" pitchFamily="34" charset="0"/>
+                <a:ea typeface="Noto Sans CJK SC" pitchFamily="34" charset="-122"/>
+                <a:cs typeface="Noto Sans CJK SC" pitchFamily="34" charset="-120"/>
+              </a:rPr>
+              <a:t>新增信息</a:t>
+            </a:r>
+            <a:endParaRPr lang="zh-CN" sz="1800" dirty="0"/>
+          </a:p>
+          <a:p>
+            <a:pPr algn="l" indent="0" marL="0">
+              <a:lnSpc>
+                <a:spcPts val="2232"/>
+              </a:lnSpc>
+              <a:buNone/>
+            </a:pPr>
+            <a:r>
+              <a:rPr lang="zh-CN" altLang="en-US" sz="1800" dirty="0">
                 <a:solidFill>
                   <a:srgbClr val="1C2430"/>
                 </a:solidFill>
@@ -7394,19 +7432,33 @@
                 <a:ea typeface="Noto Sans CJK SC" pitchFamily="34" charset="-122"/>
                 <a:cs typeface="Noto Sans CJK SC" pitchFamily="34" charset="-120"/>
               </a:rPr>
-              <a:t>息</a:t>
-            </a:r>
-            <a:endParaRPr lang="zh-CN" sz="1725" dirty="0"/>
-          </a:p>
-          <a:p>
+              <a:t>通过单独</a:t>
+            </a:r>
             <a:pPr algn="l" indent="0" marL="0">
               <a:lnSpc>
-                <a:spcPts val="2139"/>
+                <a:spcPts val="2232"/>
               </a:lnSpc>
               <a:buNone/>
             </a:pPr>
             <a:r>
-              <a:rPr lang="zh-CN" altLang="en-US" sz="1725" dirty="0">
+              <a:rPr lang="zh-CN" altLang="en-US" sz="1800" b="1" dirty="0">
+                <a:solidFill>
+                  <a:srgbClr val="235E96"/>
+                </a:solidFill>
+                <a:latin typeface="Noto Sans CJK SC" pitchFamily="34" charset="0"/>
+                <a:ea typeface="Noto Sans CJK SC" pitchFamily="34" charset="-122"/>
+                <a:cs typeface="Noto Sans CJK SC" pitchFamily="34" charset="-120"/>
+              </a:rPr>
+              <a:t>对照</a:t>
+            </a:r>
+            <a:pPr algn="l" indent="0" marL="0">
+              <a:lnSpc>
+                <a:spcPts val="2232"/>
+              </a:lnSpc>
+              <a:buNone/>
+            </a:pPr>
+            <a:r>
+              <a:rPr lang="zh-CN" altLang="en-US" sz="1800" dirty="0">
                 <a:solidFill>
                   <a:srgbClr val="1C2430"/>
                 </a:solidFill>
@@ -7414,19 +7466,19 @@
                 <a:ea typeface="Noto Sans CJK SC" pitchFamily="34" charset="-122"/>
                 <a:cs typeface="Noto Sans CJK SC" pitchFamily="34" charset="-120"/>
               </a:rPr>
-              <a:t>通过单独对照区分信息优势</a:t>
-            </a:r>
-            <a:endParaRPr lang="zh-CN" sz="1725" dirty="0"/>
+              <a:t>区分信息优势</a:t>
+            </a:r>
+            <a:endParaRPr lang="zh-CN" sz="1800" dirty="0"/>
           </a:p>
           <a:p>
             <a:pPr algn="l" indent="0" marL="0">
               <a:lnSpc>
-                <a:spcPts val="2139"/>
+                <a:spcPts val="2232"/>
               </a:lnSpc>
               <a:buNone/>
             </a:pPr>
             <a:r>
-              <a:rPr lang="zh-CN" altLang="en-US" sz="1725" dirty="0">
+              <a:rPr lang="zh-CN" altLang="en-US" sz="1800" dirty="0">
                 <a:solidFill>
                   <a:srgbClr val="1C2430"/>
                 </a:solidFill>
@@ -7434,29 +7486,51 @@
                 <a:ea typeface="Noto Sans CJK SC" pitchFamily="34" charset="-122"/>
                 <a:cs typeface="Noto Sans CJK SC" pitchFamily="34" charset="-120"/>
               </a:rPr>
-              <a:t>不能只据结果提升归因于结</a:t>
-            </a:r>
-            <a:endParaRPr lang="zh-CN" sz="1725" dirty="0"/>
-          </a:p>
+              <a:t>不能只据结果提升归因于结构</a:t>
+            </a:r>
+            <a:endParaRPr lang="zh-CN" sz="1800" dirty="0"/>
+          </a:p>
+        </p:txBody>
+      </p:sp>
+      <p:sp>
+        <p:nvSpPr>
+          <p:cNvPr id="17" name="T16/takeaway"/>
+          <p:cNvSpPr/>
+          <p:nvPr/>
+        </p:nvSpPr>
+        <p:spPr>
+          <a:xfrm>
+            <a:off x="457200" y="5853303"/>
+            <a:ext cx="11277600" cy="276987"/>
+          </a:xfrm>
+          <a:prstGeom prst="rect">
+            <a:avLst/>
+          </a:prstGeom>
+          <a:noFill/>
+          <a:ln/>
+        </p:spPr>
+        <p:txBody>
+          <a:bodyPr wrap="none" lIns="0" tIns="0" rIns="0" bIns="0" rtlCol="0" anchor="t"/>
+          <a:lstStyle/>
           <a:p>
             <a:pPr algn="l" indent="0" marL="0">
               <a:lnSpc>
-                <a:spcPts val="2139"/>
+                <a:spcPts val="2160"/>
               </a:lnSpc>
               <a:buNone/>
             </a:pPr>
             <a:r>
-              <a:rPr lang="zh-CN" altLang="en-US" sz="1725" dirty="0">
+              <a:rPr lang="zh-CN" altLang="en-US" sz="1800" b="1" dirty="0">
                 <a:solidFill>
-                  <a:srgbClr val="1C2430"/>
+                  <a:srgbClr val="173C70"/>
                 </a:solidFill>
                 <a:latin typeface="Noto Sans CJK SC" pitchFamily="34" charset="0"/>
                 <a:ea typeface="Noto Sans CJK SC" pitchFamily="34" charset="-122"/>
                 <a:cs typeface="Noto Sans CJK SC" pitchFamily="34" charset="-120"/>
               </a:rPr>
-              <a:t>构</a:t>
-            </a:r>
-            <a:endParaRPr lang="zh-CN" sz="1725" dirty="0"/>
+              <a:t>统计口径、样本单位和适用条件需与原文一致</a:t>
+            </a:r>
+            <a:endParaRPr lang="zh-CN" sz="1800" dirty="0"/>
           </a:p>
         </p:txBody>
       </p:sp>
@@ -7496,7 +7570,7 @@
                 <a:ea typeface="Noto Sans CJK SC" pitchFamily="34" charset="-122"/>
                 <a:cs typeface="Noto Sans CJK SC" pitchFamily="34" charset="-120"/>
               </a:rPr>
-              <a:t>T1 · 2026 · 待替换</a:t>
+              <a:t>T1 · 2026 · 书目占位；图表均为合成示例</a:t>
             </a:r>
             <a:endParaRPr lang="zh-CN" sz="1125" dirty="0"/>
           </a:p>
@@ -7605,14 +7679,14 @@
       </p:sp>
       <p:sp>
         <p:nvSpPr>
-          <p:cNvPr id="4" name="T17/kicker"/>
-          <p:cNvSpPr/>
-          <p:nvPr/>
-        </p:nvSpPr>
-        <p:spPr>
-          <a:xfrm>
-            <a:off x="457200" y="152400"/>
-            <a:ext cx="11277600" cy="190500"/>
+          <p:cNvPr id="4" name="T17/title"/>
+          <p:cNvSpPr/>
+          <p:nvPr/>
+        </p:nvSpPr>
+        <p:spPr>
+          <a:xfrm>
+            <a:off x="457200" y="209550"/>
+            <a:ext cx="11277600" cy="438150"/>
           </a:xfrm>
           <a:prstGeom prst="rect">
             <a:avLst/>
@@ -7626,54 +7700,12 @@
           <a:p>
             <a:pPr algn="l" indent="0" marL="0">
               <a:lnSpc>
-                <a:spcPts val="1320"/>
+                <a:spcPts val="3360"/>
               </a:lnSpc>
               <a:buNone/>
             </a:pPr>
             <a:r>
-              <a:rPr lang="zh-CN" altLang="en-US" sz="1200" dirty="0">
-                <a:solidFill>
-                  <a:srgbClr val="515B68"/>
-                </a:solidFill>
-                <a:latin typeface="Noto Sans CJK SC" pitchFamily="34" charset="0"/>
-                <a:ea typeface="Noto Sans CJK SC" pitchFamily="34" charset="-122"/>
-                <a:cs typeface="Noto Sans CJK SC" pitchFamily="34" charset="-120"/>
-              </a:rPr>
-              <a:t>结构模板 / 占位说明与合成数据</a:t>
-            </a:r>
-            <a:endParaRPr lang="zh-CN" sz="1200" dirty="0"/>
-          </a:p>
-        </p:txBody>
-      </p:sp>
-      <p:sp>
-        <p:nvSpPr>
-          <p:cNvPr id="5" name="T17/title"/>
-          <p:cNvSpPr/>
-          <p:nvPr/>
-        </p:nvSpPr>
-        <p:spPr>
-          <a:xfrm>
-            <a:off x="457200" y="381000"/>
-            <a:ext cx="11277600" cy="400050"/>
-          </a:xfrm>
-          <a:prstGeom prst="rect">
-            <a:avLst/>
-          </a:prstGeom>
-          <a:noFill/>
-          <a:ln/>
-        </p:spPr>
-        <p:txBody>
-          <a:bodyPr wrap="none" lIns="0" tIns="0" rIns="0" bIns="0" rtlCol="0" anchor="t"/>
-          <a:lstStyle/>
-          <a:p>
-            <a:pPr algn="l" indent="0" marL="0">
-              <a:lnSpc>
-                <a:spcPts val="2856"/>
-              </a:lnSpc>
-              <a:buNone/>
-            </a:pPr>
-            <a:r>
-              <a:rPr lang="zh-CN" altLang="en-US" sz="2550" b="1" dirty="0">
+              <a:rPr lang="zh-CN" altLang="en-US" sz="3000" b="1" dirty="0">
                 <a:solidFill>
                   <a:srgbClr val="1C2430"/>
                 </a:solidFill>
@@ -7683,26 +7715,49 @@
               </a:rPr>
               <a:t>测量到统计分析的链路</a:t>
             </a:r>
-            <a:endParaRPr lang="zh-CN" sz="2550" dirty="0"/>
+            <a:endParaRPr lang="zh-CN" sz="3000" dirty="0"/>
           </a:p>
         </p:txBody>
       </p:sp>
       <p:sp>
         <p:nvSpPr>
-          <p:cNvPr id="6" name="T17/header-rule"/>
-          <p:cNvSpPr/>
-          <p:nvPr/>
-        </p:nvSpPr>
-        <p:spPr>
-          <a:xfrm>
-            <a:off x="457200" y="876300"/>
+          <p:cNvPr id="5" name="T17/header-rule"/>
+          <p:cNvSpPr/>
+          <p:nvPr/>
+        </p:nvSpPr>
+        <p:spPr>
+          <a:xfrm>
+            <a:off x="457200" y="752475"/>
             <a:ext cx="11277600" cy="0"/>
           </a:xfrm>
           <a:prstGeom prst="line">
             <a:avLst/>
           </a:prstGeom>
           <a:noFill/>
-          <a:ln w="11430">
+          <a:ln w="10478">
+            <a:solidFill>
+              <a:srgbClr val="BEC8D4"/>
+            </a:solidFill>
+            <a:prstDash val="solid"/>
+          </a:ln>
+        </p:spPr>
+      </p:sp>
+      <p:sp>
+        <p:nvSpPr>
+          <p:cNvPr id="6" name="T17/header-accent"/>
+          <p:cNvSpPr/>
+          <p:nvPr/>
+        </p:nvSpPr>
+        <p:spPr>
+          <a:xfrm>
+            <a:off x="457200" y="752475"/>
+            <a:ext cx="704850" cy="0"/>
+          </a:xfrm>
+          <a:prstGeom prst="line">
+            <a:avLst/>
+          </a:prstGeom>
+          <a:noFill/>
+          <a:ln w="28575">
             <a:solidFill>
               <a:srgbClr val="173C70"/>
             </a:solidFill>
@@ -7718,8 +7773,8 @@
         </p:nvSpPr>
         <p:spPr>
           <a:xfrm>
-            <a:off x="457200" y="1314450"/>
-            <a:ext cx="7886700" cy="4610100"/>
+            <a:off x="457200" y="1127570"/>
+            <a:ext cx="7886700" cy="4787456"/>
           </a:xfrm>
           <a:prstGeom prst="rect">
             <a:avLst/>
@@ -7743,14 +7798,14 @@
         </p:nvSpPr>
         <p:spPr>
           <a:xfrm>
-            <a:off x="466725" y="1390650"/>
+            <a:off x="466725" y="1203770"/>
             <a:ext cx="47625" cy="276225"/>
           </a:xfrm>
           <a:prstGeom prst="rect">
             <a:avLst/>
           </a:prstGeom>
           <a:solidFill>
-            <a:srgbClr val="173C70"/>
+            <a:srgbClr val="235E96"/>
           </a:solidFill>
           <a:ln w="12700">
             <a:solidFill>
@@ -7770,8 +7825,8 @@
         </p:nvSpPr>
         <p:spPr>
           <a:xfrm>
-            <a:off x="609600" y="1371600"/>
-            <a:ext cx="7581900" cy="295275"/>
+            <a:off x="609600" y="1175195"/>
+            <a:ext cx="7581900" cy="304800"/>
           </a:xfrm>
           <a:prstGeom prst="rect">
             <a:avLst/>
@@ -7785,14 +7840,14 @@
           <a:p>
             <a:pPr algn="l" indent="0" marL="0">
               <a:lnSpc>
-                <a:spcPts val="2070"/>
+                <a:spcPts val="2242"/>
               </a:lnSpc>
               <a:buNone/>
             </a:pPr>
             <a:r>
-              <a:rPr lang="zh-CN" altLang="en-US" sz="1800" b="1" dirty="0">
+              <a:rPr lang="zh-CN" altLang="en-US" sz="1950" b="1" dirty="0">
                 <a:solidFill>
-                  <a:srgbClr val="173C70"/>
+                  <a:srgbClr val="235E96"/>
                 </a:solidFill>
                 <a:latin typeface="Noto Sans CJK SC" pitchFamily="34" charset="0"/>
                 <a:ea typeface="Noto Sans CJK SC" pitchFamily="34" charset="-122"/>
@@ -7800,7 +7855,7 @@
               </a:rPr>
               <a:t>从观测到估计</a:t>
             </a:r>
-            <a:endParaRPr lang="zh-CN" sz="1800" dirty="0"/>
+            <a:endParaRPr lang="zh-CN" sz="1950" dirty="0"/>
           </a:p>
         </p:txBody>
       </p:sp>
@@ -7812,7 +7867,7 @@
         </p:nvSpPr>
         <p:spPr>
           <a:xfrm>
-            <a:off x="2876550" y="2362200"/>
+            <a:off x="2876550" y="2215706"/>
             <a:ext cx="495300" cy="0"/>
           </a:xfrm>
           <a:prstGeom prst="line">
@@ -7836,7 +7891,7 @@
         </p:nvSpPr>
         <p:spPr>
           <a:xfrm>
-            <a:off x="5638800" y="2362200"/>
+            <a:off x="5638800" y="2215706"/>
             <a:ext cx="495300" cy="0"/>
           </a:xfrm>
           <a:prstGeom prst="line">
@@ -7860,8 +7915,8 @@
         </p:nvSpPr>
         <p:spPr>
           <a:xfrm>
-            <a:off x="7162800" y="2857500"/>
-            <a:ext cx="0" cy="1638300"/>
+            <a:off x="7162800" y="2730056"/>
+            <a:ext cx="0" cy="1701260"/>
           </a:xfrm>
           <a:prstGeom prst="line">
             <a:avLst/>
@@ -7884,7 +7939,7 @@
         </p:nvSpPr>
         <p:spPr>
           <a:xfrm flipH="1">
-            <a:off x="5638800" y="4991100"/>
+            <a:off x="5638800" y="4945666"/>
             <a:ext cx="495300" cy="0"/>
           </a:xfrm>
           <a:prstGeom prst="line">
@@ -7908,7 +7963,7 @@
         </p:nvSpPr>
         <p:spPr>
           <a:xfrm flipH="1">
-            <a:off x="2876550" y="4991100"/>
+            <a:off x="2876550" y="4945666"/>
             <a:ext cx="495300" cy="0"/>
           </a:xfrm>
           <a:prstGeom prst="line">
@@ -7932,14 +7987,14 @@
         </p:nvSpPr>
         <p:spPr>
           <a:xfrm>
-            <a:off x="609600" y="1866900"/>
-            <a:ext cx="2266950" cy="990600"/>
+            <a:off x="609600" y="1701356"/>
+            <a:ext cx="2266950" cy="1028700"/>
           </a:xfrm>
           <a:prstGeom prst="rect">
             <a:avLst/>
           </a:prstGeom>
           <a:solidFill>
-            <a:srgbClr val="FFFFFF"/>
+            <a:srgbClr val="F0F3F6"/>
           </a:solidFill>
           <a:ln w="11430">
             <a:solidFill>
@@ -7957,7 +8012,7 @@
         </p:nvSpPr>
         <p:spPr>
           <a:xfrm>
-            <a:off x="609600" y="1866900"/>
+            <a:off x="609600" y="1701356"/>
             <a:ext cx="2266950" cy="0"/>
           </a:xfrm>
           <a:prstGeom prst="line">
@@ -7966,7 +8021,7 @@
           <a:noFill/>
           <a:ln w="19050">
             <a:solidFill>
-              <a:srgbClr val="173C70"/>
+              <a:srgbClr val="536A7A"/>
             </a:solidFill>
             <a:prstDash val="solid"/>
           </a:ln>
@@ -7980,7 +8035,7 @@
         </p:nvSpPr>
         <p:spPr>
           <a:xfrm>
-            <a:off x="723900" y="2228850"/>
+            <a:off x="723900" y="1796606"/>
             <a:ext cx="2038350" cy="266700"/>
           </a:xfrm>
           <a:prstGeom prst="rect">
@@ -8002,7 +8057,7 @@
             <a:r>
               <a:rPr lang="zh-CN" altLang="en-US" sz="1800" b="1" dirty="0">
                 <a:solidFill>
-                  <a:srgbClr val="173C70"/>
+                  <a:srgbClr val="536A7A"/>
                 </a:solidFill>
                 <a:latin typeface="Noto Sans CJK SC" pitchFamily="34" charset="0"/>
                 <a:ea typeface="Noto Sans CJK SC" pitchFamily="34" charset="-122"/>
@@ -8016,20 +8071,62 @@
       </p:sp>
       <p:sp>
         <p:nvSpPr>
-          <p:cNvPr id="18" name="T17/node:step-2:frame"/>
-          <p:cNvSpPr/>
-          <p:nvPr/>
-        </p:nvSpPr>
-        <p:spPr>
-          <a:xfrm>
-            <a:off x="3371850" y="1866900"/>
-            <a:ext cx="2266950" cy="990600"/>
+          <p:cNvPr id="18" name="T17/node:step-1:detail"/>
+          <p:cNvSpPr/>
+          <p:nvPr/>
+        </p:nvSpPr>
+        <p:spPr>
+          <a:xfrm>
+            <a:off x="723900" y="2110931"/>
+            <a:ext cx="2038350" cy="533400"/>
+          </a:xfrm>
+          <a:prstGeom prst="rect">
+            <a:avLst/>
+          </a:prstGeom>
+          <a:noFill/>
+          <a:ln/>
+        </p:spPr>
+        <p:txBody>
+          <a:bodyPr wrap="none" lIns="0" tIns="0" rIns="0" bIns="0" rtlCol="0" anchor="t"/>
+          <a:lstStyle/>
+          <a:p>
+            <a:pPr algn="ctr" indent="0" marL="0">
+              <a:lnSpc>
+                <a:spcPts val="1947"/>
+              </a:lnSpc>
+              <a:buNone/>
+            </a:pPr>
+            <a:r>
+              <a:rPr lang="zh-CN" altLang="en-US" sz="1650" dirty="0">
+                <a:solidFill>
+                  <a:srgbClr val="1C2430"/>
+                </a:solidFill>
+                <a:latin typeface="Noto Sans CJK SC" pitchFamily="34" charset="0"/>
+                <a:ea typeface="Noto Sans CJK SC" pitchFamily="34" charset="-122"/>
+                <a:cs typeface="Noto Sans CJK SC" pitchFamily="34" charset="-120"/>
+              </a:rPr>
+              <a:t>处理与生物重复</a:t>
+            </a:r>
+            <a:endParaRPr lang="zh-CN" sz="1650" dirty="0"/>
+          </a:p>
+        </p:txBody>
+      </p:sp>
+      <p:sp>
+        <p:nvSpPr>
+          <p:cNvPr id="19" name="T17/node:step-2:frame"/>
+          <p:cNvSpPr/>
+          <p:nvPr/>
+        </p:nvSpPr>
+        <p:spPr>
+          <a:xfrm>
+            <a:off x="3371850" y="1701356"/>
+            <a:ext cx="2266950" cy="1028700"/>
           </a:xfrm>
           <a:prstGeom prst="rect">
             <a:avLst/>
           </a:prstGeom>
           <a:solidFill>
-            <a:srgbClr val="FFFFFF"/>
+            <a:srgbClr val="EAF2FA"/>
           </a:solidFill>
           <a:ln w="11430">
             <a:solidFill>
@@ -8041,13 +8138,13 @@
       </p:sp>
       <p:sp>
         <p:nvSpPr>
-          <p:cNvPr id="19" name="T17/node:step-2:heading-rule"/>
-          <p:cNvSpPr/>
-          <p:nvPr/>
-        </p:nvSpPr>
-        <p:spPr>
-          <a:xfrm>
-            <a:off x="3371850" y="1866900"/>
+          <p:cNvPr id="20" name="T17/node:step-2:heading-rule"/>
+          <p:cNvSpPr/>
+          <p:nvPr/>
+        </p:nvSpPr>
+        <p:spPr>
+          <a:xfrm>
+            <a:off x="3371850" y="1701356"/>
             <a:ext cx="2266950" cy="0"/>
           </a:xfrm>
           <a:prstGeom prst="line">
@@ -8056,7 +8153,7 @@
           <a:noFill/>
           <a:ln w="19050">
             <a:solidFill>
-              <a:srgbClr val="173C70"/>
+              <a:srgbClr val="235E96"/>
             </a:solidFill>
             <a:prstDash val="solid"/>
           </a:ln>
@@ -8064,13 +8161,13 @@
       </p:sp>
       <p:sp>
         <p:nvSpPr>
-          <p:cNvPr id="20" name="T17/node:step-2:label"/>
-          <p:cNvSpPr/>
-          <p:nvPr/>
-        </p:nvSpPr>
-        <p:spPr>
-          <a:xfrm>
-            <a:off x="3486150" y="2228850"/>
+          <p:cNvPr id="21" name="T17/node:step-2:label"/>
+          <p:cNvSpPr/>
+          <p:nvPr/>
+        </p:nvSpPr>
+        <p:spPr>
+          <a:xfrm>
+            <a:off x="3486150" y="1796606"/>
             <a:ext cx="2038350" cy="266700"/>
           </a:xfrm>
           <a:prstGeom prst="rect">
@@ -8092,7 +8189,7 @@
             <a:r>
               <a:rPr lang="zh-CN" altLang="en-US" sz="1800" b="1" dirty="0">
                 <a:solidFill>
-                  <a:srgbClr val="173C70"/>
+                  <a:srgbClr val="235E96"/>
                 </a:solidFill>
                 <a:latin typeface="Noto Sans CJK SC" pitchFamily="34" charset="0"/>
                 <a:ea typeface="Noto Sans CJK SC" pitchFamily="34" charset="-122"/>
@@ -8106,20 +8203,62 @@
       </p:sp>
       <p:sp>
         <p:nvSpPr>
-          <p:cNvPr id="21" name="T17/node:step-3:frame"/>
-          <p:cNvSpPr/>
-          <p:nvPr/>
-        </p:nvSpPr>
-        <p:spPr>
-          <a:xfrm>
-            <a:off x="6134100" y="1866900"/>
-            <a:ext cx="2057400" cy="990600"/>
+          <p:cNvPr id="22" name="T17/node:step-2:detail"/>
+          <p:cNvSpPr/>
+          <p:nvPr/>
+        </p:nvSpPr>
+        <p:spPr>
+          <a:xfrm>
+            <a:off x="3486150" y="2110931"/>
+            <a:ext cx="2038350" cy="533400"/>
+          </a:xfrm>
+          <a:prstGeom prst="rect">
+            <a:avLst/>
+          </a:prstGeom>
+          <a:noFill/>
+          <a:ln/>
+        </p:spPr>
+        <p:txBody>
+          <a:bodyPr wrap="none" lIns="0" tIns="0" rIns="0" bIns="0" rtlCol="0" anchor="t"/>
+          <a:lstStyle/>
+          <a:p>
+            <a:pPr algn="ctr" indent="0" marL="0">
+              <a:lnSpc>
+                <a:spcPts val="1947"/>
+              </a:lnSpc>
+              <a:buNone/>
+            </a:pPr>
+            <a:r>
+              <a:rPr lang="zh-CN" altLang="en-US" sz="1650" dirty="0">
+                <a:solidFill>
+                  <a:srgbClr val="1C2430"/>
+                </a:solidFill>
+                <a:latin typeface="Noto Sans CJK SC" pitchFamily="34" charset="0"/>
+                <a:ea typeface="Noto Sans CJK SC" pitchFamily="34" charset="-122"/>
+                <a:cs typeface="Noto Sans CJK SC" pitchFamily="34" charset="-120"/>
+              </a:rPr>
+              <a:t>设备与采样条件</a:t>
+            </a:r>
+            <a:endParaRPr lang="zh-CN" sz="1650" dirty="0"/>
+          </a:p>
+        </p:txBody>
+      </p:sp>
+      <p:sp>
+        <p:nvSpPr>
+          <p:cNvPr id="23" name="T17/node:step-3:frame"/>
+          <p:cNvSpPr/>
+          <p:nvPr/>
+        </p:nvSpPr>
+        <p:spPr>
+          <a:xfrm>
+            <a:off x="6134100" y="1701356"/>
+            <a:ext cx="2057400" cy="1028700"/>
           </a:xfrm>
           <a:prstGeom prst="rect">
             <a:avLst/>
           </a:prstGeom>
           <a:solidFill>
-            <a:srgbClr val="FFFFFF"/>
+            <a:srgbClr val="F0F3F6"/>
           </a:solidFill>
           <a:ln w="11430">
             <a:solidFill>
@@ -8131,13 +8270,13 @@
       </p:sp>
       <p:sp>
         <p:nvSpPr>
-          <p:cNvPr id="22" name="T17/node:step-3:heading-rule"/>
-          <p:cNvSpPr/>
-          <p:nvPr/>
-        </p:nvSpPr>
-        <p:spPr>
-          <a:xfrm>
-            <a:off x="6134100" y="1866900"/>
+          <p:cNvPr id="24" name="T17/node:step-3:heading-rule"/>
+          <p:cNvSpPr/>
+          <p:nvPr/>
+        </p:nvSpPr>
+        <p:spPr>
+          <a:xfrm>
+            <a:off x="6134100" y="1701356"/>
             <a:ext cx="2057400" cy="0"/>
           </a:xfrm>
           <a:prstGeom prst="line">
@@ -8146,7 +8285,7 @@
           <a:noFill/>
           <a:ln w="19050">
             <a:solidFill>
-              <a:srgbClr val="173C70"/>
+              <a:srgbClr val="536A7A"/>
             </a:solidFill>
             <a:prstDash val="solid"/>
           </a:ln>
@@ -8154,13 +8293,13 @@
       </p:sp>
       <p:sp>
         <p:nvSpPr>
-          <p:cNvPr id="23" name="T17/node:step-3:label"/>
-          <p:cNvSpPr/>
-          <p:nvPr/>
-        </p:nvSpPr>
-        <p:spPr>
-          <a:xfrm>
-            <a:off x="6248400" y="2228850"/>
+          <p:cNvPr id="25" name="T17/node:step-3:label"/>
+          <p:cNvSpPr/>
+          <p:nvPr/>
+        </p:nvSpPr>
+        <p:spPr>
+          <a:xfrm>
+            <a:off x="6248400" y="1796606"/>
             <a:ext cx="1828800" cy="266700"/>
           </a:xfrm>
           <a:prstGeom prst="rect">
@@ -8182,7 +8321,7 @@
             <a:r>
               <a:rPr lang="zh-CN" altLang="en-US" sz="1800" b="1" dirty="0">
                 <a:solidFill>
-                  <a:srgbClr val="173C70"/>
+                  <a:srgbClr val="536A7A"/>
                 </a:solidFill>
                 <a:latin typeface="Noto Sans CJK SC" pitchFamily="34" charset="0"/>
                 <a:ea typeface="Noto Sans CJK SC" pitchFamily="34" charset="-122"/>
@@ -8196,20 +8335,62 @@
       </p:sp>
       <p:sp>
         <p:nvSpPr>
-          <p:cNvPr id="24" name="T17/node:step-4:frame"/>
-          <p:cNvSpPr/>
-          <p:nvPr/>
-        </p:nvSpPr>
-        <p:spPr>
-          <a:xfrm>
-            <a:off x="6134100" y="4495800"/>
-            <a:ext cx="2057400" cy="990600"/>
+          <p:cNvPr id="26" name="T17/node:step-3:detail"/>
+          <p:cNvSpPr/>
+          <p:nvPr/>
+        </p:nvSpPr>
+        <p:spPr>
+          <a:xfrm>
+            <a:off x="6248400" y="2110931"/>
+            <a:ext cx="1828800" cy="533400"/>
+          </a:xfrm>
+          <a:prstGeom prst="rect">
+            <a:avLst/>
+          </a:prstGeom>
+          <a:noFill/>
+          <a:ln/>
+        </p:spPr>
+        <p:txBody>
+          <a:bodyPr wrap="none" lIns="0" tIns="0" rIns="0" bIns="0" rtlCol="0" anchor="t"/>
+          <a:lstStyle/>
+          <a:p>
+            <a:pPr algn="ctr" indent="0" marL="0">
+              <a:lnSpc>
+                <a:spcPts val="1947"/>
+              </a:lnSpc>
+              <a:buNone/>
+            </a:pPr>
+            <a:r>
+              <a:rPr lang="zh-CN" altLang="en-US" sz="1650" dirty="0">
+                <a:solidFill>
+                  <a:srgbClr val="1C2430"/>
+                </a:solidFill>
+                <a:latin typeface="Noto Sans CJK SC" pitchFamily="34" charset="0"/>
+                <a:ea typeface="Noto Sans CJK SC" pitchFamily="34" charset="-122"/>
+                <a:cs typeface="Noto Sans CJK SC" pitchFamily="34" charset="-120"/>
+              </a:rPr>
+              <a:t>数据版本与缺失</a:t>
+            </a:r>
+            <a:endParaRPr lang="zh-CN" sz="1650" dirty="0"/>
+          </a:p>
+        </p:txBody>
+      </p:sp>
+      <p:sp>
+        <p:nvSpPr>
+          <p:cNvPr id="27" name="T17/node:step-4:frame"/>
+          <p:cNvSpPr/>
+          <p:nvPr/>
+        </p:nvSpPr>
+        <p:spPr>
+          <a:xfrm>
+            <a:off x="6134100" y="4431316"/>
+            <a:ext cx="2057400" cy="1028700"/>
           </a:xfrm>
           <a:prstGeom prst="rect">
             <a:avLst/>
           </a:prstGeom>
           <a:solidFill>
-            <a:srgbClr val="FFFFFF"/>
+            <a:srgbClr val="FAEEE8"/>
           </a:solidFill>
           <a:ln w="11430">
             <a:solidFill>
@@ -8221,13 +8402,13 @@
       </p:sp>
       <p:sp>
         <p:nvSpPr>
-          <p:cNvPr id="25" name="T17/node:step-4:heading-rule"/>
-          <p:cNvSpPr/>
-          <p:nvPr/>
-        </p:nvSpPr>
-        <p:spPr>
-          <a:xfrm>
-            <a:off x="6134100" y="4495800"/>
+          <p:cNvPr id="28" name="T17/node:step-4:heading-rule"/>
+          <p:cNvSpPr/>
+          <p:nvPr/>
+        </p:nvSpPr>
+        <p:spPr>
+          <a:xfrm>
+            <a:off x="6134100" y="4431316"/>
             <a:ext cx="2057400" cy="0"/>
           </a:xfrm>
           <a:prstGeom prst="line">
@@ -8236,7 +8417,7 @@
           <a:noFill/>
           <a:ln w="19050">
             <a:solidFill>
-              <a:srgbClr val="173C70"/>
+              <a:srgbClr val="A24736"/>
             </a:solidFill>
             <a:prstDash val="solid"/>
           </a:ln>
@@ -8244,13 +8425,13 @@
       </p:sp>
       <p:sp>
         <p:nvSpPr>
-          <p:cNvPr id="26" name="T17/node:step-4:label"/>
-          <p:cNvSpPr/>
-          <p:nvPr/>
-        </p:nvSpPr>
-        <p:spPr>
-          <a:xfrm>
-            <a:off x="6248400" y="4857750"/>
+          <p:cNvPr id="29" name="T17/node:step-4:label"/>
+          <p:cNvSpPr/>
+          <p:nvPr/>
+        </p:nvSpPr>
+        <p:spPr>
+          <a:xfrm>
+            <a:off x="6248400" y="4526566"/>
             <a:ext cx="1828800" cy="266700"/>
           </a:xfrm>
           <a:prstGeom prst="rect">
@@ -8272,7 +8453,7 @@
             <a:r>
               <a:rPr lang="zh-CN" altLang="en-US" sz="1800" b="1" dirty="0">
                 <a:solidFill>
-                  <a:srgbClr val="173C70"/>
+                  <a:srgbClr val="A24736"/>
                 </a:solidFill>
                 <a:latin typeface="Noto Sans CJK SC" pitchFamily="34" charset="0"/>
                 <a:ea typeface="Noto Sans CJK SC" pitchFamily="34" charset="-122"/>
@@ -8286,20 +8467,62 @@
       </p:sp>
       <p:sp>
         <p:nvSpPr>
-          <p:cNvPr id="27" name="T17/node:step-5:frame"/>
-          <p:cNvSpPr/>
-          <p:nvPr/>
-        </p:nvSpPr>
-        <p:spPr>
-          <a:xfrm>
-            <a:off x="3371850" y="4495800"/>
-            <a:ext cx="2266950" cy="990600"/>
+          <p:cNvPr id="30" name="T17/node:step-4:detail"/>
+          <p:cNvSpPr/>
+          <p:nvPr/>
+        </p:nvSpPr>
+        <p:spPr>
+          <a:xfrm>
+            <a:off x="6248400" y="4840891"/>
+            <a:ext cx="1828800" cy="533400"/>
+          </a:xfrm>
+          <a:prstGeom prst="rect">
+            <a:avLst/>
+          </a:prstGeom>
+          <a:noFill/>
+          <a:ln/>
+        </p:spPr>
+        <p:txBody>
+          <a:bodyPr wrap="none" lIns="0" tIns="0" rIns="0" bIns="0" rtlCol="0" anchor="t"/>
+          <a:lstStyle/>
+          <a:p>
+            <a:pPr algn="ctr" indent="0" marL="0">
+              <a:lnSpc>
+                <a:spcPts val="1947"/>
+              </a:lnSpc>
+              <a:buNone/>
+            </a:pPr>
+            <a:r>
+              <a:rPr lang="zh-CN" altLang="en-US" sz="1650" dirty="0">
+                <a:solidFill>
+                  <a:srgbClr val="1C2430"/>
+                </a:solidFill>
+                <a:latin typeface="Noto Sans CJK SC" pitchFamily="34" charset="0"/>
+                <a:ea typeface="Noto Sans CJK SC" pitchFamily="34" charset="-122"/>
+                <a:cs typeface="Noto Sans CJK SC" pitchFamily="34" charset="-120"/>
+              </a:rPr>
+              <a:t>异常与复核规则</a:t>
+            </a:r>
+            <a:endParaRPr lang="zh-CN" sz="1650" dirty="0"/>
+          </a:p>
+        </p:txBody>
+      </p:sp>
+      <p:sp>
+        <p:nvSpPr>
+          <p:cNvPr id="31" name="T17/node:step-5:frame"/>
+          <p:cNvSpPr/>
+          <p:nvPr/>
+        </p:nvSpPr>
+        <p:spPr>
+          <a:xfrm>
+            <a:off x="3371850" y="4431316"/>
+            <a:ext cx="2266950" cy="1028700"/>
           </a:xfrm>
           <a:prstGeom prst="rect">
             <a:avLst/>
           </a:prstGeom>
           <a:solidFill>
-            <a:srgbClr val="FFFFFF"/>
+            <a:srgbClr val="EAF2FA"/>
           </a:solidFill>
           <a:ln w="11430">
             <a:solidFill>
@@ -8311,13 +8534,13 @@
       </p:sp>
       <p:sp>
         <p:nvSpPr>
-          <p:cNvPr id="28" name="T17/node:step-5:heading-rule"/>
-          <p:cNvSpPr/>
-          <p:nvPr/>
-        </p:nvSpPr>
-        <p:spPr>
-          <a:xfrm>
-            <a:off x="3371850" y="4495800"/>
+          <p:cNvPr id="32" name="T17/node:step-5:heading-rule"/>
+          <p:cNvSpPr/>
+          <p:nvPr/>
+        </p:nvSpPr>
+        <p:spPr>
+          <a:xfrm>
+            <a:off x="3371850" y="4431316"/>
             <a:ext cx="2266950" cy="0"/>
           </a:xfrm>
           <a:prstGeom prst="line">
@@ -8326,7 +8549,7 @@
           <a:noFill/>
           <a:ln w="19050">
             <a:solidFill>
-              <a:srgbClr val="173C70"/>
+              <a:srgbClr val="235E96"/>
             </a:solidFill>
             <a:prstDash val="solid"/>
           </a:ln>
@@ -8334,13 +8557,13 @@
       </p:sp>
       <p:sp>
         <p:nvSpPr>
-          <p:cNvPr id="29" name="T17/node:step-5:label"/>
-          <p:cNvSpPr/>
-          <p:nvPr/>
-        </p:nvSpPr>
-        <p:spPr>
-          <a:xfrm>
-            <a:off x="3486150" y="4857750"/>
+          <p:cNvPr id="33" name="T17/node:step-5:label"/>
+          <p:cNvSpPr/>
+          <p:nvPr/>
+        </p:nvSpPr>
+        <p:spPr>
+          <a:xfrm>
+            <a:off x="3486150" y="4526566"/>
             <a:ext cx="2038350" cy="266700"/>
           </a:xfrm>
           <a:prstGeom prst="rect">
@@ -8362,7 +8585,7 @@
             <a:r>
               <a:rPr lang="zh-CN" altLang="en-US" sz="1800" b="1" dirty="0">
                 <a:solidFill>
-                  <a:srgbClr val="173C70"/>
+                  <a:srgbClr val="235E96"/>
                 </a:solidFill>
                 <a:latin typeface="Noto Sans CJK SC" pitchFamily="34" charset="0"/>
                 <a:ea typeface="Noto Sans CJK SC" pitchFamily="34" charset="-122"/>
@@ -8376,20 +8599,62 @@
       </p:sp>
       <p:sp>
         <p:nvSpPr>
-          <p:cNvPr id="30" name="T17/node:step-6:frame"/>
-          <p:cNvSpPr/>
-          <p:nvPr/>
-        </p:nvSpPr>
-        <p:spPr>
-          <a:xfrm>
-            <a:off x="609600" y="4495800"/>
-            <a:ext cx="2266950" cy="990600"/>
+          <p:cNvPr id="34" name="T17/node:step-5:detail"/>
+          <p:cNvSpPr/>
+          <p:nvPr/>
+        </p:nvSpPr>
+        <p:spPr>
+          <a:xfrm>
+            <a:off x="3486150" y="4840891"/>
+            <a:ext cx="2038350" cy="533400"/>
+          </a:xfrm>
+          <a:prstGeom prst="rect">
+            <a:avLst/>
+          </a:prstGeom>
+          <a:noFill/>
+          <a:ln/>
+        </p:spPr>
+        <p:txBody>
+          <a:bodyPr wrap="none" lIns="0" tIns="0" rIns="0" bIns="0" rtlCol="0" anchor="t"/>
+          <a:lstStyle/>
+          <a:p>
+            <a:pPr algn="ctr" indent="0" marL="0">
+              <a:lnSpc>
+                <a:spcPts val="1947"/>
+              </a:lnSpc>
+              <a:buNone/>
+            </a:pPr>
+            <a:r>
+              <a:rPr lang="zh-CN" altLang="en-US" sz="1650" dirty="0">
+                <a:solidFill>
+                  <a:srgbClr val="1C2430"/>
+                </a:solidFill>
+                <a:latin typeface="Noto Sans CJK SC" pitchFamily="34" charset="0"/>
+                <a:ea typeface="Noto Sans CJK SC" pitchFamily="34" charset="-122"/>
+                <a:cs typeface="Noto Sans CJK SC" pitchFamily="34" charset="-120"/>
+              </a:rPr>
+              <a:t>表型与单位</a:t>
+            </a:r>
+            <a:endParaRPr lang="zh-CN" sz="1650" dirty="0"/>
+          </a:p>
+        </p:txBody>
+      </p:sp>
+      <p:sp>
+        <p:nvSpPr>
+          <p:cNvPr id="35" name="T17/node:step-6:frame"/>
+          <p:cNvSpPr/>
+          <p:nvPr/>
+        </p:nvSpPr>
+        <p:spPr>
+          <a:xfrm>
+            <a:off x="609600" y="4431316"/>
+            <a:ext cx="2266950" cy="1028700"/>
           </a:xfrm>
           <a:prstGeom prst="rect">
             <a:avLst/>
           </a:prstGeom>
           <a:solidFill>
-            <a:srgbClr val="FFFFFF"/>
+            <a:srgbClr val="E9F4F0"/>
           </a:solidFill>
           <a:ln w="11430">
             <a:solidFill>
@@ -8401,13 +8666,13 @@
       </p:sp>
       <p:sp>
         <p:nvSpPr>
-          <p:cNvPr id="31" name="T17/node:step-6:heading-rule"/>
-          <p:cNvSpPr/>
-          <p:nvPr/>
-        </p:nvSpPr>
-        <p:spPr>
-          <a:xfrm>
-            <a:off x="609600" y="4495800"/>
+          <p:cNvPr id="36" name="T17/node:step-6:heading-rule"/>
+          <p:cNvSpPr/>
+          <p:nvPr/>
+        </p:nvSpPr>
+        <p:spPr>
+          <a:xfrm>
+            <a:off x="609600" y="4431316"/>
             <a:ext cx="2266950" cy="0"/>
           </a:xfrm>
           <a:prstGeom prst="line">
@@ -8416,7 +8681,7 @@
           <a:noFill/>
           <a:ln w="19050">
             <a:solidFill>
-              <a:srgbClr val="173C70"/>
+              <a:srgbClr val="146C63"/>
             </a:solidFill>
             <a:prstDash val="solid"/>
           </a:ln>
@@ -8424,13 +8689,13 @@
       </p:sp>
       <p:sp>
         <p:nvSpPr>
-          <p:cNvPr id="32" name="T17/node:step-6:label"/>
-          <p:cNvSpPr/>
-          <p:nvPr/>
-        </p:nvSpPr>
-        <p:spPr>
-          <a:xfrm>
-            <a:off x="723900" y="4857750"/>
+          <p:cNvPr id="37" name="T17/node:step-6:label"/>
+          <p:cNvSpPr/>
+          <p:nvPr/>
+        </p:nvSpPr>
+        <p:spPr>
+          <a:xfrm>
+            <a:off x="723900" y="4526566"/>
             <a:ext cx="2038350" cy="266700"/>
           </a:xfrm>
           <a:prstGeom prst="rect">
@@ -8452,7 +8717,7 @@
             <a:r>
               <a:rPr lang="zh-CN" altLang="en-US" sz="1800" b="1" dirty="0">
                 <a:solidFill>
-                  <a:srgbClr val="173C70"/>
+                  <a:srgbClr val="146C63"/>
                 </a:solidFill>
                 <a:latin typeface="Noto Sans CJK SC" pitchFamily="34" charset="0"/>
                 <a:ea typeface="Noto Sans CJK SC" pitchFamily="34" charset="-122"/>
@@ -8466,14 +8731,56 @@
       </p:sp>
       <p:sp>
         <p:nvSpPr>
-          <p:cNvPr id="33" name="T17/card/region-1/frame"/>
-          <p:cNvSpPr/>
-          <p:nvPr/>
-        </p:nvSpPr>
-        <p:spPr>
-          <a:xfrm>
-            <a:off x="8629650" y="1409700"/>
-            <a:ext cx="3105150" cy="2114550"/>
+          <p:cNvPr id="38" name="T17/node:step-6:detail"/>
+          <p:cNvSpPr/>
+          <p:nvPr/>
+        </p:nvSpPr>
+        <p:spPr>
+          <a:xfrm>
+            <a:off x="723900" y="4840891"/>
+            <a:ext cx="2038350" cy="533400"/>
+          </a:xfrm>
+          <a:prstGeom prst="rect">
+            <a:avLst/>
+          </a:prstGeom>
+          <a:noFill/>
+          <a:ln/>
+        </p:spPr>
+        <p:txBody>
+          <a:bodyPr wrap="none" lIns="0" tIns="0" rIns="0" bIns="0" rtlCol="0" anchor="t"/>
+          <a:lstStyle/>
+          <a:p>
+            <a:pPr algn="ctr" indent="0" marL="0">
+              <a:lnSpc>
+                <a:spcPts val="1947"/>
+              </a:lnSpc>
+              <a:buNone/>
+            </a:pPr>
+            <a:r>
+              <a:rPr lang="zh-CN" altLang="en-US" sz="1650" dirty="0">
+                <a:solidFill>
+                  <a:srgbClr val="1C2430"/>
+                </a:solidFill>
+                <a:latin typeface="Noto Sans CJK SC" pitchFamily="34" charset="0"/>
+                <a:ea typeface="Noto Sans CJK SC" pitchFamily="34" charset="-122"/>
+                <a:cs typeface="Noto Sans CJK SC" pitchFamily="34" charset="-120"/>
+              </a:rPr>
+              <a:t>效应与区间</a:t>
+            </a:r>
+            <a:endParaRPr lang="zh-CN" sz="1650" dirty="0"/>
+          </a:p>
+        </p:txBody>
+      </p:sp>
+      <p:sp>
+        <p:nvSpPr>
+          <p:cNvPr id="39" name="T17/card/region-1/frame"/>
+          <p:cNvSpPr/>
+          <p:nvPr/>
+        </p:nvSpPr>
+        <p:spPr>
+          <a:xfrm>
+            <a:off x="8629650" y="1226534"/>
+            <a:ext cx="3105150" cy="2195894"/>
           </a:xfrm>
           <a:prstGeom prst="rect">
             <a:avLst/>
@@ -8491,20 +8798,20 @@
       </p:sp>
       <p:sp>
         <p:nvSpPr>
-          <p:cNvPr id="34" name="T17/card/region-1/heading-fill"/>
-          <p:cNvSpPr/>
-          <p:nvPr/>
-        </p:nvSpPr>
-        <p:spPr>
-          <a:xfrm>
-            <a:off x="8639175" y="1419225"/>
+          <p:cNvPr id="40" name="T17/card/region-1/heading-fill"/>
+          <p:cNvSpPr/>
+          <p:nvPr/>
+        </p:nvSpPr>
+        <p:spPr>
+          <a:xfrm>
+            <a:off x="8639175" y="1236059"/>
             <a:ext cx="3086100" cy="371475"/>
           </a:xfrm>
           <a:prstGeom prst="rect">
             <a:avLst/>
           </a:prstGeom>
           <a:solidFill>
-            <a:srgbClr val="EEF3F8"/>
+            <a:srgbClr val="EAF2FA"/>
           </a:solidFill>
           <a:ln w="12700">
             <a:solidFill>
@@ -8518,13 +8825,13 @@
       </p:sp>
       <p:sp>
         <p:nvSpPr>
-          <p:cNvPr id="35" name="T17/card/region-1/heading-rule"/>
-          <p:cNvSpPr/>
-          <p:nvPr/>
-        </p:nvSpPr>
-        <p:spPr>
-          <a:xfrm>
-            <a:off x="8629650" y="1790700"/>
+          <p:cNvPr id="41" name="T17/card/region-1/heading-rule"/>
+          <p:cNvSpPr/>
+          <p:nvPr/>
+        </p:nvSpPr>
+        <p:spPr>
+          <a:xfrm>
+            <a:off x="8629650" y="1607534"/>
             <a:ext cx="3105150" cy="0"/>
           </a:xfrm>
           <a:prstGeom prst="line">
@@ -8541,14 +8848,14 @@
       </p:sp>
       <p:sp>
         <p:nvSpPr>
-          <p:cNvPr id="36" name="T17/card/region-1/title"/>
-          <p:cNvSpPr/>
-          <p:nvPr/>
-        </p:nvSpPr>
-        <p:spPr>
-          <a:xfrm>
-            <a:off x="8753475" y="1466850"/>
-            <a:ext cx="2857500" cy="276225"/>
+          <p:cNvPr id="42" name="T17/card/region-1/title"/>
+          <p:cNvSpPr/>
+          <p:nvPr/>
+        </p:nvSpPr>
+        <p:spPr>
+          <a:xfrm>
+            <a:off x="8753475" y="1274159"/>
+            <a:ext cx="2857500" cy="295275"/>
           </a:xfrm>
           <a:prstGeom prst="rect">
             <a:avLst/>
@@ -8562,14 +8869,14 @@
           <a:p>
             <a:pPr algn="l" indent="0" marL="0">
               <a:lnSpc>
-                <a:spcPts val="2070"/>
+                <a:spcPts val="2242"/>
               </a:lnSpc>
               <a:buNone/>
             </a:pPr>
             <a:r>
-              <a:rPr lang="zh-CN" altLang="en-US" sz="1800" b="1" dirty="0">
+              <a:rPr lang="zh-CN" altLang="en-US" sz="1950" b="1" dirty="0">
                 <a:solidFill>
-                  <a:srgbClr val="173C70"/>
+                  <a:srgbClr val="235E96"/>
                 </a:solidFill>
                 <a:latin typeface="Noto Sans CJK SC" pitchFamily="34" charset="0"/>
                 <a:ea typeface="Noto Sans CJK SC" pitchFamily="34" charset="-122"/>
@@ -8577,20 +8884,20 @@
               </a:rPr>
               <a:t>校准与误差</a:t>
             </a:r>
-            <a:endParaRPr lang="zh-CN" sz="1800" dirty="0"/>
+            <a:endParaRPr lang="zh-CN" sz="1950" dirty="0"/>
           </a:p>
         </p:txBody>
       </p:sp>
       <p:sp>
         <p:nvSpPr>
-          <p:cNvPr id="37" name="T17/card/region-1/body"/>
-          <p:cNvSpPr/>
-          <p:nvPr/>
-        </p:nvSpPr>
-        <p:spPr>
-          <a:xfrm>
-            <a:off x="8763000" y="1905000"/>
-            <a:ext cx="2838450" cy="1524000"/>
+          <p:cNvPr id="43" name="T17/card/region-1/body"/>
+          <p:cNvSpPr/>
+          <p:nvPr/>
+        </p:nvSpPr>
+        <p:spPr>
+          <a:xfrm>
+            <a:off x="8763000" y="1712309"/>
+            <a:ext cx="2838450" cy="1614868"/>
           </a:xfrm>
           <a:prstGeom prst="rect">
             <a:avLst/>
@@ -8604,12 +8911,12 @@
           <a:p>
             <a:pPr algn="l" indent="0" marL="0">
               <a:lnSpc>
-                <a:spcPts val="2139"/>
+                <a:spcPts val="2232"/>
               </a:lnSpc>
               <a:buNone/>
             </a:pPr>
             <a:r>
-              <a:rPr lang="zh-CN" altLang="en-US" sz="1725" dirty="0">
+              <a:rPr lang="zh-CN" altLang="en-US" sz="1800" dirty="0">
                 <a:solidFill>
                   <a:srgbClr val="1C2430"/>
                 </a:solidFill>
@@ -8617,21 +8924,38 @@
                 <a:ea typeface="Noto Sans CJK SC" pitchFamily="34" charset="-122"/>
                 <a:cs typeface="Noto Sans CJK SC" pitchFamily="34" charset="-120"/>
               </a:rPr>
-              <a:t>报告仪器校准与测量不确定</a:t>
-            </a:r>
-            <a:endParaRPr lang="zh-CN" sz="1725" dirty="0"/>
-          </a:p>
-          <a:p>
+              <a:t>报告仪器校准与测量</a:t>
+            </a:r>
             <a:pPr algn="l" indent="0" marL="0">
               <a:lnSpc>
-                <a:spcPts val="2139"/>
+                <a:spcPts val="2232"/>
               </a:lnSpc>
               <a:buNone/>
             </a:pPr>
             <a:r>
-              <a:rPr lang="zh-CN" altLang="en-US" sz="1725" dirty="0">
+              <a:rPr lang="zh-CN" altLang="en-US" sz="1800" b="1" dirty="0">
                 <a:solidFill>
-                  <a:srgbClr val="1C2430"/>
+                  <a:srgbClr val="235E96"/>
+                </a:solidFill>
+                <a:latin typeface="Noto Sans CJK SC" pitchFamily="34" charset="0"/>
+                <a:ea typeface="Noto Sans CJK SC" pitchFamily="34" charset="-122"/>
+                <a:cs typeface="Noto Sans CJK SC" pitchFamily="34" charset="-120"/>
+              </a:rPr>
+              <a:t>不确定</a:t>
+            </a:r>
+            <a:endParaRPr lang="zh-CN" sz="1800" dirty="0"/>
+          </a:p>
+          <a:p>
+            <a:pPr algn="l" indent="0" marL="0">
+              <a:lnSpc>
+                <a:spcPts val="2232"/>
+              </a:lnSpc>
+              <a:buNone/>
+            </a:pPr>
+            <a:r>
+              <a:rPr lang="zh-CN" altLang="en-US" sz="1800" b="1" dirty="0">
+                <a:solidFill>
+                  <a:srgbClr val="235E96"/>
                 </a:solidFill>
                 <a:latin typeface="Noto Sans CJK SC" pitchFamily="34" charset="0"/>
                 <a:ea typeface="Noto Sans CJK SC" pitchFamily="34" charset="-122"/>
@@ -8639,17 +8963,17 @@
               </a:rPr>
               <a:t>性</a:t>
             </a:r>
-            <a:endParaRPr lang="zh-CN" sz="1725" dirty="0"/>
+            <a:endParaRPr lang="zh-CN" sz="1800" dirty="0"/>
           </a:p>
           <a:p>
             <a:pPr algn="l" indent="0" marL="0">
               <a:lnSpc>
-                <a:spcPts val="2139"/>
+                <a:spcPts val="2232"/>
               </a:lnSpc>
               <a:buNone/>
             </a:pPr>
             <a:r>
-              <a:rPr lang="zh-CN" altLang="en-US" sz="1725" dirty="0">
+              <a:rPr lang="zh-CN" altLang="en-US" sz="1800" dirty="0">
                 <a:solidFill>
                   <a:srgbClr val="1C2430"/>
                 </a:solidFill>
@@ -8659,17 +8983,17 @@
               </a:rPr>
               <a:t>记录异常检测和人工复核规</a:t>
             </a:r>
-            <a:endParaRPr lang="zh-CN" sz="1725" dirty="0"/>
+            <a:endParaRPr lang="zh-CN" sz="1800" dirty="0"/>
           </a:p>
           <a:p>
             <a:pPr algn="l" indent="0" marL="0">
               <a:lnSpc>
-                <a:spcPts val="2139"/>
+                <a:spcPts val="2232"/>
               </a:lnSpc>
               <a:buNone/>
             </a:pPr>
             <a:r>
-              <a:rPr lang="zh-CN" altLang="en-US" sz="1725" dirty="0">
+              <a:rPr lang="zh-CN" altLang="en-US" sz="1800" dirty="0">
                 <a:solidFill>
                   <a:srgbClr val="1C2430"/>
                 </a:solidFill>
@@ -8679,19 +9003,19 @@
               </a:rPr>
               <a:t>则</a:t>
             </a:r>
-            <a:endParaRPr lang="zh-CN" sz="1725" dirty="0"/>
+            <a:endParaRPr lang="zh-CN" sz="1800" dirty="0"/>
           </a:p>
         </p:txBody>
       </p:sp>
       <p:sp>
         <p:nvSpPr>
-          <p:cNvPr id="38" name="T17/card/region-2/heading-rule"/>
-          <p:cNvSpPr/>
-          <p:nvPr/>
-        </p:nvSpPr>
-        <p:spPr>
-          <a:xfrm>
-            <a:off x="8629650" y="4114800"/>
+          <p:cNvPr id="44" name="T17/card/region-2/heading-rule"/>
+          <p:cNvSpPr/>
+          <p:nvPr/>
+        </p:nvSpPr>
+        <p:spPr>
+          <a:xfrm>
+            <a:off x="8629650" y="4021741"/>
             <a:ext cx="3105150" cy="0"/>
           </a:xfrm>
           <a:prstGeom prst="line">
@@ -8708,13 +9032,13 @@
       </p:sp>
       <p:sp>
         <p:nvSpPr>
-          <p:cNvPr id="39" name="T17/card/region-2/heading-mark"/>
-          <p:cNvSpPr/>
-          <p:nvPr/>
-        </p:nvSpPr>
-        <p:spPr>
-          <a:xfrm>
-            <a:off x="8629650" y="4114800"/>
+          <p:cNvPr id="45" name="T17/card/region-2/heading-mark"/>
+          <p:cNvSpPr/>
+          <p:nvPr/>
+        </p:nvSpPr>
+        <p:spPr>
+          <a:xfrm>
+            <a:off x="8629650" y="4021741"/>
             <a:ext cx="342900" cy="0"/>
           </a:xfrm>
           <a:prstGeom prst="line">
@@ -8723,7 +9047,7 @@
           <a:noFill/>
           <a:ln w="17145">
             <a:solidFill>
-              <a:srgbClr val="173C70"/>
+              <a:srgbClr val="536A7A"/>
             </a:solidFill>
             <a:prstDash val="solid"/>
           </a:ln>
@@ -8731,13 +9055,13 @@
       </p:sp>
       <p:sp>
         <p:nvSpPr>
-          <p:cNvPr id="40" name="T17/card/region-2/title"/>
-          <p:cNvSpPr/>
-          <p:nvPr/>
-        </p:nvSpPr>
-        <p:spPr>
-          <a:xfrm>
-            <a:off x="8629650" y="3771900"/>
+          <p:cNvPr id="46" name="T17/card/region-2/title"/>
+          <p:cNvSpPr/>
+          <p:nvPr/>
+        </p:nvSpPr>
+        <p:spPr>
+          <a:xfrm>
+            <a:off x="8629650" y="3678841"/>
             <a:ext cx="3105150" cy="323850"/>
           </a:xfrm>
           <a:prstGeom prst="rect">
@@ -8752,14 +9076,14 @@
           <a:p>
             <a:pPr algn="l" indent="0" marL="0">
               <a:lnSpc>
-                <a:spcPts val="2156"/>
+                <a:spcPts val="2242"/>
               </a:lnSpc>
               <a:buNone/>
             </a:pPr>
             <a:r>
-              <a:rPr lang="zh-CN" altLang="en-US" sz="1875" b="1" dirty="0">
+              <a:rPr lang="zh-CN" altLang="en-US" sz="1950" b="1" dirty="0">
                 <a:solidFill>
-                  <a:srgbClr val="173C70"/>
+                  <a:srgbClr val="536A7A"/>
                 </a:solidFill>
                 <a:latin typeface="Noto Sans CJK SC" pitchFamily="34" charset="0"/>
                 <a:ea typeface="Noto Sans CJK SC" pitchFamily="34" charset="-122"/>
@@ -8767,20 +9091,20 @@
               </a:rPr>
               <a:t>分析单位</a:t>
             </a:r>
-            <a:endParaRPr lang="zh-CN" sz="1875" dirty="0"/>
+            <a:endParaRPr lang="zh-CN" sz="1950" dirty="0"/>
           </a:p>
         </p:txBody>
       </p:sp>
       <p:sp>
         <p:nvSpPr>
-          <p:cNvPr id="41" name="T17/card/region-2/body"/>
-          <p:cNvSpPr/>
-          <p:nvPr/>
-        </p:nvSpPr>
-        <p:spPr>
-          <a:xfrm>
-            <a:off x="8629650" y="4248150"/>
-            <a:ext cx="3105150" cy="1733550"/>
+          <p:cNvPr id="47" name="T17/card/region-2/body"/>
+          <p:cNvSpPr/>
+          <p:nvPr/>
+        </p:nvSpPr>
+        <p:spPr>
+          <a:xfrm>
+            <a:off x="8629650" y="4155091"/>
+            <a:ext cx="3105150" cy="1820704"/>
           </a:xfrm>
           <a:prstGeom prst="rect">
             <a:avLst/>
@@ -8875,7 +9199,7 @@
       </p:sp>
       <p:sp>
         <p:nvSpPr>
-          <p:cNvPr id="42" name="T17/sources"/>
+          <p:cNvPr id="48" name="T17/sources"/>
           <p:cNvSpPr/>
           <p:nvPr/>
         </p:nvSpPr>
@@ -8909,7 +9233,7 @@
                 <a:ea typeface="Noto Sans CJK SC" pitchFamily="34" charset="-122"/>
                 <a:cs typeface="Noto Sans CJK SC" pitchFamily="34" charset="-120"/>
               </a:rPr>
-              <a:t>T1 · 2026 · 待替换</a:t>
+              <a:t>T1 · 2026 · 书目占位；图表均为合成示例</a:t>
             </a:r>
             <a:endParaRPr lang="zh-CN" sz="1125" dirty="0"/>
           </a:p>
@@ -9018,14 +9342,14 @@
       </p:sp>
       <p:sp>
         <p:nvSpPr>
-          <p:cNvPr id="4" name="T18/kicker"/>
-          <p:cNvSpPr/>
-          <p:nvPr/>
-        </p:nvSpPr>
-        <p:spPr>
-          <a:xfrm>
-            <a:off x="457200" y="152400"/>
-            <a:ext cx="11277600" cy="190500"/>
+          <p:cNvPr id="4" name="T18/title"/>
+          <p:cNvSpPr/>
+          <p:nvPr/>
+        </p:nvSpPr>
+        <p:spPr>
+          <a:xfrm>
+            <a:off x="457200" y="209550"/>
+            <a:ext cx="11277600" cy="438150"/>
           </a:xfrm>
           <a:prstGeom prst="rect">
             <a:avLst/>
@@ -9039,54 +9363,12 @@
           <a:p>
             <a:pPr algn="l" indent="0" marL="0">
               <a:lnSpc>
-                <a:spcPts val="1320"/>
+                <a:spcPts val="3360"/>
               </a:lnSpc>
               <a:buNone/>
             </a:pPr>
             <a:r>
-              <a:rPr lang="zh-CN" altLang="en-US" sz="1200" dirty="0">
-                <a:solidFill>
-                  <a:srgbClr val="515B68"/>
-                </a:solidFill>
-                <a:latin typeface="Noto Sans CJK SC" pitchFamily="34" charset="0"/>
-                <a:ea typeface="Noto Sans CJK SC" pitchFamily="34" charset="-122"/>
-                <a:cs typeface="Noto Sans CJK SC" pitchFamily="34" charset="-120"/>
-              </a:rPr>
-              <a:t>结构模板 / 占位说明与合成数据</a:t>
-            </a:r>
-            <a:endParaRPr lang="zh-CN" sz="1200" dirty="0"/>
-          </a:p>
-        </p:txBody>
-      </p:sp>
-      <p:sp>
-        <p:nvSpPr>
-          <p:cNvPr id="5" name="T18/title"/>
-          <p:cNvSpPr/>
-          <p:nvPr/>
-        </p:nvSpPr>
-        <p:spPr>
-          <a:xfrm>
-            <a:off x="457200" y="381000"/>
-            <a:ext cx="11277600" cy="400050"/>
-          </a:xfrm>
-          <a:prstGeom prst="rect">
-            <a:avLst/>
-          </a:prstGeom>
-          <a:noFill/>
-          <a:ln/>
-        </p:spPr>
-        <p:txBody>
-          <a:bodyPr wrap="none" lIns="0" tIns="0" rIns="0" bIns="0" rtlCol="0" anchor="t"/>
-          <a:lstStyle/>
-          <a:p>
-            <a:pPr algn="l" indent="0" marL="0">
-              <a:lnSpc>
-                <a:spcPts val="2856"/>
-              </a:lnSpc>
-              <a:buNone/>
-            </a:pPr>
-            <a:r>
-              <a:rPr lang="zh-CN" altLang="en-US" sz="2550" b="1" dirty="0">
+              <a:rPr lang="zh-CN" altLang="en-US" sz="3000" b="1" dirty="0">
                 <a:solidFill>
                   <a:srgbClr val="1C2430"/>
                 </a:solidFill>
@@ -9096,74 +9378,55 @@
               </a:rPr>
               <a:t>参数与复现实验协议</a:t>
             </a:r>
-            <a:endParaRPr lang="zh-CN" sz="2550" dirty="0"/>
+            <a:endParaRPr lang="zh-CN" sz="3000" dirty="0"/>
           </a:p>
         </p:txBody>
       </p:sp>
       <p:sp>
         <p:nvSpPr>
-          <p:cNvPr id="6" name="T18/header-rule"/>
-          <p:cNvSpPr/>
-          <p:nvPr/>
-        </p:nvSpPr>
-        <p:spPr>
-          <a:xfrm>
-            <a:off x="457200" y="876300"/>
+          <p:cNvPr id="5" name="T18/header-rule"/>
+          <p:cNvSpPr/>
+          <p:nvPr/>
+        </p:nvSpPr>
+        <p:spPr>
+          <a:xfrm>
+            <a:off x="457200" y="752475"/>
             <a:ext cx="11277600" cy="0"/>
           </a:xfrm>
           <a:prstGeom prst="line">
             <a:avLst/>
           </a:prstGeom>
           <a:noFill/>
-          <a:ln w="11430">
+          <a:ln w="10478">
+            <a:solidFill>
+              <a:srgbClr val="BEC8D4"/>
+            </a:solidFill>
+            <a:prstDash val="solid"/>
+          </a:ln>
+        </p:spPr>
+      </p:sp>
+      <p:sp>
+        <p:nvSpPr>
+          <p:cNvPr id="6" name="T18/header-accent"/>
+          <p:cNvSpPr/>
+          <p:nvPr/>
+        </p:nvSpPr>
+        <p:spPr>
+          <a:xfrm>
+            <a:off x="457200" y="752475"/>
+            <a:ext cx="704850" cy="0"/>
+          </a:xfrm>
+          <a:prstGeom prst="line">
+            <a:avLst/>
+          </a:prstGeom>
+          <a:noFill/>
+          <a:ln w="28575">
             <a:solidFill>
               <a:srgbClr val="173C70"/>
             </a:solidFill>
             <a:prstDash val="solid"/>
           </a:ln>
         </p:spPr>
-      </p:sp>
-      <p:sp>
-        <p:nvSpPr>
-          <p:cNvPr id="7" name="T18/takeaway"/>
-          <p:cNvSpPr/>
-          <p:nvPr/>
-        </p:nvSpPr>
-        <p:spPr>
-          <a:xfrm>
-            <a:off x="457200" y="5695950"/>
-            <a:ext cx="7086600" cy="400050"/>
-          </a:xfrm>
-          <a:prstGeom prst="rect">
-            <a:avLst/>
-          </a:prstGeom>
-          <a:noFill/>
-          <a:ln/>
-        </p:spPr>
-        <p:txBody>
-          <a:bodyPr wrap="none" lIns="0" tIns="0" rIns="0" bIns="0" rtlCol="0" anchor="t"/>
-          <a:lstStyle/>
-          <a:p>
-            <a:pPr algn="l" indent="0" marL="0">
-              <a:lnSpc>
-                <a:spcPts val="2160"/>
-              </a:lnSpc>
-              <a:buNone/>
-            </a:pPr>
-            <a:r>
-              <a:rPr lang="zh-CN" altLang="en-US" sz="1800" b="1" dirty="0">
-                <a:solidFill>
-                  <a:srgbClr val="173C70"/>
-                </a:solidFill>
-                <a:latin typeface="Noto Sans CJK SC" pitchFamily="34" charset="0"/>
-                <a:ea typeface="Noto Sans CJK SC" pitchFamily="34" charset="-122"/>
-                <a:cs typeface="Noto Sans CJK SC" pitchFamily="34" charset="-120"/>
-              </a:rPr>
-              <a:t>解释必须由本页证据支持，并保留样本、对照与适用条件。</a:t>
-            </a:r>
-            <a:endParaRPr lang="zh-CN" sz="1800" dirty="0"/>
-          </a:p>
-        </p:txBody>
       </p:sp>
       <p:graphicFrame>
         <p:nvGraphicFramePr>
@@ -9180,7 +9443,7 @@
           </p:nvPr>
         </p:nvGraphicFramePr>
         <p:xfrm>
-          <a:off x="457200" y="1409700"/>
+          <a:off x="457200" y="1226534"/>
           <a:ext cx="7086600" cy="2403729"/>
         </p:xfrm>
         <a:graphic>
@@ -10182,13 +10445,13 @@
       </p:graphicFrame>
       <p:sp>
         <p:nvSpPr>
-          <p:cNvPr id="9" name="T18/table-caption"/>
-          <p:cNvSpPr/>
-          <p:nvPr/>
-        </p:nvSpPr>
-        <p:spPr>
-          <a:xfrm>
-            <a:off x="457200" y="3880104"/>
+          <p:cNvPr id="8" name="T18/table-caption"/>
+          <p:cNvSpPr/>
+          <p:nvPr/>
+        </p:nvSpPr>
+        <p:spPr>
+          <a:xfrm>
+            <a:off x="457200" y="3696938"/>
             <a:ext cx="7086600" cy="209550"/>
           </a:xfrm>
           <a:prstGeom prst="rect">
@@ -10224,13 +10487,13 @@
       </p:sp>
       <p:sp>
         <p:nvSpPr>
-          <p:cNvPr id="10" name="T18/card/region-1/base-rule"/>
-          <p:cNvSpPr/>
-          <p:nvPr/>
-        </p:nvSpPr>
-        <p:spPr>
-          <a:xfrm>
-            <a:off x="7886700" y="2800350"/>
+          <p:cNvPr id="9" name="T18/card/region-1/base-rule"/>
+          <p:cNvSpPr/>
+          <p:nvPr/>
+        </p:nvSpPr>
+        <p:spPr>
+          <a:xfrm>
+            <a:off x="7886700" y="3343275"/>
             <a:ext cx="3848100" cy="0"/>
           </a:xfrm>
           <a:prstGeom prst="line">
@@ -10247,20 +10510,20 @@
       </p:sp>
       <p:sp>
         <p:nvSpPr>
-          <p:cNvPr id="11" name="T18/card/region-1/side-mark"/>
-          <p:cNvSpPr/>
-          <p:nvPr/>
-        </p:nvSpPr>
-        <p:spPr>
-          <a:xfrm>
-            <a:off x="7886700" y="1409700"/>
+          <p:cNvPr id="10" name="T18/card/region-1/side-mark"/>
+          <p:cNvSpPr/>
+          <p:nvPr/>
+        </p:nvSpPr>
+        <p:spPr>
+          <a:xfrm>
+            <a:off x="7886700" y="1225772"/>
             <a:ext cx="47625" cy="295275"/>
           </a:xfrm>
           <a:prstGeom prst="rect">
             <a:avLst/>
           </a:prstGeom>
           <a:solidFill>
-            <a:srgbClr val="173C70"/>
+            <a:srgbClr val="536A7A"/>
           </a:solidFill>
           <a:ln w="12700">
             <a:solidFill>
@@ -10274,13 +10537,13 @@
       </p:sp>
       <p:sp>
         <p:nvSpPr>
-          <p:cNvPr id="12" name="T18/card/region-1/title"/>
-          <p:cNvSpPr/>
-          <p:nvPr/>
-        </p:nvSpPr>
-        <p:spPr>
-          <a:xfrm>
-            <a:off x="8039100" y="1409700"/>
+          <p:cNvPr id="11" name="T18/card/region-1/title"/>
+          <p:cNvSpPr/>
+          <p:nvPr/>
+        </p:nvSpPr>
+        <p:spPr>
+          <a:xfrm>
+            <a:off x="8039100" y="1225772"/>
             <a:ext cx="3695700" cy="304800"/>
           </a:xfrm>
           <a:prstGeom prst="rect">
@@ -10295,14 +10558,14 @@
           <a:p>
             <a:pPr algn="l" indent="0" marL="0">
               <a:lnSpc>
-                <a:spcPts val="2070"/>
+                <a:spcPts val="2242"/>
               </a:lnSpc>
               <a:buNone/>
             </a:pPr>
             <a:r>
-              <a:rPr lang="zh-CN" altLang="en-US" sz="1800" b="1" dirty="0">
+              <a:rPr lang="zh-CN" altLang="en-US" sz="1950" b="1" dirty="0">
                 <a:solidFill>
-                  <a:srgbClr val="173C70"/>
+                  <a:srgbClr val="536A7A"/>
                 </a:solidFill>
                 <a:latin typeface="Noto Sans CJK SC" pitchFamily="34" charset="0"/>
                 <a:ea typeface="Noto Sans CJK SC" pitchFamily="34" charset="-122"/>
@@ -10310,20 +10573,20 @@
               </a:rPr>
               <a:t>训练条件</a:t>
             </a:r>
-            <a:endParaRPr lang="zh-CN" sz="1800" dirty="0"/>
+            <a:endParaRPr lang="zh-CN" sz="1950" dirty="0"/>
           </a:p>
         </p:txBody>
       </p:sp>
       <p:sp>
         <p:nvSpPr>
-          <p:cNvPr id="13" name="T18/card/region-1/body"/>
-          <p:cNvSpPr/>
-          <p:nvPr/>
-        </p:nvSpPr>
-        <p:spPr>
-          <a:xfrm>
-            <a:off x="8039100" y="1828800"/>
-            <a:ext cx="3695700" cy="876300"/>
+          <p:cNvPr id="12" name="T18/card/region-1/body"/>
+          <p:cNvSpPr/>
+          <p:nvPr/>
+        </p:nvSpPr>
+        <p:spPr>
+          <a:xfrm>
+            <a:off x="8039100" y="1644872"/>
+            <a:ext cx="3695700" cy="1603153"/>
           </a:xfrm>
           <a:prstGeom prst="rect">
             <a:avLst/>
@@ -10337,12 +10600,12 @@
           <a:p>
             <a:pPr algn="l" indent="0" marL="0">
               <a:lnSpc>
-                <a:spcPts val="2139"/>
+                <a:spcPts val="2232"/>
               </a:lnSpc>
               <a:buNone/>
             </a:pPr>
             <a:r>
-              <a:rPr lang="zh-CN" altLang="en-US" sz="1725" dirty="0">
+              <a:rPr lang="zh-CN" altLang="en-US" sz="1800" dirty="0">
                 <a:solidFill>
                   <a:srgbClr val="1C2430"/>
                 </a:solidFill>
@@ -10352,17 +10615,17 @@
               </a:rPr>
               <a:t>固定数据版本、目标与停止规则</a:t>
             </a:r>
-            <a:endParaRPr lang="zh-CN" sz="1725" dirty="0"/>
+            <a:endParaRPr lang="zh-CN" sz="1800" dirty="0"/>
           </a:p>
           <a:p>
             <a:pPr algn="l" indent="0" marL="0">
               <a:lnSpc>
-                <a:spcPts val="2139"/>
+                <a:spcPts val="2232"/>
               </a:lnSpc>
               <a:buNone/>
             </a:pPr>
             <a:r>
-              <a:rPr lang="zh-CN" altLang="en-US" sz="1725" dirty="0">
+              <a:rPr lang="zh-CN" altLang="en-US" sz="1800" dirty="0">
                 <a:solidFill>
                   <a:srgbClr val="1C2430"/>
                 </a:solidFill>
@@ -10372,19 +10635,19 @@
               </a:rPr>
               <a:t>记录种子和选择超参数的依据</a:t>
             </a:r>
-            <a:endParaRPr lang="zh-CN" sz="1725" dirty="0"/>
+            <a:endParaRPr lang="zh-CN" sz="1800" dirty="0"/>
           </a:p>
         </p:txBody>
       </p:sp>
       <p:sp>
         <p:nvSpPr>
-          <p:cNvPr id="14" name="T18/card/region-2/heading-rule"/>
-          <p:cNvSpPr/>
-          <p:nvPr/>
-        </p:nvSpPr>
-        <p:spPr>
-          <a:xfrm>
-            <a:off x="7886700" y="3352800"/>
+          <p:cNvPr id="13" name="T18/card/region-2/heading-rule"/>
+          <p:cNvSpPr/>
+          <p:nvPr/>
+        </p:nvSpPr>
+        <p:spPr>
+          <a:xfrm>
+            <a:off x="7886700" y="3962400"/>
             <a:ext cx="3848100" cy="0"/>
           </a:xfrm>
           <a:prstGeom prst="line">
@@ -10401,13 +10664,13 @@
       </p:sp>
       <p:sp>
         <p:nvSpPr>
-          <p:cNvPr id="15" name="T18/card/region-2/heading-mark"/>
-          <p:cNvSpPr/>
-          <p:nvPr/>
-        </p:nvSpPr>
-        <p:spPr>
-          <a:xfrm>
-            <a:off x="7886700" y="3352800"/>
+          <p:cNvPr id="14" name="T18/card/region-2/heading-mark"/>
+          <p:cNvSpPr/>
+          <p:nvPr/>
+        </p:nvSpPr>
+        <p:spPr>
+          <a:xfrm>
+            <a:off x="7886700" y="3962400"/>
             <a:ext cx="342900" cy="0"/>
           </a:xfrm>
           <a:prstGeom prst="line">
@@ -10416,7 +10679,7 @@
           <a:noFill/>
           <a:ln w="17145">
             <a:solidFill>
-              <a:srgbClr val="173C70"/>
+              <a:srgbClr val="536A7A"/>
             </a:solidFill>
             <a:prstDash val="solid"/>
           </a:ln>
@@ -10424,13 +10687,13 @@
       </p:sp>
       <p:sp>
         <p:nvSpPr>
-          <p:cNvPr id="16" name="T18/card/region-2/title"/>
-          <p:cNvSpPr/>
-          <p:nvPr/>
-        </p:nvSpPr>
-        <p:spPr>
-          <a:xfrm>
-            <a:off x="7886700" y="3009900"/>
+          <p:cNvPr id="15" name="T18/card/region-2/title"/>
+          <p:cNvSpPr/>
+          <p:nvPr/>
+        </p:nvSpPr>
+        <p:spPr>
+          <a:xfrm>
+            <a:off x="7886700" y="3619500"/>
             <a:ext cx="3848100" cy="323850"/>
           </a:xfrm>
           <a:prstGeom prst="rect">
@@ -10445,14 +10708,14 @@
           <a:p>
             <a:pPr algn="l" indent="0" marL="0">
               <a:lnSpc>
-                <a:spcPts val="2156"/>
+                <a:spcPts val="2242"/>
               </a:lnSpc>
               <a:buNone/>
             </a:pPr>
             <a:r>
-              <a:rPr lang="zh-CN" altLang="en-US" sz="1875" b="1" dirty="0">
+              <a:rPr lang="zh-CN" altLang="en-US" sz="1950" b="1" dirty="0">
                 <a:solidFill>
-                  <a:srgbClr val="173C70"/>
+                  <a:srgbClr val="536A7A"/>
                 </a:solidFill>
                 <a:latin typeface="Noto Sans CJK SC" pitchFamily="34" charset="0"/>
                 <a:ea typeface="Noto Sans CJK SC" pitchFamily="34" charset="-122"/>
@@ -10460,20 +10723,20 @@
               </a:rPr>
               <a:t>测试条件</a:t>
             </a:r>
-            <a:endParaRPr lang="zh-CN" sz="1875" dirty="0"/>
+            <a:endParaRPr lang="zh-CN" sz="1950" dirty="0"/>
           </a:p>
         </p:txBody>
       </p:sp>
       <p:sp>
         <p:nvSpPr>
-          <p:cNvPr id="17" name="T18/card/region-2/body"/>
-          <p:cNvSpPr/>
-          <p:nvPr/>
-        </p:nvSpPr>
-        <p:spPr>
-          <a:xfrm>
-            <a:off x="7886700" y="3486150"/>
-            <a:ext cx="3848100" cy="857250"/>
+          <p:cNvPr id="16" name="T18/card/region-2/body"/>
+          <p:cNvSpPr/>
+          <p:nvPr/>
+        </p:nvSpPr>
+        <p:spPr>
+          <a:xfrm>
+            <a:off x="7886700" y="4095750"/>
+            <a:ext cx="3848100" cy="1860328"/>
           </a:xfrm>
           <a:prstGeom prst="rect">
             <a:avLst/>
@@ -10528,14 +10791,14 @@
       </p:sp>
       <p:sp>
         <p:nvSpPr>
-          <p:cNvPr id="18" name="T18/card/region-3/frame"/>
-          <p:cNvSpPr/>
-          <p:nvPr/>
-        </p:nvSpPr>
-        <p:spPr>
-          <a:xfrm>
-            <a:off x="7886700" y="4733925"/>
-            <a:ext cx="3848100" cy="1285875"/>
+          <p:cNvPr id="17" name="T18/card/region-3/frame"/>
+          <p:cNvSpPr/>
+          <p:nvPr/>
+        </p:nvSpPr>
+        <p:spPr>
+          <a:xfrm>
+            <a:off x="457200" y="4258913"/>
+            <a:ext cx="7086600" cy="1301972"/>
           </a:xfrm>
           <a:prstGeom prst="rect">
             <a:avLst/>
@@ -10545,7 +10808,7 @@
           </a:solidFill>
           <a:ln w="14288">
             <a:solidFill>
-              <a:srgbClr val="173C70"/>
+              <a:srgbClr val="536A7A"/>
             </a:solidFill>
             <a:prstDash val="solid"/>
           </a:ln>
@@ -10553,13 +10816,13 @@
       </p:sp>
       <p:sp>
         <p:nvSpPr>
-          <p:cNvPr id="19" name="T18/card/region-3/title-cutout"/>
-          <p:cNvSpPr/>
-          <p:nvPr/>
-        </p:nvSpPr>
-        <p:spPr>
-          <a:xfrm>
-            <a:off x="8020050" y="4581525"/>
+          <p:cNvPr id="18" name="T18/card/region-3/title-cutout"/>
+          <p:cNvSpPr/>
+          <p:nvPr/>
+        </p:nvSpPr>
+        <p:spPr>
+          <a:xfrm>
+            <a:off x="590550" y="4106513"/>
             <a:ext cx="1085850" cy="323850"/>
           </a:xfrm>
           <a:prstGeom prst="rect">
@@ -10580,13 +10843,13 @@
       </p:sp>
       <p:sp>
         <p:nvSpPr>
-          <p:cNvPr id="20" name="T18/card/region-3/base-rule"/>
-          <p:cNvSpPr/>
-          <p:nvPr/>
-        </p:nvSpPr>
-        <p:spPr>
-          <a:xfrm>
-            <a:off x="8077200" y="5867400"/>
+          <p:cNvPr id="19" name="T18/card/region-3/base-rule"/>
+          <p:cNvSpPr/>
+          <p:nvPr/>
+        </p:nvSpPr>
+        <p:spPr>
+          <a:xfrm>
+            <a:off x="647700" y="5408485"/>
             <a:ext cx="333375" cy="0"/>
           </a:xfrm>
           <a:prstGeom prst="line">
@@ -10595,7 +10858,7 @@
           <a:noFill/>
           <a:ln w="28575">
             <a:solidFill>
-              <a:srgbClr val="173C70"/>
+              <a:srgbClr val="536A7A"/>
             </a:solidFill>
             <a:prstDash val="solid"/>
           </a:ln>
@@ -10603,14 +10866,14 @@
       </p:sp>
       <p:sp>
         <p:nvSpPr>
-          <p:cNvPr id="21" name="T18/card/region-3/title"/>
-          <p:cNvSpPr/>
-          <p:nvPr/>
-        </p:nvSpPr>
-        <p:spPr>
-          <a:xfrm>
-            <a:off x="8077200" y="4591050"/>
-            <a:ext cx="3467100" cy="361950"/>
+          <p:cNvPr id="20" name="T18/card/region-3/title"/>
+          <p:cNvSpPr/>
+          <p:nvPr/>
+        </p:nvSpPr>
+        <p:spPr>
+          <a:xfrm>
+            <a:off x="647700" y="4116038"/>
+            <a:ext cx="6705600" cy="361950"/>
           </a:xfrm>
           <a:prstGeom prst="rect">
             <a:avLst/>
@@ -10624,7 +10887,111 @@
           <a:p>
             <a:pPr algn="l" indent="0" marL="0">
               <a:lnSpc>
-                <a:spcPts val="2070"/>
+                <a:spcPts val="2242"/>
+              </a:lnSpc>
+              <a:buNone/>
+            </a:pPr>
+            <a:r>
+              <a:rPr lang="zh-CN" altLang="en-US" sz="1950" b="1" dirty="0">
+                <a:solidFill>
+                  <a:srgbClr val="536A7A"/>
+                </a:solidFill>
+                <a:latin typeface="Noto Sans CJK SC" pitchFamily="34" charset="0"/>
+                <a:ea typeface="Noto Sans CJK SC" pitchFamily="34" charset="-122"/>
+                <a:cs typeface="Noto Sans CJK SC" pitchFamily="34" charset="-120"/>
+              </a:rPr>
+              <a:t>复现材料</a:t>
+            </a:r>
+            <a:endParaRPr lang="zh-CN" sz="1950" dirty="0"/>
+          </a:p>
+        </p:txBody>
+      </p:sp>
+      <p:sp>
+        <p:nvSpPr>
+          <p:cNvPr id="21" name="T18/card/region-3/body"/>
+          <p:cNvSpPr/>
+          <p:nvPr/>
+        </p:nvSpPr>
+        <p:spPr>
+          <a:xfrm>
+            <a:off x="647700" y="4649438"/>
+            <a:ext cx="6705600" cy="720947"/>
+          </a:xfrm>
+          <a:prstGeom prst="rect">
+            <a:avLst/>
+          </a:prstGeom>
+          <a:noFill/>
+          <a:ln/>
+        </p:spPr>
+        <p:txBody>
+          <a:bodyPr wrap="none" lIns="0" tIns="0" rIns="0" bIns="0" rtlCol="0" anchor="t"/>
+          <a:lstStyle/>
+          <a:p>
+            <a:pPr algn="l" indent="0" marL="0">
+              <a:lnSpc>
+                <a:spcPts val="2232"/>
+              </a:lnSpc>
+              <a:buNone/>
+            </a:pPr>
+            <a:r>
+              <a:rPr lang="zh-CN" altLang="en-US" sz="1800" dirty="0">
+                <a:solidFill>
+                  <a:srgbClr val="1C2430"/>
+                </a:solidFill>
+                <a:latin typeface="Noto Sans CJK SC" pitchFamily="34" charset="0"/>
+                <a:ea typeface="Noto Sans CJK SC" pitchFamily="34" charset="-122"/>
+                <a:cs typeface="Noto Sans CJK SC" pitchFamily="34" charset="-120"/>
+              </a:rPr>
+              <a:t>代码、数据、参数和运行环境</a:t>
+            </a:r>
+            <a:endParaRPr lang="zh-CN" sz="1800" dirty="0"/>
+          </a:p>
+          <a:p>
+            <a:pPr algn="l" indent="0" marL="0">
+              <a:lnSpc>
+                <a:spcPts val="2232"/>
+              </a:lnSpc>
+              <a:buNone/>
+            </a:pPr>
+            <a:r>
+              <a:rPr lang="zh-CN" altLang="en-US" sz="1800" dirty="0">
+                <a:solidFill>
+                  <a:srgbClr val="1C2430"/>
+                </a:solidFill>
+                <a:latin typeface="Noto Sans CJK SC" pitchFamily="34" charset="0"/>
+                <a:ea typeface="Noto Sans CJK SC" pitchFamily="34" charset="-122"/>
+                <a:cs typeface="Noto Sans CJK SC" pitchFamily="34" charset="-120"/>
+              </a:rPr>
+              <a:t>明确哪些材料公开，哪些受限</a:t>
+            </a:r>
+            <a:endParaRPr lang="zh-CN" sz="1800" dirty="0"/>
+          </a:p>
+        </p:txBody>
+      </p:sp>
+      <p:sp>
+        <p:nvSpPr>
+          <p:cNvPr id="22" name="T18/takeaway"/>
+          <p:cNvSpPr/>
+          <p:nvPr/>
+        </p:nvSpPr>
+        <p:spPr>
+          <a:xfrm>
+            <a:off x="457200" y="5675186"/>
+            <a:ext cx="7086600" cy="276987"/>
+          </a:xfrm>
+          <a:prstGeom prst="rect">
+            <a:avLst/>
+          </a:prstGeom>
+          <a:noFill/>
+          <a:ln/>
+        </p:spPr>
+        <p:txBody>
+          <a:bodyPr wrap="none" lIns="0" tIns="0" rIns="0" bIns="0" rtlCol="0" anchor="t"/>
+          <a:lstStyle/>
+          <a:p>
+            <a:pPr algn="l" indent="0" marL="0">
+              <a:lnSpc>
+                <a:spcPts val="2160"/>
               </a:lnSpc>
               <a:buNone/>
             </a:pPr>
@@ -10637,71 +11004,9 @@
                 <a:ea typeface="Noto Sans CJK SC" pitchFamily="34" charset="-122"/>
                 <a:cs typeface="Noto Sans CJK SC" pitchFamily="34" charset="-120"/>
               </a:rPr>
-              <a:t>复现材料</a:t>
+              <a:t>统计口径、样本单位和适用条件需与原文一致</a:t>
             </a:r>
             <a:endParaRPr lang="zh-CN" sz="1800" dirty="0"/>
-          </a:p>
-        </p:txBody>
-      </p:sp>
-      <p:sp>
-        <p:nvSpPr>
-          <p:cNvPr id="22" name="T18/card/region-3/body"/>
-          <p:cNvSpPr/>
-          <p:nvPr/>
-        </p:nvSpPr>
-        <p:spPr>
-          <a:xfrm>
-            <a:off x="8077200" y="5124450"/>
-            <a:ext cx="3467100" cy="704850"/>
-          </a:xfrm>
-          <a:prstGeom prst="rect">
-            <a:avLst/>
-          </a:prstGeom>
-          <a:noFill/>
-          <a:ln/>
-        </p:spPr>
-        <p:txBody>
-          <a:bodyPr wrap="none" lIns="0" tIns="0" rIns="0" bIns="0" rtlCol="0" anchor="t"/>
-          <a:lstStyle/>
-          <a:p>
-            <a:pPr algn="l" indent="0" marL="0">
-              <a:lnSpc>
-                <a:spcPts val="2178"/>
-              </a:lnSpc>
-              <a:buNone/>
-            </a:pPr>
-            <a:r>
-              <a:rPr lang="zh-CN" altLang="en-US" sz="1650" dirty="0">
-                <a:solidFill>
-                  <a:srgbClr val="1C2430"/>
-                </a:solidFill>
-                <a:latin typeface="Noto Sans CJK SC" pitchFamily="34" charset="0"/>
-                <a:ea typeface="Noto Sans CJK SC" pitchFamily="34" charset="-122"/>
-                <a:cs typeface="Noto Sans CJK SC" pitchFamily="34" charset="-120"/>
-              </a:rPr>
-              <a:t>代码、数据、参数和运行环境</a:t>
-            </a:r>
-            <a:endParaRPr lang="zh-CN" sz="1650" dirty="0"/>
-          </a:p>
-          <a:p>
-            <a:pPr algn="l" indent="0" marL="0">
-              <a:lnSpc>
-                <a:spcPts val="2178"/>
-              </a:lnSpc>
-              <a:buNone/>
-            </a:pPr>
-            <a:r>
-              <a:rPr lang="zh-CN" altLang="en-US" sz="1650" dirty="0">
-                <a:solidFill>
-                  <a:srgbClr val="1C2430"/>
-                </a:solidFill>
-                <a:latin typeface="Noto Sans CJK SC" pitchFamily="34" charset="0"/>
-                <a:ea typeface="Noto Sans CJK SC" pitchFamily="34" charset="-122"/>
-                <a:cs typeface="Noto Sans CJK SC" pitchFamily="34" charset="-120"/>
-              </a:rPr>
-              <a:t>明确哪些材料公开，哪些受限</a:t>
-            </a:r>
-            <a:endParaRPr lang="zh-CN" sz="1650" dirty="0"/>
           </a:p>
         </p:txBody>
       </p:sp>
@@ -10741,7 +11046,7 @@
                 <a:ea typeface="Noto Sans CJK SC" pitchFamily="34" charset="-122"/>
                 <a:cs typeface="Noto Sans CJK SC" pitchFamily="34" charset="-120"/>
               </a:rPr>
-              <a:t>T1 · 2026 · 待替换</a:t>
+              <a:t>T1 · 2026 · 书目占位；图表均为合成示例</a:t>
             </a:r>
             <a:endParaRPr lang="zh-CN" sz="1125" dirty="0"/>
           </a:p>
